--- a/nextunicorn/BDCrops-Professional-Deck.pptx
+++ b/nextunicorn/BDCrops-Professional-Deck.pptx
@@ -29,7 +29,6 @@
     <p:sldId id="277" r:id="rId28"/>
     <p:sldId id="278" r:id="rId29"/>
     <p:sldId id="279" r:id="rId30"/>
-    <p:sldId id="280" r:id="rId31"/>
   </p:sldIdLst>
   <p:sldSz cx="12188952" cy="6858000" type="screen4x3"/>
   <p:notesSz cx="6858000" cy="9144000"/>
@@ -3122,14 +3121,57 @@
       <p:grpSpPr/>
       <p:sp>
         <p:nvSpPr>
-          <p:cNvPr id="2" name="TextBox 1"/>
+          <p:cNvPr id="2" name="Rectangle 1"/>
+          <p:cNvSpPr/>
+          <p:nvPr/>
+        </p:nvSpPr>
+        <p:spPr>
+          <a:xfrm>
+            <a:off x="0" y="0"/>
+            <a:ext cx="12188952" cy="109728"/>
+          </a:xfrm>
+          <a:prstGeom prst="rect">
+            <a:avLst/>
+          </a:prstGeom>
+          <a:solidFill>
+            <a:srgbClr val="1D9790"/>
+          </a:solidFill>
+          <a:ln>
+            <a:noFill/>
+          </a:ln>
+        </p:spPr>
+        <p:style>
+          <a:lnRef idx="1">
+            <a:schemeClr val="accent1"/>
+          </a:lnRef>
+          <a:fillRef idx="3">
+            <a:schemeClr val="accent1"/>
+          </a:fillRef>
+          <a:effectRef idx="2">
+            <a:schemeClr val="accent1"/>
+          </a:effectRef>
+          <a:fontRef idx="minor">
+            <a:schemeClr val="lt1"/>
+          </a:fontRef>
+        </p:style>
+        <p:txBody>
+          <a:bodyPr rtlCol="0" anchor="ctr"/>
+          <a:lstStyle/>
+          <a:p>
+            <a:pPr algn="ctr"/>
+          </a:p>
+        </p:txBody>
+      </p:sp>
+      <p:sp>
+        <p:nvSpPr>
+          <p:cNvPr id="3" name="TextBox 2"/>
           <p:cNvSpPr txBox="1"/>
           <p:nvPr/>
         </p:nvSpPr>
         <p:spPr>
           <a:xfrm>
-            <a:off x="548640" y="182880"/>
-            <a:ext cx="7315200" cy="457200"/>
+            <a:off x="548640" y="365760"/>
+            <a:ext cx="7315200" cy="548640"/>
           </a:xfrm>
           <a:prstGeom prst="rect">
             <a:avLst/>
@@ -3143,7 +3185,10 @@
           <a:lstStyle/>
           <a:p>
             <a:pPr algn="l">
-              <a:defRPr sz="3200" b="1">
+              <a:lnSpc>
+                <a:spcPct val="120000"/>
+              </a:lnSpc>
+              <a:defRPr sz="4000" b="1">
                 <a:solidFill>
                   <a:srgbClr val="1D9790"/>
                 </a:solidFill>
@@ -3157,14 +3202,14 @@
       </p:sp>
       <p:sp>
         <p:nvSpPr>
-          <p:cNvPr id="3" name="TextBox 2"/>
+          <p:cNvPr id="4" name="TextBox 3"/>
           <p:cNvSpPr txBox="1"/>
           <p:nvPr/>
         </p:nvSpPr>
         <p:spPr>
           <a:xfrm>
-            <a:off x="548640" y="640080"/>
-            <a:ext cx="7315200" cy="274320"/>
+            <a:off x="548640" y="1005840"/>
+            <a:ext cx="7315200" cy="365760"/>
           </a:xfrm>
           <a:prstGeom prst="rect">
             <a:avLst/>
@@ -3178,28 +3223,31 @@
           <a:lstStyle/>
           <a:p>
             <a:pPr algn="l">
-              <a:defRPr sz="1400" b="1">
-                <a:solidFill>
-                  <a:srgbClr val="13302B"/>
-                </a:solidFill>
-              </a:defRPr>
-            </a:pPr>
-            <a:r>
-              <a:t>INVESTOR PITCH — US$500K</a:t>
-            </a:r>
-          </a:p>
-        </p:txBody>
-      </p:sp>
-      <p:sp>
-        <p:nvSpPr>
-          <p:cNvPr id="4" name="TextBox 3"/>
+              <a:lnSpc>
+                <a:spcPct val="120000"/>
+              </a:lnSpc>
+              <a:defRPr sz="1600" b="1">
+                <a:solidFill>
+                  <a:srgbClr val="13302B"/>
+                </a:solidFill>
+              </a:defRPr>
+            </a:pPr>
+            <a:r>
+              <a:t>INVESTOR PITCH — US$500K — 8-Band + AquaCrop + DoF + BADC</a:t>
+            </a:r>
+          </a:p>
+        </p:txBody>
+      </p:sp>
+      <p:sp>
+        <p:nvSpPr>
+          <p:cNvPr id="5" name="TextBox 4"/>
           <p:cNvSpPr txBox="1"/>
           <p:nvPr/>
         </p:nvSpPr>
         <p:spPr>
           <a:xfrm>
-            <a:off x="548640" y="1005840"/>
-            <a:ext cx="7315200" cy="640080"/>
+            <a:off x="548640" y="1463040"/>
+            <a:ext cx="7315200" cy="457200"/>
           </a:xfrm>
           <a:prstGeom prst="rect">
             <a:avLst/>
@@ -3213,7 +3261,10 @@
           <a:lstStyle/>
           <a:p>
             <a:pPr algn="l">
-              <a:defRPr sz="1600" b="1">
+              <a:lnSpc>
+                <a:spcPct val="120000"/>
+              </a:lnSpc>
+              <a:defRPr sz="1800" b="1">
                 <a:solidFill>
                   <a:srgbClr val="1D9790"/>
                 </a:solidFill>
@@ -3227,14 +3278,14 @@
       </p:sp>
       <p:sp>
         <p:nvSpPr>
-          <p:cNvPr id="5" name="TextBox 4"/>
+          <p:cNvPr id="6" name="TextBox 5"/>
           <p:cNvSpPr txBox="1"/>
           <p:nvPr/>
         </p:nvSpPr>
         <p:spPr>
           <a:xfrm>
-            <a:off x="548640" y="1737360"/>
-            <a:ext cx="7315200" cy="365760"/>
+            <a:off x="548640" y="2103120"/>
+            <a:ext cx="5303520" cy="1371600"/>
           </a:xfrm>
           <a:prstGeom prst="rect">
             <a:avLst/>
@@ -3248,66 +3299,48 @@
           <a:lstStyle/>
           <a:p>
             <a:pPr algn="l">
-              <a:defRPr sz="1300" b="1">
-                <a:solidFill>
-                  <a:srgbClr val="13302B"/>
-                </a:solidFill>
-              </a:defRPr>
-            </a:pPr>
-            <a:r>
-              <a:t>AI + 8-Band Satellite Intelligence + Crop Digital Twin</a:t>
-            </a:r>
-          </a:p>
-        </p:txBody>
-      </p:sp>
-      <p:sp>
-        <p:nvSpPr>
-          <p:cNvPr id="6" name="TextBox 5"/>
-          <p:cNvSpPr txBox="1"/>
-          <p:nvPr/>
-        </p:nvSpPr>
-        <p:spPr>
-          <a:xfrm>
-            <a:off x="548640" y="2194560"/>
-            <a:ext cx="5029200" cy="914400"/>
-          </a:xfrm>
-          <a:prstGeom prst="rect">
-            <a:avLst/>
-          </a:prstGeom>
-          <a:noFill/>
-        </p:spPr>
-        <p:txBody>
-          <a:bodyPr wrap="square">
-            <a:spAutoFit/>
-          </a:bodyPr>
-          <a:lstStyle/>
-          <a:p>
-            <a:pPr algn="l">
-              <a:defRPr sz="1000" b="0">
-                <a:solidFill>
-                  <a:srgbClr val="13302B"/>
-                </a:solidFill>
-              </a:defRPr>
-            </a:pPr>
-            <a:r>
-              <a:t>BDCrops Technologies | Bangladesh</a:t>
-            </a:r>
-            <a:br/>
-            <a:r>
-              <a:t>bdcrops.com | matin@bdcrops.com | +8801717676441</a:t>
-            </a:r>
-            <a:br/>
-            <a:r>
-              <a:t>Dhaka, Bangladesh | NextUnicorn.Fund</a:t>
+              <a:lnSpc>
+                <a:spcPct val="140000"/>
+              </a:lnSpc>
+              <a:defRPr sz="1200" b="0">
+                <a:solidFill>
+                  <a:srgbClr val="13302B"/>
+                </a:solidFill>
+              </a:defRPr>
+            </a:pPr>
+            <a:r>
+              <a:t>AI + 8-Band Satellite Intelligence + Crop Digital Twin + AquaData</a:t>
             </a:r>
             <a:br/>
             <a:br/>
             <a:r>
-              <a:t>Seeking up to US$500K Strategic Investment</a:t>
+              <a:t>BDCrops Technologies | Bangladesh</a:t>
             </a:r>
             <a:br/>
             <a:r>
+              <a:t>Dhaka, Bangladesh</a:t>
+            </a:r>
+            <a:br/>
+            <a:r>
+              <a:t>bdcrops.com | matin@bdcrops.com</a:t>
+            </a:r>
+            <a:br/>
+            <a:r>
+              <a:t>+8801717676441</a:t>
+            </a:r>
+            <a:br/>
+            <a:br/>
+            <a:r>
+              <a:t>NextUnicorn.Fund — Seeking US$500K Strategic Investment</a:t>
+            </a:r>
+            <a:br/>
+            <a:r>
               <a:t>Abdul Matin | Founder &amp; CEO</a:t>
+            </a:r>
+            <a:br/>
+            <a:br/>
+            <a:r>
+              <a:t>Core Thesis: 8-band intelligence + AquaCrop Digital Twin + AI decision engine → recurring revenue</a:t>
             </a:r>
           </a:p>
         </p:txBody>
@@ -3328,8 +3361,8 @@
         </p:blipFill>
         <p:spPr>
           <a:xfrm>
-            <a:off x="8686800" y="548640"/>
-            <a:ext cx="2194560" cy="2194560"/>
+            <a:off x="8412480" y="731520"/>
+            <a:ext cx="2743200" cy="2743200"/>
           </a:xfrm>
           <a:prstGeom prst="rect">
             <a:avLst/>
@@ -3344,8 +3377,8 @@
         </p:nvSpPr>
         <p:spPr>
           <a:xfrm>
-            <a:off x="8686800" y="2926080"/>
-            <a:ext cx="2194560" cy="274320"/>
+            <a:off x="8412480" y="3657600"/>
+            <a:ext cx="2743200" cy="365760"/>
           </a:xfrm>
           <a:prstGeom prst="rect">
             <a:avLst/>
@@ -3359,7 +3392,10 @@
           <a:lstStyle/>
           <a:p>
             <a:pPr algn="ctr">
-              <a:defRPr sz="1000" b="1">
+              <a:lnSpc>
+                <a:spcPct val="120000"/>
+              </a:lnSpc>
+              <a:defRPr sz="1200" b="1">
                 <a:solidFill>
                   <a:srgbClr val="13302B"/>
                 </a:solidFill>
@@ -3371,6 +3407,82 @@
             <a:br/>
             <a:r>
               <a:t>Founder &amp; CEO</a:t>
+            </a:r>
+          </a:p>
+        </p:txBody>
+      </p:sp>
+      <p:sp>
+        <p:nvSpPr>
+          <p:cNvPr id="9" name="TextBox 8"/>
+          <p:cNvSpPr txBox="1"/>
+          <p:nvPr/>
+        </p:nvSpPr>
+        <p:spPr>
+          <a:xfrm>
+            <a:off x="8412480" y="4114800"/>
+            <a:ext cx="2743200" cy="274320"/>
+          </a:xfrm>
+          <a:prstGeom prst="rect">
+            <a:avLst/>
+          </a:prstGeom>
+          <a:noFill/>
+        </p:spPr>
+        <p:txBody>
+          <a:bodyPr wrap="square">
+            <a:spAutoFit/>
+          </a:bodyPr>
+          <a:lstStyle/>
+          <a:p>
+            <a:pPr algn="ctr">
+              <a:lnSpc>
+                <a:spcPct val="120000"/>
+              </a:lnSpc>
+              <a:defRPr sz="1000" b="0">
+                <a:solidFill>
+                  <a:srgbClr val="6B7280"/>
+                </a:solidFill>
+              </a:defRPr>
+            </a:pPr>
+            <a:r>
+              <a:t>Dhaka, Bangladesh</a:t>
+            </a:r>
+          </a:p>
+        </p:txBody>
+      </p:sp>
+      <p:sp>
+        <p:nvSpPr>
+          <p:cNvPr id="10" name="TextBox 9"/>
+          <p:cNvSpPr txBox="1"/>
+          <p:nvPr/>
+        </p:nvSpPr>
+        <p:spPr>
+          <a:xfrm>
+            <a:off x="548640" y="6217920"/>
+            <a:ext cx="10972800" cy="274320"/>
+          </a:xfrm>
+          <a:prstGeom prst="rect">
+            <a:avLst/>
+          </a:prstGeom>
+          <a:noFill/>
+        </p:spPr>
+        <p:txBody>
+          <a:bodyPr wrap="square">
+            <a:spAutoFit/>
+          </a:bodyPr>
+          <a:lstStyle/>
+          <a:p>
+            <a:pPr algn="l">
+              <a:lnSpc>
+                <a:spcPct val="120000"/>
+              </a:lnSpc>
+              <a:defRPr sz="900" b="0">
+                <a:solidFill>
+                  <a:srgbClr val="6B7280"/>
+                </a:solidFill>
+              </a:defRPr>
+            </a:pPr>
+            <a:r>
+              <a:t>Live Demos: bdcrops.com/badc_kh01 (114km²) | bdcrops.com/badc_kh07 | bdcrops.com/DoF/ | bdcrops.com/nextunicorn/</a:t>
             </a:r>
           </a:p>
         </p:txBody>
@@ -3403,14 +3515,57 @@
       <p:grpSpPr/>
       <p:sp>
         <p:nvSpPr>
-          <p:cNvPr id="2" name="TextBox 1"/>
+          <p:cNvPr id="2" name="Rectangle 1"/>
+          <p:cNvSpPr/>
+          <p:nvPr/>
+        </p:nvSpPr>
+        <p:spPr>
+          <a:xfrm>
+            <a:off x="0" y="0"/>
+            <a:ext cx="12188952" cy="73152"/>
+          </a:xfrm>
+          <a:prstGeom prst="rect">
+            <a:avLst/>
+          </a:prstGeom>
+          <a:solidFill>
+            <a:srgbClr val="1D9790"/>
+          </a:solidFill>
+          <a:ln>
+            <a:noFill/>
+          </a:ln>
+        </p:spPr>
+        <p:style>
+          <a:lnRef idx="1">
+            <a:schemeClr val="accent1"/>
+          </a:lnRef>
+          <a:fillRef idx="3">
+            <a:schemeClr val="accent1"/>
+          </a:fillRef>
+          <a:effectRef idx="2">
+            <a:schemeClr val="accent1"/>
+          </a:effectRef>
+          <a:fontRef idx="minor">
+            <a:schemeClr val="lt1"/>
+          </a:fontRef>
+        </p:style>
+        <p:txBody>
+          <a:bodyPr rtlCol="0" anchor="ctr"/>
+          <a:lstStyle/>
+          <a:p>
+            <a:pPr algn="ctr"/>
+          </a:p>
+        </p:txBody>
+      </p:sp>
+      <p:sp>
+        <p:nvSpPr>
+          <p:cNvPr id="3" name="TextBox 2"/>
           <p:cNvSpPr txBox="1"/>
           <p:nvPr/>
         </p:nvSpPr>
         <p:spPr>
           <a:xfrm>
-            <a:off x="548640" y="182880"/>
-            <a:ext cx="10972800" cy="548640"/>
+            <a:off x="548640" y="228600"/>
+            <a:ext cx="10972800" cy="640080"/>
           </a:xfrm>
           <a:prstGeom prst="rect">
             <a:avLst/>
@@ -3424,28 +3579,31 @@
           <a:lstStyle/>
           <a:p>
             <a:pPr algn="l">
-              <a:defRPr sz="2000" b="1">
+              <a:lnSpc>
+                <a:spcPct val="120000"/>
+              </a:lnSpc>
+              <a:defRPr sz="2400" b="1">
                 <a:solidFill>
                   <a:srgbClr val="1D9790"/>
                 </a:solidFill>
               </a:defRPr>
             </a:pPr>
             <a:r>
-              <a:t>SLIDE 9 — AQUACROP PROOF — Working Prototype — Khulna Coastal Bangladesh</a:t>
-            </a:r>
-          </a:p>
-        </p:txBody>
-      </p:sp>
-      <p:sp>
-        <p:nvSpPr>
-          <p:cNvPr id="3" name="TextBox 2"/>
+              <a:t>09 — NEW — DoF Aquatic Intelligence — From Crop to Fisheries Intelligence</a:t>
+            </a:r>
+          </a:p>
+        </p:txBody>
+      </p:sp>
+      <p:sp>
+        <p:nvSpPr>
+          <p:cNvPr id="4" name="TextBox 3"/>
           <p:cNvSpPr txBox="1"/>
           <p:nvPr/>
         </p:nvSpPr>
         <p:spPr>
           <a:xfrm>
-            <a:off x="548640" y="914400"/>
-            <a:ext cx="10972800" cy="5486400"/>
+            <a:off x="548640" y="1005840"/>
+            <a:ext cx="6858000" cy="5486400"/>
           </a:xfrm>
           <a:prstGeom prst="rect">
             <a:avLst/>
@@ -3459,188 +3617,128 @@
           <a:lstStyle/>
           <a:p>
             <a:pPr>
-              <a:spcAft>
-                <a:spcPts val="500"/>
-              </a:spcAft>
-              <a:defRPr sz="1100">
-                <a:solidFill>
-                  <a:srgbClr val="13302B"/>
-                </a:solidFill>
-              </a:defRPr>
-            </a:pPr>
-            <a:r>
-              <a:t>Surkhali Union — BRRI dhan47</a:t>
-            </a:r>
-          </a:p>
-          <a:p>
-            <a:pPr>
-              <a:spcAft>
-                <a:spcPts val="500"/>
-              </a:spcAft>
-              <a:defRPr sz="1100">
-                <a:solidFill>
-                  <a:srgbClr val="13302B"/>
-                </a:solidFill>
-              </a:defRPr>
-            </a:pPr>
-          </a:p>
-          <a:p>
-            <a:pPr>
-              <a:spcAft>
-                <a:spcPts val="500"/>
-              </a:spcAft>
-              <a:defRPr sz="1100">
-                <a:solidFill>
-                  <a:srgbClr val="13302B"/>
-                </a:solidFill>
-              </a:defRPr>
-            </a:pPr>
-            <a:r>
-              <a:t>Prototype outputs (explicitly prototype/model outputs, not certified operational forecasts — preliminary, requires repeated observations and field validation):</a:t>
-            </a:r>
-          </a:p>
-          <a:p>
-            <a:pPr>
-              <a:spcAft>
-                <a:spcPts val="500"/>
-              </a:spcAft>
-              <a:defRPr sz="1100">
-                <a:solidFill>
-                  <a:srgbClr val="13302B"/>
-                </a:solidFill>
-              </a:defRPr>
-            </a:pPr>
-            <a:r>
-              <a:t>5.80 t/ha — Simulated yield</a:t>
-            </a:r>
-          </a:p>
-          <a:p>
-            <a:pPr>
-              <a:spcAft>
-                <a:spcPts val="500"/>
-              </a:spcAft>
-              <a:defRPr sz="1100">
-                <a:solidFill>
-                  <a:srgbClr val="13302B"/>
-                </a:solidFill>
-              </a:defRPr>
-            </a:pPr>
-            <a:r>
-              <a:t>77/100 — Field-health score</a:t>
-            </a:r>
-          </a:p>
-          <a:p>
-            <a:pPr>
-              <a:spcAft>
-                <a:spcPts val="500"/>
-              </a:spcAft>
-              <a:defRPr sz="1100">
-                <a:solidFill>
-                  <a:srgbClr val="13302B"/>
-                </a:solidFill>
-              </a:defRPr>
-            </a:pPr>
-            <a:r>
-              <a:t>0.2% — Water-stress index</a:t>
-            </a:r>
-          </a:p>
-          <a:p>
-            <a:pPr>
-              <a:spcAft>
-                <a:spcPts val="500"/>
-              </a:spcAft>
-              <a:defRPr sz="1100">
-                <a:solidFill>
-                  <a:srgbClr val="13302B"/>
-                </a:solidFill>
-              </a:defRPr>
-            </a:pPr>
-          </a:p>
-          <a:p>
-            <a:pPr>
-              <a:spcAft>
-                <a:spcPts val="500"/>
-              </a:spcAft>
-              <a:defRPr sz="1100">
-                <a:solidFill>
-                  <a:srgbClr val="13302B"/>
-                </a:solidFill>
-              </a:defRPr>
-            </a:pPr>
-            <a:r>
-              <a:t>Flood scenario:</a:t>
-            </a:r>
-          </a:p>
-          <a:p>
-            <a:pPr>
-              <a:spcAft>
-                <a:spcPts val="500"/>
-              </a:spcAft>
-              <a:defRPr sz="1100">
-                <a:solidFill>
-                  <a:srgbClr val="13302B"/>
-                </a:solidFill>
-              </a:defRPr>
-            </a:pPr>
-            <a:r>
-              <a:t>−24% — ~2-day modeled loss</a:t>
-            </a:r>
-          </a:p>
-          <a:p>
-            <a:pPr>
-              <a:spcAft>
-                <a:spcPts val="500"/>
-              </a:spcAft>
-              <a:defRPr sz="1100">
-                <a:solidFill>
-                  <a:srgbClr val="13302B"/>
-                </a:solidFill>
-              </a:defRPr>
-            </a:pPr>
-            <a:r>
-              <a:t>−60% — ~5-day modeled loss</a:t>
-            </a:r>
-          </a:p>
-          <a:p>
-            <a:pPr>
-              <a:spcAft>
-                <a:spcPts val="500"/>
-              </a:spcAft>
-              <a:defRPr sz="1100">
-                <a:solidFill>
-                  <a:srgbClr val="13302B"/>
-                </a:solidFill>
-              </a:defRPr>
-            </a:pPr>
-            <a:r>
-              <a:t>−84% — ~7-day modeled loss</a:t>
-            </a:r>
-          </a:p>
-          <a:p>
-            <a:pPr>
-              <a:spcAft>
-                <a:spcPts val="500"/>
-              </a:spcAft>
-              <a:defRPr sz="1100">
-                <a:solidFill>
-                  <a:srgbClr val="13302B"/>
-                </a:solidFill>
-              </a:defRPr>
-            </a:pPr>
-          </a:p>
-          <a:p>
-            <a:pPr>
-              <a:spcAft>
-                <a:spcPts val="500"/>
-              </a:spcAft>
-              <a:defRPr sz="1100">
-                <a:solidFill>
-                  <a:srgbClr val="13302B"/>
-                </a:solidFill>
-              </a:defRPr>
-            </a:pPr>
-            <a:r>
-              <a:t>Investor message: Important achievement is not '5.8 t/ha.' It is: We have built workflow that converts satellite + crop + environmental information into scenario-based operational decisions.</a:t>
+              <a:lnSpc>
+                <a:spcPct val="130000"/>
+              </a:lnSpc>
+              <a:spcAft>
+                <a:spcPts val="1000"/>
+              </a:spcAft>
+              <a:defRPr sz="1400">
+                <a:solidFill>
+                  <a:srgbClr val="13302B"/>
+                </a:solidFill>
+              </a:defRPr>
+            </a:pPr>
+            <a:r>
+              <a:t>• LIVE DEMO: bdcrops.com/DoF/ — Rupsha River Smart — 4 Species × 4 Seasons × 16 Scenarios</a:t>
+            </a:r>
+          </a:p>
+          <a:p>
+            <a:pPr>
+              <a:lnSpc>
+                <a:spcPct val="130000"/>
+              </a:lnSpc>
+              <a:spcAft>
+                <a:spcPts val="1000"/>
+              </a:spcAft>
+              <a:defRPr sz="1400">
+                <a:solidFill>
+                  <a:srgbClr val="13302B"/>
+                </a:solidFill>
+              </a:defRPr>
+            </a:pPr>
+            <a:r>
+              <a:t>• Catla · Rohu · Mrigal · Hilsa — Ref: dashboard.png + growth_curve.png</a:t>
+            </a:r>
+          </a:p>
+          <a:p>
+            <a:pPr>
+              <a:lnSpc>
+                <a:spcPct val="130000"/>
+              </a:lnSpc>
+              <a:spcAft>
+                <a:spcPts val="1000"/>
+              </a:spcAft>
+              <a:defRPr sz="1400">
+                <a:solidFill>
+                  <a:srgbClr val="13302B"/>
+                </a:solidFill>
+              </a:defRPr>
+            </a:pPr>
+            <a:r>
+              <a:t>• Fish Growth: 90-day forecasting, Species×season, Growth/biomass</a:t>
+            </a:r>
+          </a:p>
+          <a:p>
+            <a:pPr>
+              <a:lnSpc>
+                <a:spcPct val="130000"/>
+              </a:lnSpc>
+              <a:spcAft>
+                <a:spcPts val="1000"/>
+              </a:spcAft>
+              <a:defRPr sz="1400">
+                <a:solidFill>
+                  <a:srgbClr val="13302B"/>
+                </a:solidFill>
+              </a:defRPr>
+            </a:pPr>
+            <a:r>
+              <a:t>• Water Intelligence: Temperature, DO, Salinity, pH, Turbidity, Conductivity, Ammonia</a:t>
+            </a:r>
+          </a:p>
+          <a:p>
+            <a:pPr>
+              <a:lnSpc>
+                <a:spcPct val="130000"/>
+              </a:lnSpc>
+              <a:spcAft>
+                <a:spcPts val="1000"/>
+              </a:spcAft>
+              <a:defRPr sz="1400">
+                <a:solidFill>
+                  <a:srgbClr val="13302B"/>
+                </a:solidFill>
+              </a:defRPr>
+            </a:pPr>
+            <a:r>
+              <a:t>• Decision: Best stocking season, Species suitability, Water-quality risk, Constraints</a:t>
+            </a:r>
+          </a:p>
+          <a:p>
+            <a:pPr>
+              <a:lnSpc>
+                <a:spcPct val="130000"/>
+              </a:lnSpc>
+              <a:spcAft>
+                <a:spcPts val="1000"/>
+              </a:spcAft>
+              <a:defRPr sz="1400">
+                <a:solidFill>
+                  <a:srgbClr val="13302B"/>
+                </a:solidFill>
+              </a:defRPr>
+            </a:pPr>
+            <a:r>
+              <a:t>• Example: Catla Monsoon 79.2% → 448g | Critical Rohu salinity 5.88 ppt &gt; 3.0 ppt tolerance</a:t>
+            </a:r>
+          </a:p>
+          <a:p>
+            <a:pPr>
+              <a:lnSpc>
+                <a:spcPct val="130000"/>
+              </a:lnSpc>
+              <a:spcAft>
+                <a:spcPts val="1000"/>
+              </a:spcAft>
+              <a:defRPr sz="1400">
+                <a:solidFill>
+                  <a:srgbClr val="13302B"/>
+                </a:solidFill>
+              </a:defRPr>
+            </a:pPr>
+            <a:r>
+              <a:t>• Govt: MoFL → DoF → River/Fisheries → Hilsa zones, jatka monitoring, ECA</a:t>
             </a:r>
           </a:p>
         </p:txBody>
@@ -3673,14 +3771,57 @@
       <p:grpSpPr/>
       <p:sp>
         <p:nvSpPr>
-          <p:cNvPr id="2" name="TextBox 1"/>
+          <p:cNvPr id="2" name="Rectangle 1"/>
+          <p:cNvSpPr/>
+          <p:nvPr/>
+        </p:nvSpPr>
+        <p:spPr>
+          <a:xfrm>
+            <a:off x="0" y="0"/>
+            <a:ext cx="12188952" cy="73152"/>
+          </a:xfrm>
+          <a:prstGeom prst="rect">
+            <a:avLst/>
+          </a:prstGeom>
+          <a:solidFill>
+            <a:srgbClr val="1D9790"/>
+          </a:solidFill>
+          <a:ln>
+            <a:noFill/>
+          </a:ln>
+        </p:spPr>
+        <p:style>
+          <a:lnRef idx="1">
+            <a:schemeClr val="accent1"/>
+          </a:lnRef>
+          <a:fillRef idx="3">
+            <a:schemeClr val="accent1"/>
+          </a:fillRef>
+          <a:effectRef idx="2">
+            <a:schemeClr val="accent1"/>
+          </a:effectRef>
+          <a:fontRef idx="minor">
+            <a:schemeClr val="lt1"/>
+          </a:fontRef>
+        </p:style>
+        <p:txBody>
+          <a:bodyPr rtlCol="0" anchor="ctr"/>
+          <a:lstStyle/>
+          <a:p>
+            <a:pPr algn="ctr"/>
+          </a:p>
+        </p:txBody>
+      </p:sp>
+      <p:sp>
+        <p:nvSpPr>
+          <p:cNvPr id="3" name="TextBox 2"/>
           <p:cNvSpPr txBox="1"/>
           <p:nvPr/>
         </p:nvSpPr>
         <p:spPr>
           <a:xfrm>
-            <a:off x="548640" y="182880"/>
-            <a:ext cx="10972800" cy="548640"/>
+            <a:off x="548640" y="228600"/>
+            <a:ext cx="10972800" cy="640080"/>
           </a:xfrm>
           <a:prstGeom prst="rect">
             <a:avLst/>
@@ -3694,28 +3835,31 @@
           <a:lstStyle/>
           <a:p>
             <a:pPr algn="l">
-              <a:defRPr sz="2000" b="1">
+              <a:lnSpc>
+                <a:spcPct val="120000"/>
+              </a:lnSpc>
+              <a:defRPr sz="2400" b="1">
                 <a:solidFill>
                   <a:srgbClr val="1D9790"/>
                 </a:solidFill>
               </a:defRPr>
             </a:pPr>
             <a:r>
-              <a:t>SLIDE 10 — 16-SCENARIO DECISION ENGINE — We Don't Stop at Forecasting</a:t>
-            </a:r>
-          </a:p>
-        </p:txBody>
-      </p:sp>
-      <p:sp>
-        <p:nvSpPr>
-          <p:cNvPr id="3" name="TextBox 2"/>
+              <a:t>10 — NEW — BADC KH01 — Batiaghata Union — 114 km² Coastal Cropland Intelligence</a:t>
+            </a:r>
+          </a:p>
+        </p:txBody>
+      </p:sp>
+      <p:sp>
+        <p:nvSpPr>
+          <p:cNvPr id="4" name="TextBox 3"/>
           <p:cNvSpPr txBox="1"/>
           <p:nvPr/>
         </p:nvSpPr>
         <p:spPr>
           <a:xfrm>
-            <a:off x="548640" y="914400"/>
-            <a:ext cx="10972800" cy="5486400"/>
+            <a:off x="548640" y="1005840"/>
+            <a:ext cx="6858000" cy="5486400"/>
           </a:xfrm>
           <a:prstGeom prst="rect">
             <a:avLst/>
@@ -3729,161 +3873,128 @@
           <a:lstStyle/>
           <a:p>
             <a:pPr>
-              <a:spcAft>
-                <a:spcPts val="500"/>
-              </a:spcAft>
-              <a:defRPr sz="1100">
-                <a:solidFill>
-                  <a:srgbClr val="13302B"/>
-                </a:solidFill>
-              </a:defRPr>
-            </a:pPr>
-            <a:r>
-              <a:t>We simulate:</a:t>
-            </a:r>
-          </a:p>
-          <a:p>
-            <a:pPr>
-              <a:spcAft>
-                <a:spcPts val="500"/>
-              </a:spcAft>
-              <a:defRPr sz="1100">
-                <a:solidFill>
-                  <a:srgbClr val="13302B"/>
-                </a:solidFill>
-              </a:defRPr>
-            </a:pPr>
-            <a:r>
-              <a:t>Flood — +2 / +5 / +7 days</a:t>
-            </a:r>
-          </a:p>
-          <a:p>
-            <a:pPr>
-              <a:spcAft>
-                <a:spcPts val="500"/>
-              </a:spcAft>
-              <a:defRPr sz="1100">
-                <a:solidFill>
-                  <a:srgbClr val="13302B"/>
-                </a:solidFill>
-              </a:defRPr>
-            </a:pPr>
-            <a:r>
-              <a:t>Drought — Water-stress scenarios</a:t>
-            </a:r>
-          </a:p>
-          <a:p>
-            <a:pPr>
-              <a:spcAft>
-                <a:spcPts val="500"/>
-              </a:spcAft>
-              <a:defRPr sz="1100">
-                <a:solidFill>
-                  <a:srgbClr val="13302B"/>
-                </a:solidFill>
-              </a:defRPr>
-            </a:pPr>
-            <a:r>
-              <a:t>Irrigation — Supplemental-water opportunities</a:t>
-            </a:r>
-          </a:p>
-          <a:p>
-            <a:pPr>
-              <a:spcAft>
-                <a:spcPts val="500"/>
-              </a:spcAft>
-              <a:defRPr sz="1100">
-                <a:solidFill>
-                  <a:srgbClr val="13302B"/>
-                </a:solidFill>
-              </a:defRPr>
-            </a:pPr>
-            <a:r>
-              <a:t>Heat — Crop-stress scenarios</a:t>
-            </a:r>
-          </a:p>
-          <a:p>
-            <a:pPr>
-              <a:spcAft>
-                <a:spcPts val="500"/>
-              </a:spcAft>
-              <a:defRPr sz="1100">
-                <a:solidFill>
-                  <a:srgbClr val="13302B"/>
-                </a:solidFill>
-              </a:defRPr>
-            </a:pPr>
-            <a:r>
-              <a:t>Harvest — Early vs delayed harvest</a:t>
-            </a:r>
-          </a:p>
-          <a:p>
-            <a:pPr>
-              <a:spcAft>
-                <a:spcPts val="500"/>
-              </a:spcAft>
-              <a:defRPr sz="1100">
-                <a:solidFill>
-                  <a:srgbClr val="13302B"/>
-                </a:solidFill>
-              </a:defRPr>
-            </a:pPr>
-            <a:r>
-              <a:t>Waterlogging — Drainage / submergence consequences</a:t>
-            </a:r>
-          </a:p>
-          <a:p>
-            <a:pPr>
-              <a:spcAft>
-                <a:spcPts val="500"/>
-              </a:spcAft>
-              <a:defRPr sz="1100">
-                <a:solidFill>
-                  <a:srgbClr val="13302B"/>
-                </a:solidFill>
-              </a:defRPr>
-            </a:pPr>
-          </a:p>
-          <a:p>
-            <a:pPr>
-              <a:spcAft>
-                <a:spcPts val="500"/>
-              </a:spcAft>
-              <a:defRPr sz="1100">
-                <a:solidFill>
-                  <a:srgbClr val="13302B"/>
-                </a:solidFill>
-              </a:defRPr>
-            </a:pPr>
-            <a:r>
-              <a:t>Prototype contains 16-scenario decision engine.</a:t>
-            </a:r>
-          </a:p>
-          <a:p>
-            <a:pPr>
-              <a:spcAft>
-                <a:spcPts val="500"/>
-              </a:spcAft>
-              <a:defRPr sz="1100">
-                <a:solidFill>
-                  <a:srgbClr val="13302B"/>
-                </a:solidFill>
-              </a:defRPr>
-            </a:pPr>
-          </a:p>
-          <a:p>
-            <a:pPr>
-              <a:spcAft>
-                <a:spcPts val="500"/>
-              </a:spcAft>
-              <a:defRPr sz="1100">
-                <a:solidFill>
-                  <a:srgbClr val="13302B"/>
-                </a:solidFill>
-              </a:defRPr>
-            </a:pPr>
-            <a:r>
-              <a:t>Output: Not another map. A PRIORITY LIST. Field → Risk → Consequence → Recommended Action</a:t>
+              <a:lnSpc>
+                <a:spcPct val="130000"/>
+              </a:lnSpc>
+              <a:spcAft>
+                <a:spcPts val="1000"/>
+              </a:spcAft>
+              <a:defRPr sz="1400">
+                <a:solidFill>
+                  <a:srgbClr val="13302B"/>
+                </a:solidFill>
+              </a:defRPr>
+            </a:pPr>
+            <a:r>
+              <a:t>• LIVE DEMO: bdcrops.com/badc_kh01 — Batiaghata Union · Khulna — AOI_KH01 — 114 km²</a:t>
+            </a:r>
+          </a:p>
+          <a:p>
+            <a:pPr>
+              <a:lnSpc>
+                <a:spcPct val="130000"/>
+              </a:lnSpc>
+              <a:spcAft>
+                <a:spcPts val="1000"/>
+              </a:spcAft>
+              <a:defRPr sz="1400">
+                <a:solidFill>
+                  <a:srgbClr val="13302B"/>
+                </a:solidFill>
+              </a:defRPr>
+            </a:pPr>
+            <a:r>
+              <a:t>• Ganges Tidal Floodplain — BWDB Polder 30 — Working demonstration / govt-oriented prototype</a:t>
+            </a:r>
+          </a:p>
+          <a:p>
+            <a:pPr>
+              <a:lnSpc>
+                <a:spcPct val="130000"/>
+              </a:lnSpc>
+              <a:spcAft>
+                <a:spcPts val="1000"/>
+              </a:spcAft>
+              <a:defRPr sz="1400">
+                <a:solidFill>
+                  <a:srgbClr val="13302B"/>
+                </a:solidFill>
+              </a:defRPr>
+            </a:pPr>
+            <a:r>
+              <a:t>• What delivers: MULTI-YEAR BASELINE 2020→2023→2025→2026</a:t>
+            </a:r>
+          </a:p>
+          <a:p>
+            <a:pPr>
+              <a:lnSpc>
+                <a:spcPct val="130000"/>
+              </a:lnSpc>
+              <a:spcAft>
+                <a:spcPts val="1000"/>
+              </a:spcAft>
+              <a:defRPr sz="1400">
+                <a:solidFill>
+                  <a:srgbClr val="13302B"/>
+                </a:solidFill>
+              </a:defRPr>
+            </a:pPr>
+            <a:r>
+              <a:t>• LAND-USE INTELLIGENCE: LULC composition + year-by-year comparison</a:t>
+            </a:r>
+          </a:p>
+          <a:p>
+            <a:pPr>
+              <a:lnSpc>
+                <a:spcPct val="130000"/>
+              </a:lnSpc>
+              <a:spcAft>
+                <a:spcPts val="1000"/>
+              </a:spcAft>
+              <a:defRPr sz="1400">
+                <a:solidFill>
+                  <a:srgbClr val="13302B"/>
+                </a:solidFill>
+              </a:defRPr>
+            </a:pPr>
+            <a:r>
+              <a:t>• AGRICULTURAL KPIs + FORECASTING: Trend-based projections + DECISION SUPPORT</a:t>
+            </a:r>
+          </a:p>
+          <a:p>
+            <a:pPr>
+              <a:lnSpc>
+                <a:spcPct val="130000"/>
+              </a:lnSpc>
+              <a:spcAft>
+                <a:spcPts val="1000"/>
+              </a:spcAft>
+              <a:defRPr sz="1400">
+                <a:solidFill>
+                  <a:srgbClr val="13302B"/>
+                </a:solidFill>
+              </a:defRPr>
+            </a:pPr>
+            <a:r>
+              <a:t>• Data: 21AT + Sentinel-2 — Satellite → GeoAI → Multi-year intelligence → Forecast → Decision</a:t>
+            </a:r>
+          </a:p>
+          <a:p>
+            <a:pPr>
+              <a:lnSpc>
+                <a:spcPct val="130000"/>
+              </a:lnSpc>
+              <a:spcAft>
+                <a:spcPts val="1000"/>
+              </a:spcAft>
+              <a:defRPr sz="1400">
+                <a:solidFill>
+                  <a:srgbClr val="13302B"/>
+                </a:solidFill>
+              </a:defRPr>
+            </a:pPr>
+            <a:r>
+              <a:t>• Investor takeaway: One 114 km² AOI becomes reusable intelligence product</a:t>
             </a:r>
           </a:p>
         </p:txBody>
@@ -3916,14 +4027,57 @@
       <p:grpSpPr/>
       <p:sp>
         <p:nvSpPr>
-          <p:cNvPr id="2" name="TextBox 1"/>
+          <p:cNvPr id="2" name="Rectangle 1"/>
+          <p:cNvSpPr/>
+          <p:nvPr/>
+        </p:nvSpPr>
+        <p:spPr>
+          <a:xfrm>
+            <a:off x="0" y="0"/>
+            <a:ext cx="12188952" cy="73152"/>
+          </a:xfrm>
+          <a:prstGeom prst="rect">
+            <a:avLst/>
+          </a:prstGeom>
+          <a:solidFill>
+            <a:srgbClr val="1D9790"/>
+          </a:solidFill>
+          <a:ln>
+            <a:noFill/>
+          </a:ln>
+        </p:spPr>
+        <p:style>
+          <a:lnRef idx="1">
+            <a:schemeClr val="accent1"/>
+          </a:lnRef>
+          <a:fillRef idx="3">
+            <a:schemeClr val="accent1"/>
+          </a:fillRef>
+          <a:effectRef idx="2">
+            <a:schemeClr val="accent1"/>
+          </a:effectRef>
+          <a:fontRef idx="minor">
+            <a:schemeClr val="lt1"/>
+          </a:fontRef>
+        </p:style>
+        <p:txBody>
+          <a:bodyPr rtlCol="0" anchor="ctr"/>
+          <a:lstStyle/>
+          <a:p>
+            <a:pPr algn="ctr"/>
+          </a:p>
+        </p:txBody>
+      </p:sp>
+      <p:sp>
+        <p:nvSpPr>
+          <p:cNvPr id="3" name="TextBox 2"/>
           <p:cNvSpPr txBox="1"/>
           <p:nvPr/>
         </p:nvSpPr>
         <p:spPr>
           <a:xfrm>
-            <a:off x="548640" y="182880"/>
-            <a:ext cx="10972800" cy="548640"/>
+            <a:off x="548640" y="228600"/>
+            <a:ext cx="10972800" cy="640080"/>
           </a:xfrm>
           <a:prstGeom prst="rect">
             <a:avLst/>
@@ -3937,28 +4091,31 @@
           <a:lstStyle/>
           <a:p>
             <a:pPr algn="l">
-              <a:defRPr sz="2000" b="1">
+              <a:lnSpc>
+                <a:spcPct val="120000"/>
+              </a:lnSpc>
+              <a:defRPr sz="2400" b="1">
                 <a:solidFill>
                   <a:srgbClr val="1D9790"/>
                 </a:solidFill>
               </a:defRPr>
             </a:pPr>
             <a:r>
-              <a:t>SLIDE 11 — THE BIGGER OPPORTUNITY — FROM CROP MONITORING TO CROP DIGITAL TWINS</a:t>
-            </a:r>
-          </a:p>
-        </p:txBody>
-      </p:sp>
-      <p:sp>
-        <p:nvSpPr>
-          <p:cNvPr id="3" name="TextBox 2"/>
+              <a:t>11 — NEW — BADC KH07 — Surkhali Union — Multi-Year Intelligence + Forecasting</a:t>
+            </a:r>
+          </a:p>
+        </p:txBody>
+      </p:sp>
+      <p:sp>
+        <p:nvSpPr>
+          <p:cNvPr id="4" name="TextBox 3"/>
           <p:cNvSpPr txBox="1"/>
           <p:nvPr/>
         </p:nvSpPr>
         <p:spPr>
           <a:xfrm>
-            <a:off x="548640" y="914400"/>
-            <a:ext cx="10972800" cy="5486400"/>
+            <a:off x="548640" y="1005840"/>
+            <a:ext cx="6858000" cy="5486400"/>
           </a:xfrm>
           <a:prstGeom prst="rect">
             <a:avLst/>
@@ -3972,119 +4129,110 @@
           <a:lstStyle/>
           <a:p>
             <a:pPr>
-              <a:spcAft>
-                <a:spcPts val="500"/>
-              </a:spcAft>
-              <a:defRPr sz="1100">
-                <a:solidFill>
-                  <a:srgbClr val="13302B"/>
-                </a:solidFill>
-              </a:defRPr>
-            </a:pPr>
-            <a:r>
-              <a:t>Today — Satellite monitoring</a:t>
-            </a:r>
-          </a:p>
-          <a:p>
-            <a:pPr>
-              <a:spcAft>
-                <a:spcPts val="500"/>
-              </a:spcAft>
-              <a:defRPr sz="1100">
-                <a:solidFill>
-                  <a:srgbClr val="13302B"/>
-                </a:solidFill>
-              </a:defRPr>
-            </a:pPr>
-            <a:r>
-              <a:t>Next — Crop health intelligence</a:t>
-            </a:r>
-          </a:p>
-          <a:p>
-            <a:pPr>
-              <a:spcAft>
-                <a:spcPts val="500"/>
-              </a:spcAft>
-              <a:defRPr sz="1100">
-                <a:solidFill>
-                  <a:srgbClr val="13302B"/>
-                </a:solidFill>
-              </a:defRPr>
-            </a:pPr>
-            <a:r>
-              <a:t>Next — Yield simulation</a:t>
-            </a:r>
-          </a:p>
-          <a:p>
-            <a:pPr>
-              <a:spcAft>
-                <a:spcPts val="500"/>
-              </a:spcAft>
-              <a:defRPr sz="1100">
-                <a:solidFill>
-                  <a:srgbClr val="13302B"/>
-                </a:solidFill>
-              </a:defRPr>
-            </a:pPr>
-            <a:r>
-              <a:t>Next — Risk prediction</a:t>
-            </a:r>
-          </a:p>
-          <a:p>
-            <a:pPr>
-              <a:spcAft>
-                <a:spcPts val="500"/>
-              </a:spcAft>
-              <a:defRPr sz="1100">
-                <a:solidFill>
-                  <a:srgbClr val="13302B"/>
-                </a:solidFill>
-              </a:defRPr>
-            </a:pPr>
-            <a:r>
-              <a:t>Next — Digital twin</a:t>
-            </a:r>
-          </a:p>
-          <a:p>
-            <a:pPr>
-              <a:spcAft>
-                <a:spcPts val="500"/>
-              </a:spcAft>
-              <a:defRPr sz="1100">
-                <a:solidFill>
-                  <a:srgbClr val="13302B"/>
-                </a:solidFill>
-              </a:defRPr>
-            </a:pPr>
-            <a:r>
-              <a:t>Eventually — National Crop Intelligence Infrastructure</a:t>
-            </a:r>
-          </a:p>
-          <a:p>
-            <a:pPr>
-              <a:spcAft>
-                <a:spcPts val="500"/>
-              </a:spcAft>
-              <a:defRPr sz="1100">
-                <a:solidFill>
-                  <a:srgbClr val="13302B"/>
-                </a:solidFill>
-              </a:defRPr>
-            </a:pPr>
-          </a:p>
-          <a:p>
-            <a:pPr>
-              <a:spcAft>
-                <a:spcPts val="500"/>
-              </a:spcAft>
-              <a:defRPr sz="1100">
-                <a:solidFill>
-                  <a:srgbClr val="13302B"/>
-                </a:solidFill>
-              </a:defRPr>
-            </a:pPr>
-            <a:r>
-              <a:t>BADC roadmap already follows: 5–10 AOIs → 20–50 AOIs → district scale → national multi-crop / multi-AEZ system</a:t>
+              <a:lnSpc>
+                <a:spcPct val="130000"/>
+              </a:lnSpc>
+              <a:spcAft>
+                <a:spcPts val="1000"/>
+              </a:spcAft>
+              <a:defRPr sz="1400">
+                <a:solidFill>
+                  <a:srgbClr val="13302B"/>
+                </a:solidFill>
+              </a:defRPr>
+            </a:pPr>
+            <a:r>
+              <a:t>• LIVE DEMO: bdcrops.com/badc_kh07 — Surkhali Union · Khulna — AOI KH07 — 21AT + Sentinel-2</a:t>
+            </a:r>
+          </a:p>
+          <a:p>
+            <a:pPr>
+              <a:lnSpc>
+                <a:spcPct val="130000"/>
+              </a:lnSpc>
+              <a:spcAft>
+                <a:spcPts val="1000"/>
+              </a:spcAft>
+              <a:defRPr sz="1400">
+                <a:solidFill>
+                  <a:srgbClr val="13302B"/>
+                </a:solidFill>
+              </a:defRPr>
+            </a:pPr>
+            <a:r>
+              <a:t>• Workflow: OBSERVE Satellite indicators → COMPARE Multi-year visual</a:t>
+            </a:r>
+          </a:p>
+          <a:p>
+            <a:pPr>
+              <a:lnSpc>
+                <a:spcPct val="130000"/>
+              </a:lnSpc>
+              <a:spcAft>
+                <a:spcPts val="1000"/>
+              </a:spcAft>
+              <a:defRPr sz="1400">
+                <a:solidFill>
+                  <a:srgbClr val="13302B"/>
+                </a:solidFill>
+              </a:defRPr>
+            </a:pPr>
+            <a:r>
+              <a:t>• UNDERSTAND Trend analysis → FORECAST Three scenarios → QUANTIFY UNCERTAINTY 95% CI</a:t>
+            </a:r>
+          </a:p>
+          <a:p>
+            <a:pPr>
+              <a:lnSpc>
+                <a:spcPct val="130000"/>
+              </a:lnSpc>
+              <a:spcAft>
+                <a:spcPts val="1000"/>
+              </a:spcAft>
+              <a:defRPr sz="1400">
+                <a:solidFill>
+                  <a:srgbClr val="13302B"/>
+                </a:solidFill>
+              </a:defRPr>
+            </a:pPr>
+            <a:r>
+              <a:t>• REPORT Maps + findings + datasets + forecast model</a:t>
+            </a:r>
+          </a:p>
+          <a:p>
+            <a:pPr>
+              <a:lnSpc>
+                <a:spcPct val="130000"/>
+              </a:lnSpc>
+              <a:spcAft>
+                <a:spcPts val="1000"/>
+              </a:spcAft>
+              <a:defRPr sz="1400">
+                <a:solidFill>
+                  <a:srgbClr val="13302B"/>
+                </a:solidFill>
+              </a:defRPr>
+            </a:pPr>
+            <a:r>
+              <a:t>• Why matters: Traditional GIS 'Here is today's map' — BDCrops 'Historical pattern, what changing, scenarios, uncertainty'</a:t>
+            </a:r>
+          </a:p>
+          <a:p>
+            <a:pPr>
+              <a:lnSpc>
+                <a:spcPct val="130000"/>
+              </a:lnSpc>
+              <a:spcAft>
+                <a:spcPts val="1000"/>
+              </a:spcAft>
+              <a:defRPr sz="1400">
+                <a:solidFill>
+                  <a:srgbClr val="13302B"/>
+                </a:solidFill>
+              </a:defRPr>
+            </a:pPr>
+            <a:r>
+              <a:t>• Product: Multi-Year Grid, LULC Maps, Trend Analysis, Forecast Scenarios, Executive Findings</a:t>
             </a:r>
           </a:p>
         </p:txBody>
@@ -4117,14 +4265,57 @@
       <p:grpSpPr/>
       <p:sp>
         <p:nvSpPr>
-          <p:cNvPr id="2" name="TextBox 1"/>
+          <p:cNvPr id="2" name="Rectangle 1"/>
+          <p:cNvSpPr/>
+          <p:nvPr/>
+        </p:nvSpPr>
+        <p:spPr>
+          <a:xfrm>
+            <a:off x="0" y="0"/>
+            <a:ext cx="12188952" cy="73152"/>
+          </a:xfrm>
+          <a:prstGeom prst="rect">
+            <a:avLst/>
+          </a:prstGeom>
+          <a:solidFill>
+            <a:srgbClr val="1D9790"/>
+          </a:solidFill>
+          <a:ln>
+            <a:noFill/>
+          </a:ln>
+        </p:spPr>
+        <p:style>
+          <a:lnRef idx="1">
+            <a:schemeClr val="accent1"/>
+          </a:lnRef>
+          <a:fillRef idx="3">
+            <a:schemeClr val="accent1"/>
+          </a:fillRef>
+          <a:effectRef idx="2">
+            <a:schemeClr val="accent1"/>
+          </a:effectRef>
+          <a:fontRef idx="minor">
+            <a:schemeClr val="lt1"/>
+          </a:fontRef>
+        </p:style>
+        <p:txBody>
+          <a:bodyPr rtlCol="0" anchor="ctr"/>
+          <a:lstStyle/>
+          <a:p>
+            <a:pPr algn="ctr"/>
+          </a:p>
+        </p:txBody>
+      </p:sp>
+      <p:sp>
+        <p:nvSpPr>
+          <p:cNvPr id="3" name="TextBox 2"/>
           <p:cNvSpPr txBox="1"/>
           <p:nvPr/>
         </p:nvSpPr>
         <p:spPr>
           <a:xfrm>
-            <a:off x="548640" y="182880"/>
-            <a:ext cx="10972800" cy="548640"/>
+            <a:off x="548640" y="228600"/>
+            <a:ext cx="10972800" cy="640080"/>
           </a:xfrm>
           <a:prstGeom prst="rect">
             <a:avLst/>
@@ -4138,28 +4329,31 @@
           <a:lstStyle/>
           <a:p>
             <a:pPr algn="l">
-              <a:defRPr sz="2000" b="1">
+              <a:lnSpc>
+                <a:spcPct val="120000"/>
+              </a:lnSpc>
+              <a:defRPr sz="2400" b="1">
                 <a:solidFill>
                   <a:srgbClr val="1D9790"/>
                 </a:solidFill>
               </a:defRPr>
             </a:pPr>
             <a:r>
-              <a:t>SLIDE 12 — AQUADATA — Same Intelligence Architecture Moves Into Water</a:t>
-            </a:r>
-          </a:p>
-        </p:txBody>
-      </p:sp>
-      <p:sp>
-        <p:nvSpPr>
-          <p:cNvPr id="3" name="TextBox 2"/>
+              <a:t>12 — AquaData Commercial Opportunity</a:t>
+            </a:r>
+          </a:p>
+        </p:txBody>
+      </p:sp>
+      <p:sp>
+        <p:nvSpPr>
+          <p:cNvPr id="4" name="TextBox 3"/>
           <p:cNvSpPr txBox="1"/>
           <p:nvPr/>
         </p:nvSpPr>
         <p:spPr>
           <a:xfrm>
-            <a:off x="548640" y="914400"/>
-            <a:ext cx="10972800" cy="5486400"/>
+            <a:off x="548640" y="1005840"/>
+            <a:ext cx="6858000" cy="5486400"/>
           </a:xfrm>
           <a:prstGeom prst="rect">
             <a:avLst/>
@@ -4173,113 +4367,92 @@
           <a:lstStyle/>
           <a:p>
             <a:pPr>
-              <a:spcAft>
-                <a:spcPts val="500"/>
-              </a:spcAft>
-              <a:defRPr sz="1100">
-                <a:solidFill>
-                  <a:srgbClr val="13302B"/>
-                </a:solidFill>
-              </a:defRPr>
-            </a:pPr>
-            <a:r>
-              <a:t>Once we understand Land + crops + water we can expand into AquaData</a:t>
-            </a:r>
-          </a:p>
-          <a:p>
-            <a:pPr>
-              <a:spcAft>
-                <a:spcPts val="500"/>
-              </a:spcAft>
-              <a:defRPr sz="1100">
-                <a:solidFill>
-                  <a:srgbClr val="13302B"/>
-                </a:solidFill>
-              </a:defRPr>
-            </a:pPr>
-          </a:p>
-          <a:p>
-            <a:pPr>
-              <a:spcAft>
-                <a:spcPts val="500"/>
-              </a:spcAft>
-              <a:defRPr sz="1100">
-                <a:solidFill>
-                  <a:srgbClr val="13302B"/>
-                </a:solidFill>
-              </a:defRPr>
-            </a:pPr>
-            <a:r>
-              <a:t>Water intelligence: water quality, water extent, turbidity indicators, water temperature indicators, salinity context</a:t>
-            </a:r>
-          </a:p>
-          <a:p>
-            <a:pPr>
-              <a:spcAft>
-                <a:spcPts val="500"/>
-              </a:spcAft>
-              <a:defRPr sz="1100">
-                <a:solidFill>
-                  <a:srgbClr val="13302B"/>
-                </a:solidFill>
-              </a:defRPr>
-            </a:pPr>
-            <a:r>
-              <a:t>Fish intelligence: species, growth, biomass, habitat, risk, suitability</a:t>
-            </a:r>
-          </a:p>
-          <a:p>
-            <a:pPr>
-              <a:spcAft>
-                <a:spcPts val="500"/>
-              </a:spcAft>
-              <a:defRPr sz="1100">
-                <a:solidFill>
-                  <a:srgbClr val="13302B"/>
-                </a:solidFill>
-              </a:defRPr>
-            </a:pPr>
-          </a:p>
-          <a:p>
-            <a:pPr>
-              <a:spcAft>
-                <a:spcPts val="500"/>
-              </a:spcAft>
-              <a:defRPr sz="1100">
-                <a:solidFill>
-                  <a:srgbClr val="13302B"/>
-                </a:solidFill>
-              </a:defRPr>
-            </a:pPr>
-            <a:r>
-              <a:t>Commercial applications: Aquaculture, Shrimp, Fish farms, River monitoring, Coastal ecosystems, Government fisheries</a:t>
-            </a:r>
-          </a:p>
-          <a:p>
-            <a:pPr>
-              <a:spcAft>
-                <a:spcPts val="500"/>
-              </a:spcAft>
-              <a:defRPr sz="1100">
-                <a:solidFill>
-                  <a:srgbClr val="13302B"/>
-                </a:solidFill>
-              </a:defRPr>
-            </a:pPr>
-          </a:p>
-          <a:p>
-            <a:pPr>
-              <a:spcAft>
-                <a:spcPts val="500"/>
-              </a:spcAft>
-              <a:defRPr sz="1100">
-                <a:solidFill>
-                  <a:srgbClr val="13302B"/>
-                </a:solidFill>
-              </a:defRPr>
-            </a:pPr>
-            <a:r>
-              <a:t>This gives BDCrops a second major physical-world intelligence market.</a:t>
+              <a:lnSpc>
+                <a:spcPct val="130000"/>
+              </a:lnSpc>
+              <a:spcAft>
+                <a:spcPts val="1000"/>
+              </a:spcAft>
+              <a:defRPr sz="1400">
+                <a:solidFill>
+                  <a:srgbClr val="13302B"/>
+                </a:solidFill>
+              </a:defRPr>
+            </a:pPr>
+            <a:r>
+              <a:t>• Once Land+crops+water → AquaData — Second major market</a:t>
+            </a:r>
+          </a:p>
+          <a:p>
+            <a:pPr>
+              <a:lnSpc>
+                <a:spcPct val="130000"/>
+              </a:lnSpc>
+              <a:spcAft>
+                <a:spcPts val="1000"/>
+              </a:spcAft>
+              <a:defRPr sz="1400">
+                <a:solidFill>
+                  <a:srgbClr val="13302B"/>
+                </a:solidFill>
+              </a:defRPr>
+            </a:pPr>
+            <a:r>
+              <a:t>• Water: quality, extent, turbidity, temperature, salinity</a:t>
+            </a:r>
+          </a:p>
+          <a:p>
+            <a:pPr>
+              <a:lnSpc>
+                <a:spcPct val="130000"/>
+              </a:lnSpc>
+              <a:spcAft>
+                <a:spcPts val="1000"/>
+              </a:spcAft>
+              <a:defRPr sz="1400">
+                <a:solidFill>
+                  <a:srgbClr val="13302B"/>
+                </a:solidFill>
+              </a:defRPr>
+            </a:pPr>
+            <a:r>
+              <a:t>• Fish: species, growth, biomass, habitat, risk, suitability</a:t>
+            </a:r>
+          </a:p>
+          <a:p>
+            <a:pPr>
+              <a:lnSpc>
+                <a:spcPct val="130000"/>
+              </a:lnSpc>
+              <a:spcAft>
+                <a:spcPts val="1000"/>
+              </a:spcAft>
+              <a:defRPr sz="1400">
+                <a:solidFill>
+                  <a:srgbClr val="13302B"/>
+                </a:solidFill>
+              </a:defRPr>
+            </a:pPr>
+            <a:r>
+              <a:t>• Commercial: Aquaculture, Shrimp, Fish farms, River monitoring, Coastal, Govt fisheries</a:t>
+            </a:r>
+          </a:p>
+          <a:p>
+            <a:pPr>
+              <a:lnSpc>
+                <a:spcPct val="130000"/>
+              </a:lnSpc>
+              <a:spcAft>
+                <a:spcPts val="1000"/>
+              </a:spcAft>
+              <a:defRPr sz="1400">
+                <a:solidFill>
+                  <a:srgbClr val="13302B"/>
+                </a:solidFill>
+              </a:defRPr>
+            </a:pPr>
+            <a:r>
+              <a:t>• Transition: 8-band → Agriculture (KH01/KH07) → AquaCrop → Water&amp;Fisheries (DoF live) → Govt decision intelligence</a:t>
             </a:r>
           </a:p>
         </p:txBody>
@@ -4312,14 +4485,57 @@
       <p:grpSpPr/>
       <p:sp>
         <p:nvSpPr>
-          <p:cNvPr id="2" name="TextBox 1"/>
+          <p:cNvPr id="2" name="Rectangle 1"/>
+          <p:cNvSpPr/>
+          <p:nvPr/>
+        </p:nvSpPr>
+        <p:spPr>
+          <a:xfrm>
+            <a:off x="0" y="0"/>
+            <a:ext cx="12188952" cy="73152"/>
+          </a:xfrm>
+          <a:prstGeom prst="rect">
+            <a:avLst/>
+          </a:prstGeom>
+          <a:solidFill>
+            <a:srgbClr val="1D9790"/>
+          </a:solidFill>
+          <a:ln>
+            <a:noFill/>
+          </a:ln>
+        </p:spPr>
+        <p:style>
+          <a:lnRef idx="1">
+            <a:schemeClr val="accent1"/>
+          </a:lnRef>
+          <a:fillRef idx="3">
+            <a:schemeClr val="accent1"/>
+          </a:fillRef>
+          <a:effectRef idx="2">
+            <a:schemeClr val="accent1"/>
+          </a:effectRef>
+          <a:fontRef idx="minor">
+            <a:schemeClr val="lt1"/>
+          </a:fontRef>
+        </p:style>
+        <p:txBody>
+          <a:bodyPr rtlCol="0" anchor="ctr"/>
+          <a:lstStyle/>
+          <a:p>
+            <a:pPr algn="ctr"/>
+          </a:p>
+        </p:txBody>
+      </p:sp>
+      <p:sp>
+        <p:nvSpPr>
+          <p:cNvPr id="3" name="TextBox 2"/>
           <p:cNvSpPr txBox="1"/>
           <p:nvPr/>
         </p:nvSpPr>
         <p:spPr>
           <a:xfrm>
-            <a:off x="548640" y="182880"/>
-            <a:ext cx="10972800" cy="548640"/>
+            <a:off x="548640" y="228600"/>
+            <a:ext cx="10972800" cy="640080"/>
           </a:xfrm>
           <a:prstGeom prst="rect">
             <a:avLst/>
@@ -4333,28 +4549,31 @@
           <a:lstStyle/>
           <a:p>
             <a:pPr algn="l">
-              <a:defRPr sz="2000" b="1">
+              <a:lnSpc>
+                <a:spcPct val="120000"/>
+              </a:lnSpc>
+              <a:defRPr sz="2400" b="1">
                 <a:solidFill>
                   <a:srgbClr val="1D9790"/>
                 </a:solidFill>
               </a:defRPr>
             </a:pPr>
             <a:r>
-              <a:t>SLIDE 13 — THE PLATFORM FLYWHEEL — GeoData + AquaCrop + AquaData Reinforce Each Other</a:t>
-            </a:r>
-          </a:p>
-        </p:txBody>
-      </p:sp>
-      <p:sp>
-        <p:nvSpPr>
-          <p:cNvPr id="3" name="TextBox 2"/>
+              <a:t>13 — Platform Flywheel — GeoData + AquaCrop + AquaData Reinforce</a:t>
+            </a:r>
+          </a:p>
+        </p:txBody>
+      </p:sp>
+      <p:sp>
+        <p:nvSpPr>
+          <p:cNvPr id="4" name="TextBox 3"/>
           <p:cNvSpPr txBox="1"/>
           <p:nvPr/>
         </p:nvSpPr>
         <p:spPr>
           <a:xfrm>
-            <a:off x="548640" y="914400"/>
-            <a:ext cx="10972800" cy="5486400"/>
+            <a:off x="548640" y="1005840"/>
+            <a:ext cx="6858000" cy="5486400"/>
           </a:xfrm>
           <a:prstGeom prst="rect">
             <a:avLst/>
@@ -4368,44 +4587,92 @@
           <a:lstStyle/>
           <a:p>
             <a:pPr>
-              <a:spcAft>
-                <a:spcPts val="500"/>
-              </a:spcAft>
-              <a:defRPr sz="1100">
-                <a:solidFill>
-                  <a:srgbClr val="13302B"/>
-                </a:solidFill>
-              </a:defRPr>
-            </a:pPr>
-            <a:r>
-              <a:t>GeoData — Observe Earth → AquaCrop — Understand crop response → AquaData — Understand water ecosystem → Historical Data — Learn patterns → AI — Predict / rank → Decision Support — Recommend action → More deployments — More data → Better models</a:t>
-            </a:r>
-          </a:p>
-          <a:p>
-            <a:pPr>
-              <a:spcAft>
-                <a:spcPts val="500"/>
-              </a:spcAft>
-              <a:defRPr sz="1100">
-                <a:solidFill>
-                  <a:srgbClr val="13302B"/>
-                </a:solidFill>
-              </a:defRPr>
-            </a:pPr>
-          </a:p>
-          <a:p>
-            <a:pPr>
-              <a:spcAft>
-                <a:spcPts val="500"/>
-              </a:spcAft>
-              <a:defRPr sz="1100">
-                <a:solidFill>
-                  <a:srgbClr val="13302B"/>
-                </a:solidFill>
-              </a:defRPr>
-            </a:pPr>
-            <a:r>
-              <a:t>This is the beginning of a data + calibration moat.</a:t>
+              <a:lnSpc>
+                <a:spcPct val="130000"/>
+              </a:lnSpc>
+              <a:spcAft>
+                <a:spcPts val="1000"/>
+              </a:spcAft>
+              <a:defRPr sz="1400">
+                <a:solidFill>
+                  <a:srgbClr val="13302B"/>
+                </a:solidFill>
+              </a:defRPr>
+            </a:pPr>
+            <a:r>
+              <a:t>• GeoData Observe Earth (KH01 114km² + KH07 Surkhali live)</a:t>
+            </a:r>
+          </a:p>
+          <a:p>
+            <a:pPr>
+              <a:lnSpc>
+                <a:spcPct val="130000"/>
+              </a:lnSpc>
+              <a:spcAft>
+                <a:spcPts val="1000"/>
+              </a:spcAft>
+              <a:defRPr sz="1400">
+                <a:solidFill>
+                  <a:srgbClr val="13302B"/>
+                </a:solidFill>
+              </a:defRPr>
+            </a:pPr>
+            <a:r>
+              <a:t>• AquaCrop Understand crop response</a:t>
+            </a:r>
+          </a:p>
+          <a:p>
+            <a:pPr>
+              <a:lnSpc>
+                <a:spcPct val="130000"/>
+              </a:lnSpc>
+              <a:spcAft>
+                <a:spcPts val="1000"/>
+              </a:spcAft>
+              <a:defRPr sz="1400">
+                <a:solidFill>
+                  <a:srgbClr val="13302B"/>
+                </a:solidFill>
+              </a:defRPr>
+            </a:pPr>
+            <a:r>
+              <a:t>• AquaData Understand water ecosystem (DoF Rupsha live)</a:t>
+            </a:r>
+          </a:p>
+          <a:p>
+            <a:pPr>
+              <a:lnSpc>
+                <a:spcPct val="130000"/>
+              </a:lnSpc>
+              <a:spcAft>
+                <a:spcPts val="1000"/>
+              </a:spcAft>
+              <a:defRPr sz="1400">
+                <a:solidFill>
+                  <a:srgbClr val="13302B"/>
+                </a:solidFill>
+              </a:defRPr>
+            </a:pPr>
+            <a:r>
+              <a:t>• Historical Data Learn patterns → AI Predict/rank → Decision Support Recommend action</a:t>
+            </a:r>
+          </a:p>
+          <a:p>
+            <a:pPr>
+              <a:lnSpc>
+                <a:spcPct val="130000"/>
+              </a:lnSpc>
+              <a:spcAft>
+                <a:spcPts val="1000"/>
+              </a:spcAft>
+              <a:defRPr sz="1400">
+                <a:solidFill>
+                  <a:srgbClr val="13302B"/>
+                </a:solidFill>
+              </a:defRPr>
+            </a:pPr>
+            <a:r>
+              <a:t>• More deployments → More data → Better models — Beginning of data + calibration moat</a:t>
             </a:r>
           </a:p>
         </p:txBody>
@@ -4438,14 +4705,57 @@
       <p:grpSpPr/>
       <p:sp>
         <p:nvSpPr>
-          <p:cNvPr id="2" name="TextBox 1"/>
+          <p:cNvPr id="2" name="Rectangle 1"/>
+          <p:cNvSpPr/>
+          <p:nvPr/>
+        </p:nvSpPr>
+        <p:spPr>
+          <a:xfrm>
+            <a:off x="0" y="0"/>
+            <a:ext cx="12188952" cy="73152"/>
+          </a:xfrm>
+          <a:prstGeom prst="rect">
+            <a:avLst/>
+          </a:prstGeom>
+          <a:solidFill>
+            <a:srgbClr val="1D9790"/>
+          </a:solidFill>
+          <a:ln>
+            <a:noFill/>
+          </a:ln>
+        </p:spPr>
+        <p:style>
+          <a:lnRef idx="1">
+            <a:schemeClr val="accent1"/>
+          </a:lnRef>
+          <a:fillRef idx="3">
+            <a:schemeClr val="accent1"/>
+          </a:fillRef>
+          <a:effectRef idx="2">
+            <a:schemeClr val="accent1"/>
+          </a:effectRef>
+          <a:fontRef idx="minor">
+            <a:schemeClr val="lt1"/>
+          </a:fontRef>
+        </p:style>
+        <p:txBody>
+          <a:bodyPr rtlCol="0" anchor="ctr"/>
+          <a:lstStyle/>
+          <a:p>
+            <a:pPr algn="ctr"/>
+          </a:p>
+        </p:txBody>
+      </p:sp>
+      <p:sp>
+        <p:nvSpPr>
+          <p:cNvPr id="3" name="TextBox 2"/>
           <p:cNvSpPr txBox="1"/>
           <p:nvPr/>
         </p:nvSpPr>
         <p:spPr>
           <a:xfrm>
-            <a:off x="548640" y="182880"/>
-            <a:ext cx="10972800" cy="548640"/>
+            <a:off x="548640" y="228600"/>
+            <a:ext cx="10972800" cy="640080"/>
           </a:xfrm>
           <a:prstGeom prst="rect">
             <a:avLst/>
@@ -4459,28 +4769,31 @@
           <a:lstStyle/>
           <a:p>
             <a:pPr algn="l">
-              <a:defRPr sz="2000" b="1">
+              <a:lnSpc>
+                <a:spcPct val="120000"/>
+              </a:lnSpc>
+              <a:defRPr sz="2400" b="1">
                 <a:solidFill>
                   <a:srgbClr val="1D9790"/>
                 </a:solidFill>
               </a:defRPr>
             </a:pPr>
             <a:r>
-              <a:t>SLIDE 14 — WHY THE DATA BECOMES A MOAT — Every Deployment Makes Platform More Valuable</a:t>
-            </a:r>
-          </a:p>
-        </p:txBody>
-      </p:sp>
-      <p:sp>
-        <p:nvSpPr>
-          <p:cNvPr id="3" name="TextBox 2"/>
+              <a:t>14 — Data / Calibration Moat — Every Deployment More Valuable</a:t>
+            </a:r>
+          </a:p>
+        </p:txBody>
+      </p:sp>
+      <p:sp>
+        <p:nvSpPr>
+          <p:cNvPr id="4" name="TextBox 3"/>
           <p:cNvSpPr txBox="1"/>
           <p:nvPr/>
         </p:nvSpPr>
         <p:spPr>
           <a:xfrm>
-            <a:off x="548640" y="914400"/>
-            <a:ext cx="10972800" cy="5486400"/>
+            <a:off x="548640" y="1005840"/>
+            <a:ext cx="6858000" cy="5486400"/>
           </a:xfrm>
           <a:prstGeom prst="rect">
             <a:avLst/>
@@ -4494,86 +4807,74 @@
           <a:lstStyle/>
           <a:p>
             <a:pPr>
-              <a:spcAft>
-                <a:spcPts val="500"/>
-              </a:spcAft>
-              <a:defRPr sz="1100">
-                <a:solidFill>
-                  <a:srgbClr val="13302B"/>
-                </a:solidFill>
-              </a:defRPr>
-            </a:pPr>
-            <a:r>
-              <a:t>A single satellite image is a commodity. But:</a:t>
-            </a:r>
-          </a:p>
-          <a:p>
-            <a:pPr>
-              <a:spcAft>
-                <a:spcPts val="500"/>
-              </a:spcAft>
-              <a:defRPr sz="1100">
-                <a:solidFill>
-                  <a:srgbClr val="13302B"/>
-                </a:solidFill>
-              </a:defRPr>
-            </a:pPr>
-            <a:r>
-              <a:t>Satellite history + AOI boundaries + Crop calendars + field observations + yield measurements + water conditions + model calibration + decision outcomes becomes much harder to reproduce.</a:t>
-            </a:r>
-          </a:p>
-          <a:p>
-            <a:pPr>
-              <a:spcAft>
-                <a:spcPts val="500"/>
-              </a:spcAft>
-              <a:defRPr sz="1100">
-                <a:solidFill>
-                  <a:srgbClr val="13302B"/>
-                </a:solidFill>
-              </a:defRPr>
-            </a:pPr>
-          </a:p>
-          <a:p>
-            <a:pPr>
-              <a:spcAft>
-                <a:spcPts val="500"/>
-              </a:spcAft>
-              <a:defRPr sz="1100">
-                <a:solidFill>
-                  <a:srgbClr val="13302B"/>
-                </a:solidFill>
-              </a:defRPr>
-            </a:pPr>
-            <a:r>
-              <a:t>BADC proposal explicitly identifies local calibration + multi-season satellite history + field observations as potential defensible layer.</a:t>
-            </a:r>
-          </a:p>
-          <a:p>
-            <a:pPr>
-              <a:spcAft>
-                <a:spcPts val="500"/>
-              </a:spcAft>
-              <a:defRPr sz="1100">
-                <a:solidFill>
-                  <a:srgbClr val="13302B"/>
-                </a:solidFill>
-              </a:defRPr>
-            </a:pPr>
-          </a:p>
-          <a:p>
-            <a:pPr>
-              <a:spcAft>
-                <a:spcPts val="500"/>
-              </a:spcAft>
-              <a:defRPr sz="1100">
-                <a:solidFill>
-                  <a:srgbClr val="13302B"/>
-                </a:solidFill>
-              </a:defRPr>
-            </a:pPr>
-            <a:r>
-              <a:t>The moat is not the satellite. The moat is the intelligence built around the satellite.</a:t>
+              <a:lnSpc>
+                <a:spcPct val="130000"/>
+              </a:lnSpc>
+              <a:spcAft>
+                <a:spcPts val="1000"/>
+              </a:spcAft>
+              <a:defRPr sz="1400">
+                <a:solidFill>
+                  <a:srgbClr val="13302B"/>
+                </a:solidFill>
+              </a:defRPr>
+            </a:pPr>
+            <a:r>
+              <a:t>• Single image is commodity — But history + AOI + calendars + field obs + yield + water + calibration + decision outcomes harder to reproduce</a:t>
+            </a:r>
+          </a:p>
+          <a:p>
+            <a:pPr>
+              <a:lnSpc>
+                <a:spcPct val="130000"/>
+              </a:lnSpc>
+              <a:spcAft>
+                <a:spcPts val="1000"/>
+              </a:spcAft>
+              <a:defRPr sz="1400">
+                <a:solidFill>
+                  <a:srgbClr val="13302B"/>
+                </a:solidFill>
+              </a:defRPr>
+            </a:pPr>
+            <a:r>
+              <a:t>• BADC proposal: local calibration + multi-season history + field obs as defensible layer</a:t>
+            </a:r>
+          </a:p>
+          <a:p>
+            <a:pPr>
+              <a:lnSpc>
+                <a:spcPct val="130000"/>
+              </a:lnSpc>
+              <a:spcAft>
+                <a:spcPts val="1000"/>
+              </a:spcAft>
+              <a:defRPr sz="1400">
+                <a:solidFill>
+                  <a:srgbClr val="13302B"/>
+                </a:solidFill>
+              </a:defRPr>
+            </a:pPr>
+            <a:r>
+              <a:t>• KH01 multi-year 2020→2025 + KH07 multi-year + DoF 4×4×16 become moat</a:t>
+            </a:r>
+          </a:p>
+          <a:p>
+            <a:pPr>
+              <a:lnSpc>
+                <a:spcPct val="130000"/>
+              </a:lnSpc>
+              <a:spcAft>
+                <a:spcPts val="1000"/>
+              </a:spcAft>
+              <a:defRPr sz="1400">
+                <a:solidFill>
+                  <a:srgbClr val="13302B"/>
+                </a:solidFill>
+              </a:defRPr>
+            </a:pPr>
+            <a:r>
+              <a:t>• Moat is intelligence built around satellite, not satellite itself</a:t>
             </a:r>
           </a:p>
         </p:txBody>
@@ -4606,14 +4907,57 @@
       <p:grpSpPr/>
       <p:sp>
         <p:nvSpPr>
-          <p:cNvPr id="2" name="TextBox 1"/>
+          <p:cNvPr id="2" name="Rectangle 1"/>
+          <p:cNvSpPr/>
+          <p:nvPr/>
+        </p:nvSpPr>
+        <p:spPr>
+          <a:xfrm>
+            <a:off x="0" y="0"/>
+            <a:ext cx="12188952" cy="73152"/>
+          </a:xfrm>
+          <a:prstGeom prst="rect">
+            <a:avLst/>
+          </a:prstGeom>
+          <a:solidFill>
+            <a:srgbClr val="1D9790"/>
+          </a:solidFill>
+          <a:ln>
+            <a:noFill/>
+          </a:ln>
+        </p:spPr>
+        <p:style>
+          <a:lnRef idx="1">
+            <a:schemeClr val="accent1"/>
+          </a:lnRef>
+          <a:fillRef idx="3">
+            <a:schemeClr val="accent1"/>
+          </a:fillRef>
+          <a:effectRef idx="2">
+            <a:schemeClr val="accent1"/>
+          </a:effectRef>
+          <a:fontRef idx="minor">
+            <a:schemeClr val="lt1"/>
+          </a:fontRef>
+        </p:style>
+        <p:txBody>
+          <a:bodyPr rtlCol="0" anchor="ctr"/>
+          <a:lstStyle/>
+          <a:p>
+            <a:pPr algn="ctr"/>
+          </a:p>
+        </p:txBody>
+      </p:sp>
+      <p:sp>
+        <p:nvSpPr>
+          <p:cNvPr id="3" name="TextBox 2"/>
           <p:cNvSpPr txBox="1"/>
           <p:nvPr/>
         </p:nvSpPr>
         <p:spPr>
           <a:xfrm>
-            <a:off x="548640" y="182880"/>
-            <a:ext cx="10972800" cy="548640"/>
+            <a:off x="548640" y="228600"/>
+            <a:ext cx="10972800" cy="640080"/>
           </a:xfrm>
           <a:prstGeom prst="rect">
             <a:avLst/>
@@ -4627,28 +4971,31 @@
           <a:lstStyle/>
           <a:p>
             <a:pPr algn="l">
-              <a:defRPr sz="2000" b="1">
+              <a:lnSpc>
+                <a:spcPct val="120000"/>
+              </a:lnSpc>
+              <a:defRPr sz="2400" b="1">
                 <a:solidFill>
                   <a:srgbClr val="1D9790"/>
                 </a:solidFill>
               </a:defRPr>
             </a:pPr>
             <a:r>
-              <a:t>SLIDE 15 — WHO PAYS? — Multiple Customer Segments</a:t>
-            </a:r>
-          </a:p>
-        </p:txBody>
-      </p:sp>
-      <p:sp>
-        <p:nvSpPr>
-          <p:cNvPr id="3" name="TextBox 2"/>
+              <a:t>15 — Who Pays — Multiple Customer Segments</a:t>
+            </a:r>
+          </a:p>
+        </p:txBody>
+      </p:sp>
+      <p:sp>
+        <p:nvSpPr>
+          <p:cNvPr id="4" name="TextBox 3"/>
           <p:cNvSpPr txBox="1"/>
           <p:nvPr/>
         </p:nvSpPr>
         <p:spPr>
           <a:xfrm>
-            <a:off x="548640" y="914400"/>
-            <a:ext cx="10972800" cy="5486400"/>
+            <a:off x="548640" y="1005840"/>
+            <a:ext cx="6858000" cy="5486400"/>
           </a:xfrm>
           <a:prstGeom prst="rect">
             <a:avLst/>
@@ -4662,92 +5009,92 @@
           <a:lstStyle/>
           <a:p>
             <a:pPr>
-              <a:spcAft>
-                <a:spcPts val="500"/>
-              </a:spcAft>
-              <a:defRPr sz="1100">
-                <a:solidFill>
-                  <a:srgbClr val="13302B"/>
-                </a:solidFill>
-              </a:defRPr>
-            </a:pPr>
-            <a:r>
-              <a:t>GOVERNMENT: BADC, DAE, Fisheries, Water resources, Environment</a:t>
-            </a:r>
-          </a:p>
-          <a:p>
-            <a:pPr>
-              <a:spcAft>
-                <a:spcPts val="500"/>
-              </a:spcAft>
-              <a:defRPr sz="1100">
-                <a:solidFill>
-                  <a:srgbClr val="13302B"/>
-                </a:solidFill>
-              </a:defRPr>
-            </a:pPr>
-            <a:r>
-              <a:t>DEVELOPMENT: FAO, World Bank, ADB, Climate programmes, NGOs</a:t>
-            </a:r>
-          </a:p>
-          <a:p>
-            <a:pPr>
-              <a:spcAft>
-                <a:spcPts val="500"/>
-              </a:spcAft>
-              <a:defRPr sz="1100">
-                <a:solidFill>
-                  <a:srgbClr val="13302B"/>
-                </a:solidFill>
-              </a:defRPr>
-            </a:pPr>
-            <a:r>
-              <a:t>AGRIBUSINESS: Input companies, Seed companies, Food companies, Agricultural enterprises</a:t>
-            </a:r>
-          </a:p>
-          <a:p>
-            <a:pPr>
-              <a:spcAft>
-                <a:spcPts val="500"/>
-              </a:spcAft>
-              <a:defRPr sz="1100">
-                <a:solidFill>
-                  <a:srgbClr val="13302B"/>
-                </a:solidFill>
-              </a:defRPr>
-            </a:pPr>
-            <a:r>
-              <a:t>AQUACULTURE: Fish farms, Shrimp farms, Hatcheries</a:t>
-            </a:r>
-          </a:p>
-          <a:p>
-            <a:pPr>
-              <a:spcAft>
-                <a:spcPts val="500"/>
-              </a:spcAft>
-              <a:defRPr sz="1100">
-                <a:solidFill>
-                  <a:srgbClr val="13302B"/>
-                </a:solidFill>
-              </a:defRPr>
-            </a:pPr>
-            <a:r>
-              <a:t>FINANCIAL: Insurance, Agricultural finance, Climate finance</a:t>
-            </a:r>
-          </a:p>
-          <a:p>
-            <a:pPr>
-              <a:spcAft>
-                <a:spcPts val="500"/>
-              </a:spcAft>
-              <a:defRPr sz="1100">
-                <a:solidFill>
-                  <a:srgbClr val="13302B"/>
-                </a:solidFill>
-              </a:defRPr>
-            </a:pPr>
-            <a:r>
-              <a:t>RESEARCH: Universities, Research organizations, Policy institutions</a:t>
+              <a:lnSpc>
+                <a:spcPct val="130000"/>
+              </a:lnSpc>
+              <a:spcAft>
+                <a:spcPts val="1000"/>
+              </a:spcAft>
+              <a:defRPr sz="1400">
+                <a:solidFill>
+                  <a:srgbClr val="13302B"/>
+                </a:solidFill>
+              </a:defRPr>
+            </a:pPr>
+            <a:r>
+              <a:t>• GOVERNMENT: BADC, DAE, Fisheries, Water resources, Environment — Live: badc_kh01, badc_kh07, DoF/</a:t>
+            </a:r>
+          </a:p>
+          <a:p>
+            <a:pPr>
+              <a:lnSpc>
+                <a:spcPct val="130000"/>
+              </a:lnSpc>
+              <a:spcAft>
+                <a:spcPts val="1000"/>
+              </a:spcAft>
+              <a:defRPr sz="1400">
+                <a:solidFill>
+                  <a:srgbClr val="13302B"/>
+                </a:solidFill>
+              </a:defRPr>
+            </a:pPr>
+            <a:r>
+              <a:t>• DEVELOPMENT: FAO, World Bank, ADB, Climate programmes, NGOs</a:t>
+            </a:r>
+          </a:p>
+          <a:p>
+            <a:pPr>
+              <a:lnSpc>
+                <a:spcPct val="130000"/>
+              </a:lnSpc>
+              <a:spcAft>
+                <a:spcPts val="1000"/>
+              </a:spcAft>
+              <a:defRPr sz="1400">
+                <a:solidFill>
+                  <a:srgbClr val="13302B"/>
+                </a:solidFill>
+              </a:defRPr>
+            </a:pPr>
+            <a:r>
+              <a:t>• AGRIBUSINESS: Input, Seed, Food, Agricultural enterprises</a:t>
+            </a:r>
+          </a:p>
+          <a:p>
+            <a:pPr>
+              <a:lnSpc>
+                <a:spcPct val="130000"/>
+              </a:lnSpc>
+              <a:spcAft>
+                <a:spcPts val="1000"/>
+              </a:spcAft>
+              <a:defRPr sz="1400">
+                <a:solidFill>
+                  <a:srgbClr val="13302B"/>
+                </a:solidFill>
+              </a:defRPr>
+            </a:pPr>
+            <a:r>
+              <a:t>• AQUACULTURE: Fish farms, Shrimp, Hatcheries — DoF concrete demo</a:t>
+            </a:r>
+          </a:p>
+          <a:p>
+            <a:pPr>
+              <a:lnSpc>
+                <a:spcPct val="130000"/>
+              </a:lnSpc>
+              <a:spcAft>
+                <a:spcPts val="1000"/>
+              </a:spcAft>
+              <a:defRPr sz="1400">
+                <a:solidFill>
+                  <a:srgbClr val="13302B"/>
+                </a:solidFill>
+              </a:defRPr>
+            </a:pPr>
+            <a:r>
+              <a:t>• FINANCIAL: Insurance, Agri finance, Climate finance | RESEARCH: Universities, Research, Policy</a:t>
             </a:r>
           </a:p>
         </p:txBody>
@@ -4780,14 +5127,57 @@
       <p:grpSpPr/>
       <p:sp>
         <p:nvSpPr>
-          <p:cNvPr id="2" name="TextBox 1"/>
+          <p:cNvPr id="2" name="Rectangle 1"/>
+          <p:cNvSpPr/>
+          <p:nvPr/>
+        </p:nvSpPr>
+        <p:spPr>
+          <a:xfrm>
+            <a:off x="0" y="0"/>
+            <a:ext cx="12188952" cy="73152"/>
+          </a:xfrm>
+          <a:prstGeom prst="rect">
+            <a:avLst/>
+          </a:prstGeom>
+          <a:solidFill>
+            <a:srgbClr val="1D9790"/>
+          </a:solidFill>
+          <a:ln>
+            <a:noFill/>
+          </a:ln>
+        </p:spPr>
+        <p:style>
+          <a:lnRef idx="1">
+            <a:schemeClr val="accent1"/>
+          </a:lnRef>
+          <a:fillRef idx="3">
+            <a:schemeClr val="accent1"/>
+          </a:fillRef>
+          <a:effectRef idx="2">
+            <a:schemeClr val="accent1"/>
+          </a:effectRef>
+          <a:fontRef idx="minor">
+            <a:schemeClr val="lt1"/>
+          </a:fontRef>
+        </p:style>
+        <p:txBody>
+          <a:bodyPr rtlCol="0" anchor="ctr"/>
+          <a:lstStyle/>
+          <a:p>
+            <a:pPr algn="ctr"/>
+          </a:p>
+        </p:txBody>
+      </p:sp>
+      <p:sp>
+        <p:nvSpPr>
+          <p:cNvPr id="3" name="TextBox 2"/>
           <p:cNvSpPr txBox="1"/>
           <p:nvPr/>
         </p:nvSpPr>
         <p:spPr>
           <a:xfrm>
-            <a:off x="548640" y="182880"/>
-            <a:ext cx="10972800" cy="548640"/>
+            <a:off x="548640" y="228600"/>
+            <a:ext cx="10972800" cy="640080"/>
           </a:xfrm>
           <a:prstGeom prst="rect">
             <a:avLst/>
@@ -4801,28 +5191,31 @@
           <a:lstStyle/>
           <a:p>
             <a:pPr algn="l">
-              <a:defRPr sz="2000" b="1">
+              <a:lnSpc>
+                <a:spcPct val="120000"/>
+              </a:lnSpc>
+              <a:defRPr sz="2400" b="1">
                 <a:solidFill>
                   <a:srgbClr val="1D9790"/>
                 </a:solidFill>
               </a:defRPr>
             </a:pPr>
             <a:r>
-              <a:t>SLIDE 16 — REVENUE MODEL — Project Revenue → Recurring Revenue → Platform Revenue</a:t>
-            </a:r>
-          </a:p>
-        </p:txBody>
-      </p:sp>
-      <p:sp>
-        <p:nvSpPr>
-          <p:cNvPr id="3" name="TextBox 2"/>
+              <a:t>16 — Revenue Model — Project → Recurring → Platform</a:t>
+            </a:r>
+          </a:p>
+        </p:txBody>
+      </p:sp>
+      <p:sp>
+        <p:nvSpPr>
+          <p:cNvPr id="4" name="TextBox 3"/>
           <p:cNvSpPr txBox="1"/>
           <p:nvPr/>
         </p:nvSpPr>
         <p:spPr>
           <a:xfrm>
-            <a:off x="548640" y="914400"/>
-            <a:ext cx="10972800" cy="5486400"/>
+            <a:off x="548640" y="1005840"/>
+            <a:ext cx="6858000" cy="5486400"/>
           </a:xfrm>
           <a:prstGeom prst="rect">
             <a:avLst/>
@@ -4836,134 +5229,110 @@
           <a:lstStyle/>
           <a:p>
             <a:pPr>
-              <a:spcAft>
-                <a:spcPts val="500"/>
-              </a:spcAft>
-              <a:defRPr sz="1100">
-                <a:solidFill>
-                  <a:srgbClr val="13302B"/>
-                </a:solidFill>
-              </a:defRPr>
-            </a:pPr>
-            <a:r>
-              <a:t>Phase A — Government / Development Projects: US$20K–$100K+ project opportunities</a:t>
-            </a:r>
-          </a:p>
-          <a:p>
-            <a:pPr>
-              <a:spcAft>
-                <a:spcPts val="500"/>
-              </a:spcAft>
-              <a:defRPr sz="1100">
-                <a:solidFill>
-                  <a:srgbClr val="13302B"/>
-                </a:solidFill>
-              </a:defRPr>
-            </a:pPr>
-            <a:r>
-              <a:t>Phase B — Annual Monitoring: Recurring contracts</a:t>
-            </a:r>
-          </a:p>
-          <a:p>
-            <a:pPr>
-              <a:spcAft>
-                <a:spcPts val="500"/>
-              </a:spcAft>
-              <a:defRPr sz="1100">
-                <a:solidFill>
-                  <a:srgbClr val="13302B"/>
-                </a:solidFill>
-              </a:defRPr>
-            </a:pPr>
-            <a:r>
-              <a:t>Phase C — Enterprise SaaS: Dashboard subscriptions</a:t>
-            </a:r>
-          </a:p>
-          <a:p>
-            <a:pPr>
-              <a:spcAft>
-                <a:spcPts val="500"/>
-              </a:spcAft>
-              <a:defRPr sz="1100">
-                <a:solidFill>
-                  <a:srgbClr val="13302B"/>
-                </a:solidFill>
-              </a:defRPr>
-            </a:pPr>
-            <a:r>
-              <a:t>Phase D — API: Usage-based intelligence</a:t>
-            </a:r>
-          </a:p>
-          <a:p>
-            <a:pPr>
-              <a:spcAft>
-                <a:spcPts val="500"/>
-              </a:spcAft>
-              <a:defRPr sz="1100">
-                <a:solidFill>
-                  <a:srgbClr val="13302B"/>
-                </a:solidFill>
-              </a:defRPr>
-            </a:pPr>
-            <a:r>
-              <a:t>Phase E — Digital Twin: Premium predictive intelligence</a:t>
-            </a:r>
-          </a:p>
-          <a:p>
-            <a:pPr>
-              <a:spcAft>
-                <a:spcPts val="500"/>
-              </a:spcAft>
-              <a:defRPr sz="1100">
-                <a:solidFill>
-                  <a:srgbClr val="13302B"/>
-                </a:solidFill>
-              </a:defRPr>
-            </a:pPr>
-          </a:p>
-          <a:p>
-            <a:pPr>
-              <a:spcAft>
-                <a:spcPts val="500"/>
-              </a:spcAft>
-              <a:defRPr sz="1100">
-                <a:solidFill>
-                  <a:srgbClr val="13302B"/>
-                </a:solidFill>
-              </a:defRPr>
-            </a:pPr>
-            <a:r>
-              <a:t>Realistic investor example (target/scenario, not current revenue):</a:t>
-            </a:r>
-          </a:p>
-          <a:p>
-            <a:pPr>
-              <a:spcAft>
-                <a:spcPts val="500"/>
-              </a:spcAft>
-              <a:defRPr sz="1100">
-                <a:solidFill>
-                  <a:srgbClr val="13302B"/>
-                </a:solidFill>
-              </a:defRPr>
-            </a:pPr>
-            <a:r>
-              <a:t>65,000 target farms × $4 = $260,000 ARR/quarter = $1.04M annual recurring revenue</a:t>
-            </a:r>
-          </a:p>
-          <a:p>
-            <a:pPr>
-              <a:spcAft>
-                <a:spcPts val="500"/>
-              </a:spcAft>
-              <a:defRPr sz="1100">
-                <a:solidFill>
-                  <a:srgbClr val="13302B"/>
-                </a:solidFill>
-              </a:defRPr>
-            </a:pPr>
-            <a:r>
-              <a:t>This must be labeled as target/scenario, not current revenue — simple unit-economics investors need</a:t>
+              <a:lnSpc>
+                <a:spcPct val="130000"/>
+              </a:lnSpc>
+              <a:spcAft>
+                <a:spcPts val="1000"/>
+              </a:spcAft>
+              <a:defRPr sz="1400">
+                <a:solidFill>
+                  <a:srgbClr val="13302B"/>
+                </a:solidFill>
+              </a:defRPr>
+            </a:pPr>
+            <a:r>
+              <a:t>• Phase A Govt/Dev Projects US$20K–$100K+ (KH01/KH07/DoF pilots)</a:t>
+            </a:r>
+          </a:p>
+          <a:p>
+            <a:pPr>
+              <a:lnSpc>
+                <a:spcPct val="130000"/>
+              </a:lnSpc>
+              <a:spcAft>
+                <a:spcPts val="1000"/>
+              </a:spcAft>
+              <a:defRPr sz="1400">
+                <a:solidFill>
+                  <a:srgbClr val="13302B"/>
+                </a:solidFill>
+              </a:defRPr>
+            </a:pPr>
+            <a:r>
+              <a:t>• Phase B Annual Monitoring — recurring contracts</a:t>
+            </a:r>
+          </a:p>
+          <a:p>
+            <a:pPr>
+              <a:lnSpc>
+                <a:spcPct val="130000"/>
+              </a:lnSpc>
+              <a:spcAft>
+                <a:spcPts val="1000"/>
+              </a:spcAft>
+              <a:defRPr sz="1400">
+                <a:solidFill>
+                  <a:srgbClr val="13302B"/>
+                </a:solidFill>
+              </a:defRPr>
+            </a:pPr>
+            <a:r>
+              <a:t>• Phase C Enterprise SaaS — dashboard subscriptions</a:t>
+            </a:r>
+          </a:p>
+          <a:p>
+            <a:pPr>
+              <a:lnSpc>
+                <a:spcPct val="130000"/>
+              </a:lnSpc>
+              <a:spcAft>
+                <a:spcPts val="1000"/>
+              </a:spcAft>
+              <a:defRPr sz="1400">
+                <a:solidFill>
+                  <a:srgbClr val="13302B"/>
+                </a:solidFill>
+              </a:defRPr>
+            </a:pPr>
+            <a:r>
+              <a:t>• Phase D API — usage-based intelligence</a:t>
+            </a:r>
+          </a:p>
+          <a:p>
+            <a:pPr>
+              <a:lnSpc>
+                <a:spcPct val="130000"/>
+              </a:lnSpc>
+              <a:spcAft>
+                <a:spcPts val="1000"/>
+              </a:spcAft>
+              <a:defRPr sz="1400">
+                <a:solidFill>
+                  <a:srgbClr val="13302B"/>
+                </a:solidFill>
+              </a:defRPr>
+            </a:pPr>
+            <a:r>
+              <a:t>• Phase E Digital Twin — premium predictive</a:t>
+            </a:r>
+          </a:p>
+          <a:p>
+            <a:pPr>
+              <a:lnSpc>
+                <a:spcPct val="130000"/>
+              </a:lnSpc>
+              <a:spcAft>
+                <a:spcPts val="1000"/>
+              </a:spcAft>
+              <a:defRPr sz="1400">
+                <a:solidFill>
+                  <a:srgbClr val="13302B"/>
+                </a:solidFill>
+              </a:defRPr>
+            </a:pPr>
+            <a:r>
+              <a:t>• Example target: 65,000 farms × $4 = $260K ARR/quarter = $1.04M ARR — simple unit-economics</a:t>
             </a:r>
           </a:p>
         </p:txBody>
@@ -4996,14 +5365,57 @@
       <p:grpSpPr/>
       <p:sp>
         <p:nvSpPr>
-          <p:cNvPr id="2" name="TextBox 1"/>
+          <p:cNvPr id="2" name="Rectangle 1"/>
+          <p:cNvSpPr/>
+          <p:nvPr/>
+        </p:nvSpPr>
+        <p:spPr>
+          <a:xfrm>
+            <a:off x="0" y="0"/>
+            <a:ext cx="12188952" cy="73152"/>
+          </a:xfrm>
+          <a:prstGeom prst="rect">
+            <a:avLst/>
+          </a:prstGeom>
+          <a:solidFill>
+            <a:srgbClr val="1D9790"/>
+          </a:solidFill>
+          <a:ln>
+            <a:noFill/>
+          </a:ln>
+        </p:spPr>
+        <p:style>
+          <a:lnRef idx="1">
+            <a:schemeClr val="accent1"/>
+          </a:lnRef>
+          <a:fillRef idx="3">
+            <a:schemeClr val="accent1"/>
+          </a:fillRef>
+          <a:effectRef idx="2">
+            <a:schemeClr val="accent1"/>
+          </a:effectRef>
+          <a:fontRef idx="minor">
+            <a:schemeClr val="lt1"/>
+          </a:fontRef>
+        </p:style>
+        <p:txBody>
+          <a:bodyPr rtlCol="0" anchor="ctr"/>
+          <a:lstStyle/>
+          <a:p>
+            <a:pPr algn="ctr"/>
+          </a:p>
+        </p:txBody>
+      </p:sp>
+      <p:sp>
+        <p:nvSpPr>
+          <p:cNvPr id="3" name="TextBox 2"/>
           <p:cNvSpPr txBox="1"/>
           <p:nvPr/>
         </p:nvSpPr>
         <p:spPr>
           <a:xfrm>
-            <a:off x="548640" y="182880"/>
-            <a:ext cx="10972800" cy="548640"/>
+            <a:off x="548640" y="228600"/>
+            <a:ext cx="10972800" cy="640080"/>
           </a:xfrm>
           <a:prstGeom prst="rect">
             <a:avLst/>
@@ -5017,28 +5429,31 @@
           <a:lstStyle/>
           <a:p>
             <a:pPr algn="l">
-              <a:defRPr sz="2000" b="1">
+              <a:lnSpc>
+                <a:spcPct val="120000"/>
+              </a:lnSpc>
+              <a:defRPr sz="2400" b="1">
                 <a:solidFill>
                   <a:srgbClr val="1D9790"/>
                 </a:solidFill>
               </a:defRPr>
             </a:pPr>
             <a:r>
-              <a:t>SLIDE 17 — REVENUE SCENARIO — Illustrative Commercial Roadmap</a:t>
-            </a:r>
-          </a:p>
-        </p:txBody>
-      </p:sp>
-      <p:sp>
-        <p:nvSpPr>
-          <p:cNvPr id="3" name="TextBox 2"/>
+              <a:t>17 — Revenue Scenarios — Illustrative Commercial Roadmap</a:t>
+            </a:r>
+          </a:p>
+        </p:txBody>
+      </p:sp>
+      <p:sp>
+        <p:nvSpPr>
+          <p:cNvPr id="4" name="TextBox 3"/>
           <p:cNvSpPr txBox="1"/>
           <p:nvPr/>
         </p:nvSpPr>
         <p:spPr>
           <a:xfrm>
-            <a:off x="548640" y="914400"/>
-            <a:ext cx="10972800" cy="5486400"/>
+            <a:off x="548640" y="1005840"/>
+            <a:ext cx="6858000" cy="5486400"/>
           </a:xfrm>
           <a:prstGeom prst="rect">
             <a:avLst/>
@@ -5052,104 +5467,92 @@
           <a:lstStyle/>
           <a:p>
             <a:pPr>
-              <a:spcAft>
-                <a:spcPts val="500"/>
-              </a:spcAft>
-              <a:defRPr sz="1100">
-                <a:solidFill>
-                  <a:srgbClr val="13302B"/>
-                </a:solidFill>
-              </a:defRPr>
-            </a:pPr>
-            <a:r>
-              <a:t>2026 — Technology + pilots: GeoData, AquaCrop, AquaData</a:t>
-            </a:r>
-          </a:p>
-          <a:p>
-            <a:pPr>
-              <a:spcAft>
-                <a:spcPts val="500"/>
-              </a:spcAft>
-              <a:defRPr sz="1100">
-                <a:solidFill>
-                  <a:srgbClr val="13302B"/>
-                </a:solidFill>
-              </a:defRPr>
-            </a:pPr>
-            <a:r>
-              <a:t>2027 — First recurring contracts: Government, NGO, Agribusiness, Aquaculture</a:t>
-            </a:r>
-          </a:p>
-          <a:p>
-            <a:pPr>
-              <a:spcAft>
-                <a:spcPts val="500"/>
-              </a:spcAft>
-              <a:defRPr sz="1100">
-                <a:solidFill>
-                  <a:srgbClr val="13302B"/>
-                </a:solidFill>
-              </a:defRPr>
-            </a:pPr>
-            <a:r>
-              <a:t>2028 — Platform expansion: SaaS, API, Multi-district</a:t>
-            </a:r>
-          </a:p>
-          <a:p>
-            <a:pPr>
-              <a:spcAft>
-                <a:spcPts val="500"/>
-              </a:spcAft>
-              <a:defRPr sz="1100">
-                <a:solidFill>
-                  <a:srgbClr val="13302B"/>
-                </a:solidFill>
-              </a:defRPr>
-            </a:pPr>
-            <a:r>
-              <a:t>2029 — National + international: Multi-crop, Multi-country, Multi-domain</a:t>
-            </a:r>
-          </a:p>
-          <a:p>
-            <a:pPr>
-              <a:spcAft>
-                <a:spcPts val="500"/>
-              </a:spcAft>
-              <a:defRPr sz="1100">
-                <a:solidFill>
-                  <a:srgbClr val="13302B"/>
-                </a:solidFill>
-              </a:defRPr>
-            </a:pPr>
-          </a:p>
-          <a:p>
-            <a:pPr>
-              <a:spcAft>
-                <a:spcPts val="500"/>
-              </a:spcAft>
-              <a:defRPr sz="1100">
-                <a:solidFill>
-                  <a:srgbClr val="13302B"/>
-                </a:solidFill>
-              </a:defRPr>
-            </a:pPr>
-            <a:r>
-              <a:t>Revenue architecture: Projects → Subscriptions → API → Digital Twins → Data Intelligence Platform</a:t>
-            </a:r>
-          </a:p>
-          <a:p>
-            <a:pPr>
-              <a:spcAft>
-                <a:spcPts val="500"/>
-              </a:spcAft>
-              <a:defRPr sz="1100">
-                <a:solidFill>
-                  <a:srgbClr val="13302B"/>
-                </a:solidFill>
-              </a:defRPr>
-            </a:pPr>
-            <a:r>
-              <a:t>This is much stronger than promising single huge revenue number.</a:t>
+              <a:lnSpc>
+                <a:spcPct val="130000"/>
+              </a:lnSpc>
+              <a:spcAft>
+                <a:spcPts val="1000"/>
+              </a:spcAft>
+              <a:defRPr sz="1400">
+                <a:solidFill>
+                  <a:srgbClr val="13302B"/>
+                </a:solidFill>
+              </a:defRPr>
+            </a:pPr>
+            <a:r>
+              <a:t>• 2026 Technology+pilots GeoData (KH01/KH07) AquaCrop AquaData incl DoF demo</a:t>
+            </a:r>
+          </a:p>
+          <a:p>
+            <a:pPr>
+              <a:lnSpc>
+                <a:spcPct val="130000"/>
+              </a:lnSpc>
+              <a:spcAft>
+                <a:spcPts val="1000"/>
+              </a:spcAft>
+              <a:defRPr sz="1400">
+                <a:solidFill>
+                  <a:srgbClr val="13302B"/>
+                </a:solidFill>
+              </a:defRPr>
+            </a:pPr>
+            <a:r>
+              <a:t>• 2027 First recurring contracts Govt (BADC+DoF) NGO Agribusiness Aquaculture</a:t>
+            </a:r>
+          </a:p>
+          <a:p>
+            <a:pPr>
+              <a:lnSpc>
+                <a:spcPct val="130000"/>
+              </a:lnSpc>
+              <a:spcAft>
+                <a:spcPts val="1000"/>
+              </a:spcAft>
+              <a:defRPr sz="1400">
+                <a:solidFill>
+                  <a:srgbClr val="13302B"/>
+                </a:solidFill>
+              </a:defRPr>
+            </a:pPr>
+            <a:r>
+              <a:t>• 2028 Platform expansion SaaS API Multi-district</a:t>
+            </a:r>
+          </a:p>
+          <a:p>
+            <a:pPr>
+              <a:lnSpc>
+                <a:spcPct val="130000"/>
+              </a:lnSpc>
+              <a:spcAft>
+                <a:spcPts val="1000"/>
+              </a:spcAft>
+              <a:defRPr sz="1400">
+                <a:solidFill>
+                  <a:srgbClr val="13302B"/>
+                </a:solidFill>
+              </a:defRPr>
+            </a:pPr>
+            <a:r>
+              <a:t>• 2029 National+international Multi-crop Multi-country Multi-domain</a:t>
+            </a:r>
+          </a:p>
+          <a:p>
+            <a:pPr>
+              <a:lnSpc>
+                <a:spcPct val="130000"/>
+              </a:lnSpc>
+              <a:spcAft>
+                <a:spcPts val="1000"/>
+              </a:spcAft>
+              <a:defRPr sz="1400">
+                <a:solidFill>
+                  <a:srgbClr val="13302B"/>
+                </a:solidFill>
+              </a:defRPr>
+            </a:pPr>
+            <a:r>
+              <a:t>• Projects → Subscriptions → API → Digital Twins → Data Intelligence Platform</a:t>
             </a:r>
           </a:p>
         </p:txBody>
@@ -5182,14 +5585,57 @@
       <p:grpSpPr/>
       <p:sp>
         <p:nvSpPr>
-          <p:cNvPr id="2" name="TextBox 1"/>
+          <p:cNvPr id="2" name="Rectangle 1"/>
+          <p:cNvSpPr/>
+          <p:nvPr/>
+        </p:nvSpPr>
+        <p:spPr>
+          <a:xfrm>
+            <a:off x="0" y="0"/>
+            <a:ext cx="12188952" cy="73152"/>
+          </a:xfrm>
+          <a:prstGeom prst="rect">
+            <a:avLst/>
+          </a:prstGeom>
+          <a:solidFill>
+            <a:srgbClr val="1D9790"/>
+          </a:solidFill>
+          <a:ln>
+            <a:noFill/>
+          </a:ln>
+        </p:spPr>
+        <p:style>
+          <a:lnRef idx="1">
+            <a:schemeClr val="accent1"/>
+          </a:lnRef>
+          <a:fillRef idx="3">
+            <a:schemeClr val="accent1"/>
+          </a:fillRef>
+          <a:effectRef idx="2">
+            <a:schemeClr val="accent1"/>
+          </a:effectRef>
+          <a:fontRef idx="minor">
+            <a:schemeClr val="lt1"/>
+          </a:fontRef>
+        </p:style>
+        <p:txBody>
+          <a:bodyPr rtlCol="0" anchor="ctr"/>
+          <a:lstStyle/>
+          <a:p>
+            <a:pPr algn="ctr"/>
+          </a:p>
+        </p:txBody>
+      </p:sp>
+      <p:sp>
+        <p:nvSpPr>
+          <p:cNvPr id="3" name="TextBox 2"/>
           <p:cNvSpPr txBox="1"/>
           <p:nvPr/>
         </p:nvSpPr>
         <p:spPr>
           <a:xfrm>
-            <a:off x="548640" y="182880"/>
-            <a:ext cx="10972800" cy="548640"/>
+            <a:off x="548640" y="228600"/>
+            <a:ext cx="10972800" cy="640080"/>
           </a:xfrm>
           <a:prstGeom prst="rect">
             <a:avLst/>
@@ -5203,28 +5649,31 @@
           <a:lstStyle/>
           <a:p>
             <a:pPr algn="l">
-              <a:defRPr sz="2000" b="1">
+              <a:lnSpc>
+                <a:spcPct val="120000"/>
+              </a:lnSpc>
+              <a:defRPr sz="2400" b="1">
                 <a:solidFill>
                   <a:srgbClr val="FFFFFF"/>
                 </a:solidFill>
               </a:defRPr>
             </a:pPr>
             <a:r>
-              <a:t>SLIDE 18 — WHY NOW? — The Technology Has Crossed First Barrier</a:t>
-            </a:r>
-          </a:p>
-        </p:txBody>
-      </p:sp>
-      <p:sp>
-        <p:nvSpPr>
-          <p:cNvPr id="3" name="TextBox 2"/>
+              <a:t>18 — Why Now — Technology Crossed First Barrier</a:t>
+            </a:r>
+          </a:p>
+        </p:txBody>
+      </p:sp>
+      <p:sp>
+        <p:nvSpPr>
+          <p:cNvPr id="4" name="TextBox 3"/>
           <p:cNvSpPr txBox="1"/>
           <p:nvPr/>
         </p:nvSpPr>
         <p:spPr>
           <a:xfrm>
-            <a:off x="548640" y="914400"/>
-            <a:ext cx="10972800" cy="5486400"/>
+            <a:off x="548640" y="1005840"/>
+            <a:ext cx="6858000" cy="5486400"/>
           </a:xfrm>
           <a:prstGeom prst="rect">
             <a:avLst/>
@@ -5238,146 +5687,92 @@
           <a:lstStyle/>
           <a:p>
             <a:pPr>
-              <a:spcAft>
-                <a:spcPts val="500"/>
-              </a:spcAft>
-              <a:defRPr sz="1100">
+              <a:lnSpc>
+                <a:spcPct val="130000"/>
+              </a:lnSpc>
+              <a:spcAft>
+                <a:spcPts val="1000"/>
+              </a:spcAft>
+              <a:defRPr sz="1400">
                 <a:solidFill>
                   <a:srgbClr val="FFFFFF"/>
                 </a:solidFill>
               </a:defRPr>
             </a:pPr>
             <a:r>
-              <a:t>Satellite data exists.</a:t>
-            </a:r>
-          </a:p>
-          <a:p>
-            <a:pPr>
-              <a:spcAft>
-                <a:spcPts val="500"/>
-              </a:spcAft>
-              <a:defRPr sz="1100">
+              <a:t>• Satellite data exists. AI capability exists. Crop simulation exists.</a:t>
+            </a:r>
+          </a:p>
+          <a:p>
+            <a:pPr>
+              <a:lnSpc>
+                <a:spcPct val="130000"/>
+              </a:lnSpc>
+              <a:spcAft>
+                <a:spcPts val="1000"/>
+              </a:spcAft>
+              <a:defRPr sz="1400">
                 <a:solidFill>
                   <a:srgbClr val="FFFFFF"/>
                 </a:solidFill>
               </a:defRPr>
             </a:pPr>
             <a:r>
-              <a:t>AI capability exists.</a:t>
-            </a:r>
-          </a:p>
-          <a:p>
-            <a:pPr>
-              <a:spcAft>
-                <a:spcPts val="500"/>
-              </a:spcAft>
-              <a:defRPr sz="1100">
+              <a:t>• Government demand exists. Climate risk increasing.</a:t>
+            </a:r>
+          </a:p>
+          <a:p>
+            <a:pPr>
+              <a:lnSpc>
+                <a:spcPct val="130000"/>
+              </a:lnSpc>
+              <a:spcAft>
+                <a:spcPts val="1000"/>
+              </a:spcAft>
+              <a:defRPr sz="1400">
                 <a:solidFill>
                   <a:srgbClr val="FFFFFF"/>
                 </a:solidFill>
               </a:defRPr>
             </a:pPr>
             <a:r>
-              <a:t>Crop simulation exists.</a:t>
-            </a:r>
-          </a:p>
-          <a:p>
-            <a:pPr>
-              <a:spcAft>
-                <a:spcPts val="500"/>
-              </a:spcAft>
-              <a:defRPr sz="1100">
+              <a:t>• Missing piece: commercialization + validation + scale</a:t>
+            </a:r>
+          </a:p>
+          <a:p>
+            <a:pPr>
+              <a:lnSpc>
+                <a:spcPct val="130000"/>
+              </a:lnSpc>
+              <a:spcAft>
+                <a:spcPts val="1000"/>
+              </a:spcAft>
+              <a:defRPr sz="1400">
                 <a:solidFill>
                   <a:srgbClr val="FFFFFF"/>
                 </a:solidFill>
               </a:defRPr>
             </a:pPr>
             <a:r>
-              <a:t>Government demand exists.</a:t>
-            </a:r>
-          </a:p>
-          <a:p>
-            <a:pPr>
-              <a:spcAft>
-                <a:spcPts val="500"/>
-              </a:spcAft>
-              <a:defRPr sz="1100">
+              <a:t>• BADC proposal: pipeline executable, next repeated observations, ground truth, local calibration</a:t>
+            </a:r>
+          </a:p>
+          <a:p>
+            <a:pPr>
+              <a:lnSpc>
+                <a:spcPct val="130000"/>
+              </a:lnSpc>
+              <a:spcAft>
+                <a:spcPts val="1000"/>
+              </a:spcAft>
+              <a:defRPr sz="1400">
                 <a:solidFill>
                   <a:srgbClr val="FFFFFF"/>
                 </a:solidFill>
               </a:defRPr>
             </a:pPr>
             <a:r>
-              <a:t>Climate risk is increasing.</a:t>
-            </a:r>
-          </a:p>
-          <a:p>
-            <a:pPr>
-              <a:spcAft>
-                <a:spcPts val="500"/>
-              </a:spcAft>
-              <a:defRPr sz="1100">
-                <a:solidFill>
-                  <a:srgbClr val="FFFFFF"/>
-                </a:solidFill>
-              </a:defRPr>
-            </a:pPr>
-            <a:r>
-              <a:t>The missing piece is commercialization + validation + scale.</a:t>
-            </a:r>
-          </a:p>
-          <a:p>
-            <a:pPr>
-              <a:spcAft>
-                <a:spcPts val="500"/>
-              </a:spcAft>
-              <a:defRPr sz="1100">
-                <a:solidFill>
-                  <a:srgbClr val="FFFFFF"/>
-                </a:solidFill>
-              </a:defRPr>
-            </a:pPr>
-          </a:p>
-          <a:p>
-            <a:pPr>
-              <a:spcAft>
-                <a:spcPts val="500"/>
-              </a:spcAft>
-              <a:defRPr sz="1100">
-                <a:solidFill>
-                  <a:srgbClr val="FFFFFF"/>
-                </a:solidFill>
-              </a:defRPr>
-            </a:pPr>
-            <a:r>
-              <a:t>BADC proposal says exactly this: current technology pipeline is executable, while next step is repeated observations, ground truth, local calibration and operational integration.</a:t>
-            </a:r>
-          </a:p>
-          <a:p>
-            <a:pPr>
-              <a:spcAft>
-                <a:spcPts val="500"/>
-              </a:spcAft>
-              <a:defRPr sz="1100">
-                <a:solidFill>
-                  <a:srgbClr val="FFFFFF"/>
-                </a:solidFill>
-              </a:defRPr>
-            </a:pPr>
-          </a:p>
-          <a:p>
-            <a:pPr>
-              <a:spcAft>
-                <a:spcPts val="500"/>
-              </a:spcAft>
-              <a:defRPr sz="1100">
-                <a:solidFill>
-                  <a:srgbClr val="FFFFFF"/>
-                </a:solidFill>
-              </a:defRPr>
-            </a:pPr>
-            <a:r>
-              <a:t>This is the investment window.</a:t>
+              <a:t>• This is the investment window — Three live demos prove breadth without losing main focus</a:t>
             </a:r>
           </a:p>
         </p:txBody>
@@ -5410,14 +5805,57 @@
       <p:grpSpPr/>
       <p:sp>
         <p:nvSpPr>
-          <p:cNvPr id="2" name="TextBox 1"/>
+          <p:cNvPr id="2" name="Rectangle 1"/>
+          <p:cNvSpPr/>
+          <p:nvPr/>
+        </p:nvSpPr>
+        <p:spPr>
+          <a:xfrm>
+            <a:off x="0" y="0"/>
+            <a:ext cx="12188952" cy="73152"/>
+          </a:xfrm>
+          <a:prstGeom prst="rect">
+            <a:avLst/>
+          </a:prstGeom>
+          <a:solidFill>
+            <a:srgbClr val="1D9790"/>
+          </a:solidFill>
+          <a:ln>
+            <a:noFill/>
+          </a:ln>
+        </p:spPr>
+        <p:style>
+          <a:lnRef idx="1">
+            <a:schemeClr val="accent1"/>
+          </a:lnRef>
+          <a:fillRef idx="3">
+            <a:schemeClr val="accent1"/>
+          </a:fillRef>
+          <a:effectRef idx="2">
+            <a:schemeClr val="accent1"/>
+          </a:effectRef>
+          <a:fontRef idx="minor">
+            <a:schemeClr val="lt1"/>
+          </a:fontRef>
+        </p:style>
+        <p:txBody>
+          <a:bodyPr rtlCol="0" anchor="ctr"/>
+          <a:lstStyle/>
+          <a:p>
+            <a:pPr algn="ctr"/>
+          </a:p>
+        </p:txBody>
+      </p:sp>
+      <p:sp>
+        <p:nvSpPr>
+          <p:cNvPr id="3" name="TextBox 2"/>
           <p:cNvSpPr txBox="1"/>
           <p:nvPr/>
         </p:nvSpPr>
         <p:spPr>
           <a:xfrm>
-            <a:off x="548640" y="182880"/>
-            <a:ext cx="10972800" cy="548640"/>
+            <a:off x="548640" y="228600"/>
+            <a:ext cx="10972800" cy="640080"/>
           </a:xfrm>
           <a:prstGeom prst="rect">
             <a:avLst/>
@@ -5431,28 +5869,31 @@
           <a:lstStyle/>
           <a:p>
             <a:pPr algn="l">
-              <a:defRPr sz="2000" b="1">
+              <a:lnSpc>
+                <a:spcPct val="120000"/>
+              </a:lnSpc>
+              <a:defRPr sz="2400" b="1">
                 <a:solidFill>
                   <a:srgbClr val="1D9790"/>
                 </a:solidFill>
               </a:defRPr>
             </a:pPr>
             <a:r>
-              <a:t>SLIDE 1 — THE VISION — From Satellite Pixels to Real-World Decisions</a:t>
-            </a:r>
-          </a:p>
-        </p:txBody>
-      </p:sp>
-      <p:sp>
-        <p:nvSpPr>
-          <p:cNvPr id="3" name="TextBox 2"/>
+              <a:t>01 — Vision — From Pixels to Real-World Decisions</a:t>
+            </a:r>
+          </a:p>
+        </p:txBody>
+      </p:sp>
+      <p:sp>
+        <p:nvSpPr>
+          <p:cNvPr id="4" name="TextBox 3"/>
           <p:cNvSpPr txBox="1"/>
           <p:nvPr/>
         </p:nvSpPr>
         <p:spPr>
           <a:xfrm>
-            <a:off x="548640" y="914400"/>
-            <a:ext cx="10972800" cy="5486400"/>
+            <a:off x="548640" y="1005840"/>
+            <a:ext cx="6858000" cy="5486400"/>
           </a:xfrm>
           <a:prstGeom prst="rect">
             <a:avLst/>
@@ -5466,203 +5907,92 @@
           <a:lstStyle/>
           <a:p>
             <a:pPr>
-              <a:spcAft>
-                <a:spcPts val="500"/>
-              </a:spcAft>
-              <a:defRPr sz="1100">
-                <a:solidFill>
-                  <a:srgbClr val="13302B"/>
-                </a:solidFill>
-              </a:defRPr>
-            </a:pPr>
-            <a:r>
-              <a:t>Every satellite image contains enormous information. But customers don't buy pixels. They buy answers:</a:t>
-            </a:r>
-          </a:p>
-          <a:p>
-            <a:pPr>
-              <a:spcAft>
-                <a:spcPts val="500"/>
-              </a:spcAft>
-              <a:defRPr sz="1100">
-                <a:solidFill>
-                  <a:srgbClr val="13302B"/>
-                </a:solidFill>
-              </a:defRPr>
-            </a:pPr>
-            <a:r>
-              <a:t>• Which crop is under stress?</a:t>
-            </a:r>
-          </a:p>
-          <a:p>
-            <a:pPr>
-              <a:spcAft>
-                <a:spcPts val="500"/>
-              </a:spcAft>
-              <a:defRPr sz="1100">
-                <a:solidFill>
-                  <a:srgbClr val="13302B"/>
-                </a:solidFill>
-              </a:defRPr>
-            </a:pPr>
-            <a:r>
-              <a:t>• Where is waterlogging increasing?</a:t>
-            </a:r>
-          </a:p>
-          <a:p>
-            <a:pPr>
-              <a:spcAft>
-                <a:spcPts val="500"/>
-              </a:spcAft>
-              <a:defRPr sz="1100">
-                <a:solidFill>
-                  <a:srgbClr val="13302B"/>
-                </a:solidFill>
-              </a:defRPr>
-            </a:pPr>
-            <a:r>
-              <a:t>• Which field should be harvested first?</a:t>
-            </a:r>
-          </a:p>
-          <a:p>
-            <a:pPr>
-              <a:spcAft>
-                <a:spcPts val="500"/>
-              </a:spcAft>
-              <a:defRPr sz="1100">
-                <a:solidFill>
-                  <a:srgbClr val="13302B"/>
-                </a:solidFill>
-              </a:defRPr>
-            </a:pPr>
-            <a:r>
-              <a:t>• Where could flood damage become critical?</a:t>
-            </a:r>
-          </a:p>
-          <a:p>
-            <a:pPr>
-              <a:spcAft>
-                <a:spcPts val="500"/>
-              </a:spcAft>
-              <a:defRPr sz="1100">
-                <a:solidFill>
-                  <a:srgbClr val="13302B"/>
-                </a:solidFill>
-              </a:defRPr>
-            </a:pPr>
-            <a:r>
-              <a:t>• Which areas are changing?</a:t>
-            </a:r>
-          </a:p>
-          <a:p>
-            <a:pPr>
-              <a:spcAft>
-                <a:spcPts val="500"/>
-              </a:spcAft>
-              <a:defRPr sz="1100">
-                <a:solidFill>
-                  <a:srgbClr val="13302B"/>
-                </a:solidFill>
-              </a:defRPr>
-            </a:pPr>
-            <a:r>
-              <a:t>• What will yield look like?</a:t>
-            </a:r>
-          </a:p>
-          <a:p>
-            <a:pPr>
-              <a:spcAft>
-                <a:spcPts val="500"/>
-              </a:spcAft>
-              <a:defRPr sz="1100">
-                <a:solidFill>
-                  <a:srgbClr val="13302B"/>
-                </a:solidFill>
-              </a:defRPr>
-            </a:pPr>
-            <a:r>
-              <a:t>• Where should government intervention happen first?</a:t>
-            </a:r>
-          </a:p>
-          <a:p>
-            <a:pPr>
-              <a:spcAft>
-                <a:spcPts val="500"/>
-              </a:spcAft>
-              <a:defRPr sz="1100">
-                <a:solidFill>
-                  <a:srgbClr val="13302B"/>
-                </a:solidFill>
-              </a:defRPr>
-            </a:pPr>
-          </a:p>
-          <a:p>
-            <a:pPr>
-              <a:spcAft>
-                <a:spcPts val="500"/>
-              </a:spcAft>
-              <a:defRPr sz="1100">
-                <a:solidFill>
-                  <a:srgbClr val="13302B"/>
-                </a:solidFill>
-              </a:defRPr>
-            </a:pPr>
-            <a:r>
-              <a:t>BDCrops converts satellite data into those decisions.</a:t>
-            </a:r>
-          </a:p>
-          <a:p>
-            <a:pPr>
-              <a:spcAft>
-                <a:spcPts val="500"/>
-              </a:spcAft>
-              <a:defRPr sz="1100">
-                <a:solidFill>
-                  <a:srgbClr val="13302B"/>
-                </a:solidFill>
-              </a:defRPr>
-            </a:pPr>
-          </a:p>
-          <a:p>
-            <a:pPr>
-              <a:spcAft>
-                <a:spcPts val="500"/>
-              </a:spcAft>
-              <a:defRPr sz="1100">
-                <a:solidFill>
-                  <a:srgbClr val="13302B"/>
-                </a:solidFill>
-              </a:defRPr>
-            </a:pPr>
-            <a:r>
-              <a:t>8-Band Satellite Data → Spectral Intelligence → AI Analytics → AquaCrop Digital Twin → Scenario &amp; Risk Engine → Actionable Decision</a:t>
-            </a:r>
-          </a:p>
-          <a:p>
-            <a:pPr>
-              <a:spcAft>
-                <a:spcPts val="500"/>
-              </a:spcAft>
-              <a:defRPr sz="1100">
-                <a:solidFill>
-                  <a:srgbClr val="13302B"/>
-                </a:solidFill>
-              </a:defRPr>
-            </a:pPr>
-          </a:p>
-          <a:p>
-            <a:pPr>
-              <a:spcAft>
-                <a:spcPts val="500"/>
-              </a:spcAft>
-              <a:defRPr sz="1100">
-                <a:solidFill>
-                  <a:srgbClr val="13302B"/>
-                </a:solidFill>
-              </a:defRPr>
-            </a:pPr>
-            <a:r>
-              <a:t>This is the core company story.</a:t>
+              <a:lnSpc>
+                <a:spcPct val="130000"/>
+              </a:lnSpc>
+              <a:spcAft>
+                <a:spcPts val="1000"/>
+              </a:spcAft>
+              <a:defRPr sz="1400">
+                <a:solidFill>
+                  <a:srgbClr val="13302B"/>
+                </a:solidFill>
+              </a:defRPr>
+            </a:pPr>
+            <a:r>
+              <a:t>• Every satellite image contains enormous information — but customers don't buy pixels, they buy answers</a:t>
+            </a:r>
+          </a:p>
+          <a:p>
+            <a:pPr>
+              <a:lnSpc>
+                <a:spcPct val="130000"/>
+              </a:lnSpc>
+              <a:spcAft>
+                <a:spcPts val="1000"/>
+              </a:spcAft>
+              <a:defRPr sz="1400">
+                <a:solidFill>
+                  <a:srgbClr val="13302B"/>
+                </a:solidFill>
+              </a:defRPr>
+            </a:pPr>
+            <a:r>
+              <a:t>• Which crop is under stress? Where waterlogging increasing? Which field harvest first?</a:t>
+            </a:r>
+          </a:p>
+          <a:p>
+            <a:pPr>
+              <a:lnSpc>
+                <a:spcPct val="130000"/>
+              </a:lnSpc>
+              <a:spcAft>
+                <a:spcPts val="1000"/>
+              </a:spcAft>
+              <a:defRPr sz="1400">
+                <a:solidFill>
+                  <a:srgbClr val="13302B"/>
+                </a:solidFill>
+              </a:defRPr>
+            </a:pPr>
+            <a:r>
+              <a:t>• Where flood damage critical? Which areas changing? What yield? Where govt intervention?</a:t>
+            </a:r>
+          </a:p>
+          <a:p>
+            <a:pPr>
+              <a:lnSpc>
+                <a:spcPct val="130000"/>
+              </a:lnSpc>
+              <a:spcAft>
+                <a:spcPts val="1000"/>
+              </a:spcAft>
+              <a:defRPr sz="1400">
+                <a:solidFill>
+                  <a:srgbClr val="13302B"/>
+                </a:solidFill>
+              </a:defRPr>
+            </a:pPr>
+            <a:r>
+              <a:t>• BDCrops converts satellite data into those decisions</a:t>
+            </a:r>
+          </a:p>
+          <a:p>
+            <a:pPr>
+              <a:lnSpc>
+                <a:spcPct val="130000"/>
+              </a:lnSpc>
+              <a:spcAft>
+                <a:spcPts val="1000"/>
+              </a:spcAft>
+              <a:defRPr sz="1400">
+                <a:solidFill>
+                  <a:srgbClr val="13302B"/>
+                </a:solidFill>
+              </a:defRPr>
+            </a:pPr>
+            <a:r>
+              <a:t>• 8-Band Data → Spectral Intelligence → AI Analytics → AquaCrop Digital Twin → Scenario Engine → Actionable Decision</a:t>
             </a:r>
           </a:p>
         </p:txBody>
@@ -5695,14 +6025,57 @@
       <p:grpSpPr/>
       <p:sp>
         <p:nvSpPr>
-          <p:cNvPr id="2" name="TextBox 1"/>
+          <p:cNvPr id="2" name="Rectangle 1"/>
+          <p:cNvSpPr/>
+          <p:nvPr/>
+        </p:nvSpPr>
+        <p:spPr>
+          <a:xfrm>
+            <a:off x="0" y="0"/>
+            <a:ext cx="12188952" cy="73152"/>
+          </a:xfrm>
+          <a:prstGeom prst="rect">
+            <a:avLst/>
+          </a:prstGeom>
+          <a:solidFill>
+            <a:srgbClr val="1D9790"/>
+          </a:solidFill>
+          <a:ln>
+            <a:noFill/>
+          </a:ln>
+        </p:spPr>
+        <p:style>
+          <a:lnRef idx="1">
+            <a:schemeClr val="accent1"/>
+          </a:lnRef>
+          <a:fillRef idx="3">
+            <a:schemeClr val="accent1"/>
+          </a:fillRef>
+          <a:effectRef idx="2">
+            <a:schemeClr val="accent1"/>
+          </a:effectRef>
+          <a:fontRef idx="minor">
+            <a:schemeClr val="lt1"/>
+          </a:fontRef>
+        </p:style>
+        <p:txBody>
+          <a:bodyPr rtlCol="0" anchor="ctr"/>
+          <a:lstStyle/>
+          <a:p>
+            <a:pPr algn="ctr"/>
+          </a:p>
+        </p:txBody>
+      </p:sp>
+      <p:sp>
+        <p:nvSpPr>
+          <p:cNvPr id="3" name="TextBox 2"/>
           <p:cNvSpPr txBox="1"/>
           <p:nvPr/>
         </p:nvSpPr>
         <p:spPr>
           <a:xfrm>
-            <a:off x="548640" y="182880"/>
-            <a:ext cx="10972800" cy="548640"/>
+            <a:off x="548640" y="228600"/>
+            <a:ext cx="10972800" cy="640080"/>
           </a:xfrm>
           <a:prstGeom prst="rect">
             <a:avLst/>
@@ -5716,28 +6089,31 @@
           <a:lstStyle/>
           <a:p>
             <a:pPr algn="l">
-              <a:defRPr sz="2000" b="1">
+              <a:lnSpc>
+                <a:spcPct val="120000"/>
+              </a:lnSpc>
+              <a:defRPr sz="2400" b="1">
                 <a:solidFill>
                   <a:srgbClr val="1D9790"/>
                 </a:solidFill>
               </a:defRPr>
             </a:pPr>
             <a:r>
-              <a:t>SLIDE 19 — WHAT $500K UNLOCKS — US$500K Strategic Investment</a:t>
-            </a:r>
-          </a:p>
-        </p:txBody>
-      </p:sp>
-      <p:sp>
-        <p:nvSpPr>
-          <p:cNvPr id="3" name="TextBox 2"/>
+              <a:t>19 — What $500K Unlocks</a:t>
+            </a:r>
+          </a:p>
+        </p:txBody>
+      </p:sp>
+      <p:sp>
+        <p:nvSpPr>
+          <p:cNvPr id="4" name="TextBox 3"/>
           <p:cNvSpPr txBox="1"/>
           <p:nvPr/>
         </p:nvSpPr>
         <p:spPr>
           <a:xfrm>
-            <a:off x="548640" y="914400"/>
-            <a:ext cx="10972800" cy="5486400"/>
+            <a:off x="548640" y="1005840"/>
+            <a:ext cx="6858000" cy="5486400"/>
           </a:xfrm>
           <a:prstGeom prst="rect">
             <a:avLst/>
@@ -5751,92 +6127,92 @@
           <a:lstStyle/>
           <a:p>
             <a:pPr>
-              <a:spcAft>
-                <a:spcPts val="500"/>
-              </a:spcAft>
-              <a:defRPr sz="1100">
-                <a:solidFill>
-                  <a:srgbClr val="13302B"/>
-                </a:solidFill>
-              </a:defRPr>
-            </a:pPr>
-            <a:r>
-              <a:t>30% — Product Engineering: GeoData, AquaCrop, AquaData, AI engine, API</a:t>
-            </a:r>
-          </a:p>
-          <a:p>
-            <a:pPr>
-              <a:spcAft>
-                <a:spcPts val="500"/>
-              </a:spcAft>
-              <a:defRPr sz="1100">
-                <a:solidFill>
-                  <a:srgbClr val="13302B"/>
-                </a:solidFill>
-              </a:defRPr>
-            </a:pPr>
-            <a:r>
-              <a:t>20% — Satellite / Cloud Infrastructure: Processing, Storage, Data acquisition</a:t>
-            </a:r>
-          </a:p>
-          <a:p>
-            <a:pPr>
-              <a:spcAft>
-                <a:spcPts val="500"/>
-              </a:spcAft>
-              <a:defRPr sz="1100">
-                <a:solidFill>
-                  <a:srgbClr val="13302B"/>
-                </a:solidFill>
-              </a:defRPr>
-            </a:pPr>
-            <a:r>
-              <a:t>20% — Validation: BADC / BRRI, Field observations, Crop calibration, Water validation</a:t>
-            </a:r>
-          </a:p>
-          <a:p>
-            <a:pPr>
-              <a:spcAft>
-                <a:spcPts val="500"/>
-              </a:spcAft>
-              <a:defRPr sz="1100">
-                <a:solidFill>
-                  <a:srgbClr val="13302B"/>
-                </a:solidFill>
-              </a:defRPr>
-            </a:pPr>
-            <a:r>
-              <a:t>15% — Commercialization: Government, Enterprise, NGO, Aquaculture</a:t>
-            </a:r>
-          </a:p>
-          <a:p>
-            <a:pPr>
-              <a:spcAft>
-                <a:spcPts val="500"/>
-              </a:spcAft>
-              <a:defRPr sz="1100">
-                <a:solidFill>
-                  <a:srgbClr val="13302B"/>
-                </a:solidFill>
-              </a:defRPr>
-            </a:pPr>
-            <a:r>
-              <a:t>10% — International Expansion: South Asia, Climate markets, Development partners</a:t>
-            </a:r>
-          </a:p>
-          <a:p>
-            <a:pPr>
-              <a:spcAft>
-                <a:spcPts val="500"/>
-              </a:spcAft>
-              <a:defRPr sz="1100">
-                <a:solidFill>
-                  <a:srgbClr val="13302B"/>
-                </a:solidFill>
-              </a:defRPr>
-            </a:pPr>
-            <a:r>
-              <a:t>5% — Operations / Governance: Security, Compliance, Legal, Model governance</a:t>
+              <a:lnSpc>
+                <a:spcPct val="130000"/>
+              </a:lnSpc>
+              <a:spcAft>
+                <a:spcPts val="1000"/>
+              </a:spcAft>
+              <a:defRPr sz="1400">
+                <a:solidFill>
+                  <a:srgbClr val="13302B"/>
+                </a:solidFill>
+              </a:defRPr>
+            </a:pPr>
+            <a:r>
+              <a:t>• 30% Product Engineering: GeoData (KH01/KH07 multi-year), AquaCrop, AquaData incl DoF, AI, API</a:t>
+            </a:r>
+          </a:p>
+          <a:p>
+            <a:pPr>
+              <a:lnSpc>
+                <a:spcPct val="130000"/>
+              </a:lnSpc>
+              <a:spcAft>
+                <a:spcPts val="1000"/>
+              </a:spcAft>
+              <a:defRPr sz="1400">
+                <a:solidFill>
+                  <a:srgbClr val="13302B"/>
+                </a:solidFill>
+              </a:defRPr>
+            </a:pPr>
+            <a:r>
+              <a:t>• 20% Satellite / Cloud Infra: Processing, Storage, Data acquisition (21AT + Sentinel-2)</a:t>
+            </a:r>
+          </a:p>
+          <a:p>
+            <a:pPr>
+              <a:lnSpc>
+                <a:spcPct val="130000"/>
+              </a:lnSpc>
+              <a:spcAft>
+                <a:spcPts val="1000"/>
+              </a:spcAft>
+              <a:defRPr sz="1400">
+                <a:solidFill>
+                  <a:srgbClr val="13302B"/>
+                </a:solidFill>
+              </a:defRPr>
+            </a:pPr>
+            <a:r>
+              <a:t>• 20% Validation: BADC/BRRI/DoF Field obs, Crop calibration, Water validation (DoF site-specific)</a:t>
+            </a:r>
+          </a:p>
+          <a:p>
+            <a:pPr>
+              <a:lnSpc>
+                <a:spcPct val="130000"/>
+              </a:lnSpc>
+              <a:spcAft>
+                <a:spcPts val="1000"/>
+              </a:spcAft>
+              <a:defRPr sz="1400">
+                <a:solidFill>
+                  <a:srgbClr val="13302B"/>
+                </a:solidFill>
+              </a:defRPr>
+            </a:pPr>
+            <a:r>
+              <a:t>• 15% Commercialization: Govt, Enterprise, NGO, Aquaculture (DoF pilots, Hilsa zones, KH01/KH07 district)</a:t>
+            </a:r>
+          </a:p>
+          <a:p>
+            <a:pPr>
+              <a:lnSpc>
+                <a:spcPct val="130000"/>
+              </a:lnSpc>
+              <a:spcAft>
+                <a:spcPts val="1000"/>
+              </a:spcAft>
+              <a:defRPr sz="1400">
+                <a:solidFill>
+                  <a:srgbClr val="13302B"/>
+                </a:solidFill>
+              </a:defRPr>
+            </a:pPr>
+            <a:r>
+              <a:t>• 10% International Expansion + 5% Operations/Governance</a:t>
             </a:r>
           </a:p>
         </p:txBody>
@@ -5869,14 +6245,57 @@
       <p:grpSpPr/>
       <p:sp>
         <p:nvSpPr>
-          <p:cNvPr id="2" name="TextBox 1"/>
+          <p:cNvPr id="2" name="Rectangle 1"/>
+          <p:cNvSpPr/>
+          <p:nvPr/>
+        </p:nvSpPr>
+        <p:spPr>
+          <a:xfrm>
+            <a:off x="0" y="0"/>
+            <a:ext cx="12188952" cy="73152"/>
+          </a:xfrm>
+          <a:prstGeom prst="rect">
+            <a:avLst/>
+          </a:prstGeom>
+          <a:solidFill>
+            <a:srgbClr val="1D9790"/>
+          </a:solidFill>
+          <a:ln>
+            <a:noFill/>
+          </a:ln>
+        </p:spPr>
+        <p:style>
+          <a:lnRef idx="1">
+            <a:schemeClr val="accent1"/>
+          </a:lnRef>
+          <a:fillRef idx="3">
+            <a:schemeClr val="accent1"/>
+          </a:fillRef>
+          <a:effectRef idx="2">
+            <a:schemeClr val="accent1"/>
+          </a:effectRef>
+          <a:fontRef idx="minor">
+            <a:schemeClr val="lt1"/>
+          </a:fontRef>
+        </p:style>
+        <p:txBody>
+          <a:bodyPr rtlCol="0" anchor="ctr"/>
+          <a:lstStyle/>
+          <a:p>
+            <a:pPr algn="ctr"/>
+          </a:p>
+        </p:txBody>
+      </p:sp>
+      <p:sp>
+        <p:nvSpPr>
+          <p:cNvPr id="3" name="TextBox 2"/>
           <p:cNvSpPr txBox="1"/>
           <p:nvPr/>
         </p:nvSpPr>
         <p:spPr>
           <a:xfrm>
-            <a:off x="548640" y="182880"/>
-            <a:ext cx="10972800" cy="548640"/>
+            <a:off x="548640" y="228600"/>
+            <a:ext cx="10972800" cy="640080"/>
           </a:xfrm>
           <a:prstGeom prst="rect">
             <a:avLst/>
@@ -5890,28 +6309,31 @@
           <a:lstStyle/>
           <a:p>
             <a:pPr algn="l">
-              <a:defRPr sz="2000" b="1">
+              <a:lnSpc>
+                <a:spcPct val="120000"/>
+              </a:lnSpc>
+              <a:defRPr sz="2400" b="1">
                 <a:solidFill>
                   <a:srgbClr val="1D9790"/>
                 </a:solidFill>
               </a:defRPr>
             </a:pPr>
             <a:r>
-              <a:t>SLIDE 20 — INVESTMENT MILESTONES — What Investor Helps Achieve</a:t>
-            </a:r>
-          </a:p>
-        </p:txBody>
-      </p:sp>
-      <p:sp>
-        <p:nvSpPr>
-          <p:cNvPr id="3" name="TextBox 2"/>
+              <a:t>20 — Investment Milestones — 18-36 Month</a:t>
+            </a:r>
+          </a:p>
+        </p:txBody>
+      </p:sp>
+      <p:sp>
+        <p:nvSpPr>
+          <p:cNvPr id="4" name="TextBox 3"/>
           <p:cNvSpPr txBox="1"/>
           <p:nvPr/>
         </p:nvSpPr>
         <p:spPr>
           <a:xfrm>
-            <a:off x="548640" y="914400"/>
-            <a:ext cx="10972800" cy="5486400"/>
+            <a:off x="548640" y="1005840"/>
+            <a:ext cx="6858000" cy="5486400"/>
           </a:xfrm>
           <a:prstGeom prst="rect">
             <a:avLst/>
@@ -5925,62 +6347,74 @@
           <a:lstStyle/>
           <a:p>
             <a:pPr>
-              <a:spcAft>
-                <a:spcPts val="500"/>
-              </a:spcAft>
-              <a:defRPr sz="1100">
-                <a:solidFill>
-                  <a:srgbClr val="13302B"/>
-                </a:solidFill>
-              </a:defRPr>
-            </a:pPr>
-            <a:r>
-              <a:t>0–6 months — Validate: 5–10 AOIs, Repeated satellite observations, Field truth, AquaCrop calibration</a:t>
-            </a:r>
-          </a:p>
-          <a:p>
-            <a:pPr>
-              <a:spcAft>
-                <a:spcPts val="500"/>
-              </a:spcAft>
-              <a:defRPr sz="1100">
-                <a:solidFill>
-                  <a:srgbClr val="13302B"/>
-                </a:solidFill>
-              </a:defRPr>
-            </a:pPr>
-            <a:r>
-              <a:t>6–12 months — Productize: GeoData SaaS, AquaCrop dashboard, AquaData MVP, API</a:t>
-            </a:r>
-          </a:p>
-          <a:p>
-            <a:pPr>
-              <a:spcAft>
-                <a:spcPts val="500"/>
-              </a:spcAft>
-              <a:defRPr sz="1100">
-                <a:solidFill>
-                  <a:srgbClr val="13302B"/>
-                </a:solidFill>
-              </a:defRPr>
-            </a:pPr>
-            <a:r>
-              <a:t>12–24 months — Commercialize: Government contracts, Enterprise subscriptions, Recurring monitoring, AquaData pilots</a:t>
-            </a:r>
-          </a:p>
-          <a:p>
-            <a:pPr>
-              <a:spcAft>
-                <a:spcPts val="500"/>
-              </a:spcAft>
-              <a:defRPr sz="1100">
-                <a:solidFill>
-                  <a:srgbClr val="13302B"/>
-                </a:solidFill>
-              </a:defRPr>
-            </a:pPr>
-            <a:r>
-              <a:t>24–36 months — SCALE: Multi-district, Multi-crop, Multi-agency, South Asia</a:t>
+              <a:lnSpc>
+                <a:spcPct val="130000"/>
+              </a:lnSpc>
+              <a:spcAft>
+                <a:spcPts val="1000"/>
+              </a:spcAft>
+              <a:defRPr sz="1400">
+                <a:solidFill>
+                  <a:srgbClr val="13302B"/>
+                </a:solidFill>
+              </a:defRPr>
+            </a:pPr>
+            <a:r>
+              <a:t>• 0-6 months Validate: 5-10 AOIs incl KH01 114km² + KH07 Surkhali, Repeated satellite 2020→2026, Field truth, AquaCrop calibration, DoF water synthetic→real</a:t>
+            </a:r>
+          </a:p>
+          <a:p>
+            <a:pPr>
+              <a:lnSpc>
+                <a:spcPct val="130000"/>
+              </a:lnSpc>
+              <a:spcAft>
+                <a:spcPts val="1000"/>
+              </a:spcAft>
+              <a:defRPr sz="1400">
+                <a:solidFill>
+                  <a:srgbClr val="13302B"/>
+                </a:solidFill>
+              </a:defRPr>
+            </a:pPr>
+            <a:r>
+              <a:t>• 6-12 months Productize: GeoData SaaS (KH01/KH07 dashboards), AquaCrop dashboard, AquaData MVP DoF Rupsha v2, API</a:t>
+            </a:r>
+          </a:p>
+          <a:p>
+            <a:pPr>
+              <a:lnSpc>
+                <a:spcPct val="130000"/>
+              </a:lnSpc>
+              <a:spcAft>
+                <a:spcPts val="1000"/>
+              </a:spcAft>
+              <a:defRPr sz="1400">
+                <a:solidFill>
+                  <a:srgbClr val="13302B"/>
+                </a:solidFill>
+              </a:defRPr>
+            </a:pPr>
+            <a:r>
+              <a:t>• 12-24 months Commercialize: Government contracts BADC KH01/KH07 + DoF, Enterprise subscriptions, Recurring monitoring, AquaData pilots Hilsa conservation</a:t>
+            </a:r>
+          </a:p>
+          <a:p>
+            <a:pPr>
+              <a:lnSpc>
+                <a:spcPct val="130000"/>
+              </a:lnSpc>
+              <a:spcAft>
+                <a:spcPts val="1000"/>
+              </a:spcAft>
+              <a:defRPr sz="1400">
+                <a:solidFill>
+                  <a:srgbClr val="13302B"/>
+                </a:solidFill>
+              </a:defRPr>
+            </a:pPr>
+            <a:r>
+              <a:t>• 24-36 months SCALE: Multi-district, Multi-crop, Multi-agency, South Asia</a:t>
             </a:r>
           </a:p>
         </p:txBody>
@@ -6013,14 +6447,57 @@
       <p:grpSpPr/>
       <p:sp>
         <p:nvSpPr>
-          <p:cNvPr id="2" name="TextBox 1"/>
+          <p:cNvPr id="2" name="Rectangle 1"/>
+          <p:cNvSpPr/>
+          <p:nvPr/>
+        </p:nvSpPr>
+        <p:spPr>
+          <a:xfrm>
+            <a:off x="0" y="0"/>
+            <a:ext cx="12188952" cy="73152"/>
+          </a:xfrm>
+          <a:prstGeom prst="rect">
+            <a:avLst/>
+          </a:prstGeom>
+          <a:solidFill>
+            <a:srgbClr val="1D9790"/>
+          </a:solidFill>
+          <a:ln>
+            <a:noFill/>
+          </a:ln>
+        </p:spPr>
+        <p:style>
+          <a:lnRef idx="1">
+            <a:schemeClr val="accent1"/>
+          </a:lnRef>
+          <a:fillRef idx="3">
+            <a:schemeClr val="accent1"/>
+          </a:fillRef>
+          <a:effectRef idx="2">
+            <a:schemeClr val="accent1"/>
+          </a:effectRef>
+          <a:fontRef idx="minor">
+            <a:schemeClr val="lt1"/>
+          </a:fontRef>
+        </p:style>
+        <p:txBody>
+          <a:bodyPr rtlCol="0" anchor="ctr"/>
+          <a:lstStyle/>
+          <a:p>
+            <a:pPr algn="ctr"/>
+          </a:p>
+        </p:txBody>
+      </p:sp>
+      <p:sp>
+        <p:nvSpPr>
+          <p:cNvPr id="3" name="TextBox 2"/>
           <p:cNvSpPr txBox="1"/>
           <p:nvPr/>
         </p:nvSpPr>
         <p:spPr>
           <a:xfrm>
-            <a:off x="548640" y="182880"/>
-            <a:ext cx="10972800" cy="548640"/>
+            <a:off x="548640" y="228600"/>
+            <a:ext cx="10972800" cy="640080"/>
           </a:xfrm>
           <a:prstGeom prst="rect">
             <a:avLst/>
@@ -6034,28 +6511,31 @@
           <a:lstStyle/>
           <a:p>
             <a:pPr algn="l">
-              <a:defRPr sz="2000" b="1">
+              <a:lnSpc>
+                <a:spcPct val="120000"/>
+              </a:lnSpc>
+              <a:defRPr sz="2400" b="1">
                 <a:solidFill>
                   <a:srgbClr val="1D9790"/>
                 </a:solidFill>
               </a:defRPr>
             </a:pPr>
             <a:r>
-              <a:t>SLIDE 21 — THE INVESTOR'S UPSIDE — One Technology Stack. Many Revenue Markets.</a:t>
-            </a:r>
-          </a:p>
-        </p:txBody>
-      </p:sp>
-      <p:sp>
-        <p:nvSpPr>
-          <p:cNvPr id="3" name="TextBox 2"/>
+              <a:t>21 — Investor Upside — One Stack Many Markets</a:t>
+            </a:r>
+          </a:p>
+        </p:txBody>
+      </p:sp>
+      <p:sp>
+        <p:nvSpPr>
+          <p:cNvPr id="4" name="TextBox 3"/>
           <p:cNvSpPr txBox="1"/>
           <p:nvPr/>
         </p:nvSpPr>
         <p:spPr>
           <a:xfrm>
-            <a:off x="548640" y="914400"/>
-            <a:ext cx="10972800" cy="5486400"/>
+            <a:off x="548640" y="1005840"/>
+            <a:ext cx="6858000" cy="5486400"/>
           </a:xfrm>
           <a:prstGeom prst="rect">
             <a:avLst/>
@@ -6069,134 +6549,92 @@
           <a:lstStyle/>
           <a:p>
             <a:pPr>
-              <a:spcAft>
-                <a:spcPts val="500"/>
-              </a:spcAft>
-              <a:defRPr sz="1100">
-                <a:solidFill>
-                  <a:srgbClr val="13302B"/>
-                </a:solidFill>
-              </a:defRPr>
-            </a:pPr>
-            <a:r>
-              <a:t>Agriculture — GeoData + AquaCrop</a:t>
-            </a:r>
-          </a:p>
-          <a:p>
-            <a:pPr>
-              <a:spcAft>
-                <a:spcPts val="500"/>
-              </a:spcAft>
-              <a:defRPr sz="1100">
-                <a:solidFill>
-                  <a:srgbClr val="13302B"/>
-                </a:solidFill>
-              </a:defRPr>
-            </a:pPr>
-            <a:r>
-              <a:t>Water — GeoData + AquaData</a:t>
-            </a:r>
-          </a:p>
-          <a:p>
-            <a:pPr>
-              <a:spcAft>
-                <a:spcPts val="500"/>
-              </a:spcAft>
-              <a:defRPr sz="1100">
-                <a:solidFill>
-                  <a:srgbClr val="13302B"/>
-                </a:solidFill>
-              </a:defRPr>
-            </a:pPr>
-            <a:r>
-              <a:t>Climate — Risk + MRV</a:t>
-            </a:r>
-          </a:p>
-          <a:p>
-            <a:pPr>
-              <a:spcAft>
-                <a:spcPts val="500"/>
-              </a:spcAft>
-              <a:defRPr sz="1100">
-                <a:solidFill>
-                  <a:srgbClr val="13302B"/>
-                </a:solidFill>
-              </a:defRPr>
-            </a:pPr>
-            <a:r>
-              <a:t>Insurance — Crop / environmental intelligence</a:t>
-            </a:r>
-          </a:p>
-          <a:p>
-            <a:pPr>
-              <a:spcAft>
-                <a:spcPts val="500"/>
-              </a:spcAft>
-              <a:defRPr sz="1100">
-                <a:solidFill>
-                  <a:srgbClr val="13302B"/>
-                </a:solidFill>
-              </a:defRPr>
-            </a:pPr>
-            <a:r>
-              <a:t>Government — Decision-support infrastructure</a:t>
-            </a:r>
-          </a:p>
-          <a:p>
-            <a:pPr>
-              <a:spcAft>
-                <a:spcPts val="500"/>
-              </a:spcAft>
-              <a:defRPr sz="1100">
-                <a:solidFill>
-                  <a:srgbClr val="13302B"/>
-                </a:solidFill>
-              </a:defRPr>
-            </a:pPr>
-            <a:r>
-              <a:t>Research — Longitudinal intelligence</a:t>
-            </a:r>
-          </a:p>
-          <a:p>
-            <a:pPr>
-              <a:spcAft>
-                <a:spcPts val="500"/>
-              </a:spcAft>
-              <a:defRPr sz="1100">
-                <a:solidFill>
-                  <a:srgbClr val="13302B"/>
-                </a:solidFill>
-              </a:defRPr>
-            </a:pPr>
-            <a:r>
-              <a:t>Enterprise — API / SaaS</a:t>
-            </a:r>
-          </a:p>
-          <a:p>
-            <a:pPr>
-              <a:spcAft>
-                <a:spcPts val="500"/>
-              </a:spcAft>
-              <a:defRPr sz="1100">
-                <a:solidFill>
-                  <a:srgbClr val="13302B"/>
-                </a:solidFill>
-              </a:defRPr>
-            </a:pPr>
-          </a:p>
-          <a:p>
-            <a:pPr>
-              <a:spcAft>
-                <a:spcPts val="500"/>
-              </a:spcAft>
-              <a:defRPr sz="1100">
-                <a:solidFill>
-                  <a:srgbClr val="13302B"/>
-                </a:solidFill>
-              </a:defRPr>
-            </a:pPr>
-            <a:r>
-              <a:t>One stack, many markets</a:t>
+              <a:lnSpc>
+                <a:spcPct val="130000"/>
+              </a:lnSpc>
+              <a:spcAft>
+                <a:spcPts val="1000"/>
+              </a:spcAft>
+              <a:defRPr sz="1400">
+                <a:solidFill>
+                  <a:srgbClr val="13302B"/>
+                </a:solidFill>
+              </a:defRPr>
+            </a:pPr>
+            <a:r>
+              <a:t>• Agriculture GeoData+AquaCrop (KH01 114km² + KH07 Surkhali live)</a:t>
+            </a:r>
+          </a:p>
+          <a:p>
+            <a:pPr>
+              <a:lnSpc>
+                <a:spcPct val="130000"/>
+              </a:lnSpc>
+              <a:spcAft>
+                <a:spcPts val="1000"/>
+              </a:spcAft>
+              <a:defRPr sz="1400">
+                <a:solidFill>
+                  <a:srgbClr val="13302B"/>
+                </a:solidFill>
+              </a:defRPr>
+            </a:pPr>
+            <a:r>
+              <a:t>• Water GeoData+AquaData DoF concrete demo (dashboard.png + growth_curve.png)</a:t>
+            </a:r>
+          </a:p>
+          <a:p>
+            <a:pPr>
+              <a:lnSpc>
+                <a:spcPct val="130000"/>
+              </a:lnSpc>
+              <a:spcAft>
+                <a:spcPts val="1000"/>
+              </a:spcAft>
+              <a:defRPr sz="1400">
+                <a:solidFill>
+                  <a:srgbClr val="13302B"/>
+                </a:solidFill>
+              </a:defRPr>
+            </a:pPr>
+            <a:r>
+              <a:t>• Climate Risk+MRV | Insurance Crop/environmental intelligence</a:t>
+            </a:r>
+          </a:p>
+          <a:p>
+            <a:pPr>
+              <a:lnSpc>
+                <a:spcPct val="130000"/>
+              </a:lnSpc>
+              <a:spcAft>
+                <a:spcPts val="1000"/>
+              </a:spcAft>
+              <a:defRPr sz="1400">
+                <a:solidFill>
+                  <a:srgbClr val="13302B"/>
+                </a:solidFill>
+              </a:defRPr>
+            </a:pPr>
+            <a:r>
+              <a:t>• Government Decision-support BADC + DoF — Live: badc_kh01, badc_kh07, DoF/</a:t>
+            </a:r>
+          </a:p>
+          <a:p>
+            <a:pPr>
+              <a:lnSpc>
+                <a:spcPct val="130000"/>
+              </a:lnSpc>
+              <a:spcAft>
+                <a:spcPts val="1000"/>
+              </a:spcAft>
+              <a:defRPr sz="1400">
+                <a:solidFill>
+                  <a:srgbClr val="13302B"/>
+                </a:solidFill>
+              </a:defRPr>
+            </a:pPr>
+            <a:r>
+              <a:t>• Research Longitudinal intelligence | Enterprise API/SaaS — One stack, many markets</a:t>
             </a:r>
           </a:p>
         </p:txBody>
@@ -6229,14 +6667,57 @@
       <p:grpSpPr/>
       <p:sp>
         <p:nvSpPr>
-          <p:cNvPr id="2" name="TextBox 1"/>
+          <p:cNvPr id="2" name="Rectangle 1"/>
+          <p:cNvSpPr/>
+          <p:nvPr/>
+        </p:nvSpPr>
+        <p:spPr>
+          <a:xfrm>
+            <a:off x="0" y="0"/>
+            <a:ext cx="12188952" cy="73152"/>
+          </a:xfrm>
+          <a:prstGeom prst="rect">
+            <a:avLst/>
+          </a:prstGeom>
+          <a:solidFill>
+            <a:srgbClr val="1D9790"/>
+          </a:solidFill>
+          <a:ln>
+            <a:noFill/>
+          </a:ln>
+        </p:spPr>
+        <p:style>
+          <a:lnRef idx="1">
+            <a:schemeClr val="accent1"/>
+          </a:lnRef>
+          <a:fillRef idx="3">
+            <a:schemeClr val="accent1"/>
+          </a:fillRef>
+          <a:effectRef idx="2">
+            <a:schemeClr val="accent1"/>
+          </a:effectRef>
+          <a:fontRef idx="minor">
+            <a:schemeClr val="lt1"/>
+          </a:fontRef>
+        </p:style>
+        <p:txBody>
+          <a:bodyPr rtlCol="0" anchor="ctr"/>
+          <a:lstStyle/>
+          <a:p>
+            <a:pPr algn="ctr"/>
+          </a:p>
+        </p:txBody>
+      </p:sp>
+      <p:sp>
+        <p:nvSpPr>
+          <p:cNvPr id="3" name="TextBox 2"/>
           <p:cNvSpPr txBox="1"/>
           <p:nvPr/>
         </p:nvSpPr>
         <p:spPr>
           <a:xfrm>
-            <a:off x="548640" y="182880"/>
-            <a:ext cx="10972800" cy="548640"/>
+            <a:off x="548640" y="228600"/>
+            <a:ext cx="10972800" cy="640080"/>
           </a:xfrm>
           <a:prstGeom prst="rect">
             <a:avLst/>
@@ -6250,28 +6731,31 @@
           <a:lstStyle/>
           <a:p>
             <a:pPr algn="l">
-              <a:defRPr sz="2000" b="1">
+              <a:lnSpc>
+                <a:spcPct val="120000"/>
+              </a:lnSpc>
+              <a:defRPr sz="2400" b="1">
                 <a:solidFill>
                   <a:srgbClr val="FFFFFF"/>
                 </a:solidFill>
               </a:defRPr>
             </a:pPr>
             <a:r>
-              <a:t>SLIDE 22 — THE TRUST SLIDE — We Will Not Sell False Certainty</a:t>
-            </a:r>
-          </a:p>
-        </p:txBody>
-      </p:sp>
-      <p:sp>
-        <p:nvSpPr>
-          <p:cNvPr id="3" name="TextBox 2"/>
+              <a:t>22 — Trust — We Will Not Sell False Certainty</a:t>
+            </a:r>
+          </a:p>
+        </p:txBody>
+      </p:sp>
+      <p:sp>
+        <p:nvSpPr>
+          <p:cNvPr id="4" name="TextBox 3"/>
           <p:cNvSpPr txBox="1"/>
           <p:nvPr/>
         </p:nvSpPr>
         <p:spPr>
           <a:xfrm>
-            <a:off x="548640" y="914400"/>
-            <a:ext cx="10972800" cy="5486400"/>
+            <a:off x="548640" y="1005840"/>
+            <a:ext cx="6858000" cy="5486400"/>
           </a:xfrm>
           <a:prstGeom prst="rect">
             <a:avLst/>
@@ -6285,155 +6769,74 @@
           <a:lstStyle/>
           <a:p>
             <a:pPr>
-              <a:spcAft>
-                <a:spcPts val="500"/>
-              </a:spcAft>
-              <a:defRPr sz="1100">
+              <a:lnSpc>
+                <a:spcPct val="130000"/>
+              </a:lnSpc>
+              <a:spcAft>
+                <a:spcPts val="1000"/>
+              </a:spcAft>
+              <a:defRPr sz="1400">
                 <a:solidFill>
                   <a:srgbClr val="FFFFFF"/>
                 </a:solidFill>
               </a:defRPr>
             </a:pPr>
             <a:r>
-              <a:t>This is important investor-quality slide.</a:t>
-            </a:r>
-          </a:p>
-          <a:p>
-            <a:pPr>
-              <a:spcAft>
-                <a:spcPts val="500"/>
-              </a:spcAft>
-              <a:defRPr sz="1100">
+              <a:t>• AquaCrop: 1 satellite obs, 0 ground obs, RMSE 0.309, confidence 33/100 — Prototype ≠ certified</a:t>
+            </a:r>
+          </a:p>
+          <a:p>
+            <a:pPr>
+              <a:lnSpc>
+                <a:spcPct val="130000"/>
+              </a:lnSpc>
+              <a:spcAft>
+                <a:spcPts val="1000"/>
+              </a:spcAft>
+              <a:defRPr sz="1400">
                 <a:solidFill>
                   <a:srgbClr val="FFFFFF"/>
                 </a:solidFill>
               </a:defRPr>
             </a:pPr>
-          </a:p>
-          <a:p>
-            <a:pPr>
-              <a:spcAft>
-                <a:spcPts val="500"/>
-              </a:spcAft>
-              <a:defRPr sz="1100">
+            <a:r>
+              <a:t>• DoF: Screening-stage — water synthetic/derived, species generic FAO/FishBase — site-specific calibration required</a:t>
+            </a:r>
+          </a:p>
+          <a:p>
+            <a:pPr>
+              <a:lnSpc>
+                <a:spcPct val="130000"/>
+              </a:lnSpc>
+              <a:spcAft>
+                <a:spcPts val="1000"/>
+              </a:spcAft>
+              <a:defRPr sz="1400">
                 <a:solidFill>
                   <a:srgbClr val="FFFFFF"/>
                 </a:solidFill>
               </a:defRPr>
             </a:pPr>
             <a:r>
-              <a:t>Current AquaCrop evidence:</a:t>
-            </a:r>
-          </a:p>
-          <a:p>
-            <a:pPr>
-              <a:spcAft>
-                <a:spcPts val="500"/>
-              </a:spcAft>
-              <a:defRPr sz="1100">
+              <a:t>• BADC KH01/KH07: Working demonstration / govt-oriented prototype — Confidential BADC 2026 — Unless actual contract, call demonstration/prototype</a:t>
+            </a:r>
+          </a:p>
+          <a:p>
+            <a:pPr>
+              <a:lnSpc>
+                <a:spcPct val="130000"/>
+              </a:lnSpc>
+              <a:spcAft>
+                <a:spcPts val="1000"/>
+              </a:spcAft>
+              <a:defRPr sz="1400">
                 <a:solidFill>
                   <a:srgbClr val="FFFFFF"/>
                 </a:solidFill>
               </a:defRPr>
             </a:pPr>
             <a:r>
-              <a:t>1 satellite observation, 0 ground observations, RMSE 0.309, Validation confidence 33/100</a:t>
-            </a:r>
-          </a:p>
-          <a:p>
-            <a:pPr>
-              <a:spcAft>
-                <a:spcPts val="500"/>
-              </a:spcAft>
-              <a:defRPr sz="1100">
-                <a:solidFill>
-                  <a:srgbClr val="FFFFFF"/>
-                </a:solidFill>
-              </a:defRPr>
-            </a:pPr>
-          </a:p>
-          <a:p>
-            <a:pPr>
-              <a:spcAft>
-                <a:spcPts val="500"/>
-              </a:spcAft>
-              <a:defRPr sz="1100">
-                <a:solidFill>
-                  <a:srgbClr val="FFFFFF"/>
-                </a:solidFill>
-              </a:defRPr>
-            </a:pPr>
-            <a:r>
-              <a:t>Therefore: Prototype ≠ certified forecast.</a:t>
-            </a:r>
-          </a:p>
-          <a:p>
-            <a:pPr>
-              <a:spcAft>
-                <a:spcPts val="500"/>
-              </a:spcAft>
-              <a:defRPr sz="1100">
-                <a:solidFill>
-                  <a:srgbClr val="FFFFFF"/>
-                </a:solidFill>
-              </a:defRPr>
-            </a:pPr>
-          </a:p>
-          <a:p>
-            <a:pPr>
-              <a:spcAft>
-                <a:spcPts val="500"/>
-              </a:spcAft>
-              <a:defRPr sz="1100">
-                <a:solidFill>
-                  <a:srgbClr val="FFFFFF"/>
-                </a:solidFill>
-              </a:defRPr>
-            </a:pPr>
-            <a:r>
-              <a:t>Investment is partly to move:</a:t>
-            </a:r>
-          </a:p>
-          <a:p>
-            <a:pPr>
-              <a:spcAft>
-                <a:spcPts val="500"/>
-              </a:spcAft>
-              <a:defRPr sz="1100">
-                <a:solidFill>
-                  <a:srgbClr val="FFFFFF"/>
-                </a:solidFill>
-              </a:defRPr>
-            </a:pPr>
-            <a:r>
-              <a:t>Level 1 — Preliminary → Level 2 — Multi-date → Level 3 — Field-calibrated → Level 4 — Multi-season operational intelligence</a:t>
-            </a:r>
-          </a:p>
-          <a:p>
-            <a:pPr>
-              <a:spcAft>
-                <a:spcPts val="500"/>
-              </a:spcAft>
-              <a:defRPr sz="1100">
-                <a:solidFill>
-                  <a:srgbClr val="FFFFFF"/>
-                </a:solidFill>
-              </a:defRPr>
-            </a:pPr>
-          </a:p>
-          <a:p>
-            <a:pPr>
-              <a:spcAft>
-                <a:spcPts val="500"/>
-              </a:spcAft>
-              <a:defRPr sz="1100">
-                <a:solidFill>
-                  <a:srgbClr val="FFFFFF"/>
-                </a:solidFill>
-              </a:defRPr>
-            </a:pPr>
-            <a:r>
-              <a:t>That makes pitch more credible, not weaker.</a:t>
+              <a:t>• Investment moves Level1 Preliminary → Level2 Multi-date → Level3 Field-calibrated → Level4 Multi-season operational — More credible</a:t>
             </a:r>
           </a:p>
         </p:txBody>
@@ -6447,192 +6850,6 @@
 </file>
 
 <file path=ppt/slides/slide24.xml><?xml version="1.0" encoding="utf-8"?>
-<p:sld xmlns:a="http://schemas.openxmlformats.org/drawingml/2006/main" xmlns:p="http://schemas.openxmlformats.org/presentationml/2006/main" xmlns:r="http://schemas.openxmlformats.org/officeDocument/2006/relationships">
-  <p:cSld>
-    <p:bg>
-      <p:bgPr>
-        <a:solidFill>
-          <a:srgbClr val="FFFFFF"/>
-        </a:solidFill>
-        <a:effectLst/>
-      </p:bgPr>
-    </p:bg>
-    <p:spTree>
-      <p:nvGrpSpPr>
-        <p:cNvPr id="1" name=""/>
-        <p:cNvGrpSpPr/>
-        <p:nvPr/>
-      </p:nvGrpSpPr>
-      <p:grpSpPr/>
-      <p:sp>
-        <p:nvSpPr>
-          <p:cNvPr id="2" name="TextBox 1"/>
-          <p:cNvSpPr txBox="1"/>
-          <p:nvPr/>
-        </p:nvSpPr>
-        <p:spPr>
-          <a:xfrm>
-            <a:off x="548640" y="182880"/>
-            <a:ext cx="10972800" cy="548640"/>
-          </a:xfrm>
-          <a:prstGeom prst="rect">
-            <a:avLst/>
-          </a:prstGeom>
-          <a:noFill/>
-        </p:spPr>
-        <p:txBody>
-          <a:bodyPr wrap="square">
-            <a:spAutoFit/>
-          </a:bodyPr>
-          <a:lstStyle/>
-          <a:p>
-            <a:pPr algn="l">
-              <a:defRPr sz="2000" b="1">
-                <a:solidFill>
-                  <a:srgbClr val="1D9790"/>
-                </a:solidFill>
-              </a:defRPr>
-            </a:pPr>
-            <a:r>
-              <a:t>SLIDE 23 — THE BIG VISION — BDCrops Is Not Building a Satellite Dashboard</a:t>
-            </a:r>
-          </a:p>
-        </p:txBody>
-      </p:sp>
-      <p:sp>
-        <p:nvSpPr>
-          <p:cNvPr id="3" name="TextBox 2"/>
-          <p:cNvSpPr txBox="1"/>
-          <p:nvPr/>
-        </p:nvSpPr>
-        <p:spPr>
-          <a:xfrm>
-            <a:off x="548640" y="914400"/>
-            <a:ext cx="10972800" cy="5486400"/>
-          </a:xfrm>
-          <a:prstGeom prst="rect">
-            <a:avLst/>
-          </a:prstGeom>
-          <a:noFill/>
-        </p:spPr>
-        <p:txBody>
-          <a:bodyPr wrap="square">
-            <a:spAutoFit/>
-          </a:bodyPr>
-          <a:lstStyle/>
-          <a:p>
-            <a:pPr>
-              <a:spcAft>
-                <a:spcPts val="500"/>
-              </a:spcAft>
-              <a:defRPr sz="1100">
-                <a:solidFill>
-                  <a:srgbClr val="13302B"/>
-                </a:solidFill>
-              </a:defRPr>
-            </a:pPr>
-            <a:r>
-              <a:t>We Are Building a Decision Intelligence Platform for the Physical World.</a:t>
-            </a:r>
-          </a:p>
-          <a:p>
-            <a:pPr>
-              <a:spcAft>
-                <a:spcPts val="500"/>
-              </a:spcAft>
-              <a:defRPr sz="1100">
-                <a:solidFill>
-                  <a:srgbClr val="13302B"/>
-                </a:solidFill>
-              </a:defRPr>
-            </a:pPr>
-          </a:p>
-          <a:p>
-            <a:pPr>
-              <a:spcAft>
-                <a:spcPts val="500"/>
-              </a:spcAft>
-              <a:defRPr sz="1100">
-                <a:solidFill>
-                  <a:srgbClr val="13302B"/>
-                </a:solidFill>
-              </a:defRPr>
-            </a:pPr>
-            <a:r>
-              <a:t>Today — See — Satellite</a:t>
-            </a:r>
-          </a:p>
-          <a:p>
-            <a:pPr>
-              <a:spcAft>
-                <a:spcPts val="500"/>
-              </a:spcAft>
-              <a:defRPr sz="1100">
-                <a:solidFill>
-                  <a:srgbClr val="13302B"/>
-                </a:solidFill>
-              </a:defRPr>
-            </a:pPr>
-            <a:r>
-              <a:t>Tomorrow — Understand — AI Analytics</a:t>
-            </a:r>
-          </a:p>
-          <a:p>
-            <a:pPr>
-              <a:spcAft>
-                <a:spcPts val="500"/>
-              </a:spcAft>
-              <a:defRPr sz="1100">
-                <a:solidFill>
-                  <a:srgbClr val="13302B"/>
-                </a:solidFill>
-              </a:defRPr>
-            </a:pPr>
-            <a:r>
-              <a:t>Next — Predict — AquaCrop / AquaData</a:t>
-            </a:r>
-          </a:p>
-          <a:p>
-            <a:pPr>
-              <a:spcAft>
-                <a:spcPts val="500"/>
-              </a:spcAft>
-              <a:defRPr sz="1100">
-                <a:solidFill>
-                  <a:srgbClr val="13302B"/>
-                </a:solidFill>
-              </a:defRPr>
-            </a:pPr>
-            <a:r>
-              <a:t>Next — Simulate — Scenarios</a:t>
-            </a:r>
-          </a:p>
-          <a:p>
-            <a:pPr>
-              <a:spcAft>
-                <a:spcPts val="500"/>
-              </a:spcAft>
-              <a:defRPr sz="1100">
-                <a:solidFill>
-                  <a:srgbClr val="13302B"/>
-                </a:solidFill>
-              </a:defRPr>
-            </a:pPr>
-            <a:r>
-              <a:t>Eventually — Recommend — AI Decision Engine</a:t>
-            </a:r>
-          </a:p>
-        </p:txBody>
-      </p:sp>
-    </p:spTree>
-  </p:cSld>
-  <p:clrMapOvr>
-    <a:masterClrMapping/>
-  </p:clrMapOvr>
-</p:sld>
-</file>
-
-<file path=ppt/slides/slide25.xml><?xml version="1.0" encoding="utf-8"?>
 <p:sld xmlns:a="http://schemas.openxmlformats.org/drawingml/2006/main" xmlns:p="http://schemas.openxmlformats.org/presentationml/2006/main" xmlns:r="http://schemas.openxmlformats.org/officeDocument/2006/relationships">
   <p:cSld>
     <p:bg>
@@ -6658,8 +6875,8 @@
         </p:nvSpPr>
         <p:spPr>
           <a:xfrm>
-            <a:off x="457200" y="365760"/>
-            <a:ext cx="10972800" cy="548640"/>
+            <a:off x="457200" y="457200"/>
+            <a:ext cx="11247120" cy="548640"/>
           </a:xfrm>
           <a:prstGeom prst="rect">
             <a:avLst/>
@@ -6673,6 +6890,9 @@
           <a:lstStyle/>
           <a:p>
             <a:pPr algn="ctr">
+              <a:lnSpc>
+                <a:spcPct val="120000"/>
+              </a:lnSpc>
               <a:defRPr sz="2800" b="1">
                 <a:solidFill>
                   <a:srgbClr val="FFFFFF"/>
@@ -6680,7 +6900,7 @@
               </a:defRPr>
             </a:pPr>
             <a:r>
-              <a:t>BDCrops AgroVision™</a:t>
+              <a:t>BDCrops AgroVision™ — INVEST IN THE TRANSITION</a:t>
             </a:r>
           </a:p>
         </p:txBody>
@@ -6693,8 +6913,8 @@
         </p:nvSpPr>
         <p:spPr>
           <a:xfrm>
-            <a:off x="457200" y="1005840"/>
-            <a:ext cx="10972800" cy="365760"/>
+            <a:off x="457200" y="1188720"/>
+            <a:ext cx="11247120" cy="365760"/>
           </a:xfrm>
           <a:prstGeom prst="rect">
             <a:avLst/>
@@ -6708,7 +6928,10 @@
           <a:lstStyle/>
           <a:p>
             <a:pPr algn="ctr">
-              <a:defRPr sz="1400" b="1">
+              <a:lnSpc>
+                <a:spcPct val="120000"/>
+              </a:lnSpc>
+              <a:defRPr sz="1600" b="1">
                 <a:solidFill>
                   <a:srgbClr val="FFFFFF"/>
                 </a:solidFill>
@@ -6728,8 +6951,8 @@
         </p:nvSpPr>
         <p:spPr>
           <a:xfrm>
-            <a:off x="457200" y="1463040"/>
-            <a:ext cx="10972800" cy="274320"/>
+            <a:off x="457200" y="1737360"/>
+            <a:ext cx="11247120" cy="914400"/>
           </a:xfrm>
           <a:prstGeom prst="rect">
             <a:avLst/>
@@ -6743,14 +6966,26 @@
           <a:lstStyle/>
           <a:p>
             <a:pPr algn="ctr">
-              <a:defRPr sz="1200" b="0">
+              <a:lnSpc>
+                <a:spcPct val="140000"/>
+              </a:lnSpc>
+              <a:defRPr sz="1400" b="0">
                 <a:solidFill>
                   <a:srgbClr val="FFFFFF"/>
                 </a:solidFill>
               </a:defRPr>
             </a:pPr>
             <a:r>
-              <a:t>AI + 8-Band Satellite Intelligence + AquaCrop + AquaData</a:t>
+              <a:t>Working Technology → Validated Intelligence → Recurring Revenue → Scalable Platform</a:t>
+            </a:r>
+            <a:br/>
+            <a:br/>
+            <a:r>
+              <a:t>We are not building a satellite dashboard.</a:t>
+            </a:r>
+            <a:br/>
+            <a:r>
+              <a:t>We are building Decision Intelligence Platform for Physical World.</a:t>
             </a:r>
           </a:p>
         </p:txBody>
@@ -6763,8 +6998,8 @@
         </p:nvSpPr>
         <p:spPr>
           <a:xfrm>
-            <a:off x="457200" y="1920240"/>
-            <a:ext cx="10972800" cy="1097280"/>
+            <a:off x="457200" y="2926080"/>
+            <a:ext cx="11247120" cy="457200"/>
           </a:xfrm>
           <a:prstGeom prst="rect">
             <a:avLst/>
@@ -6778,32 +7013,21 @@
           <a:lstStyle/>
           <a:p>
             <a:pPr algn="ctr">
-              <a:defRPr sz="1100" b="0">
+              <a:lnSpc>
+                <a:spcPct val="120000"/>
+              </a:lnSpc>
+              <a:defRPr sz="1200" b="0">
                 <a:solidFill>
                   <a:srgbClr val="FFFFFF"/>
                 </a:solidFill>
               </a:defRPr>
             </a:pPr>
             <a:r>
-              <a:t>INVEST IN THE TRANSITION</a:t>
+              <a:t>AI + 8-Band + AquaCrop + AquaData + DoF Live + BADC KH01 114km² + KH07 Surkhali</a:t>
             </a:r>
             <a:br/>
             <a:r>
-              <a:t>From Working Technology → Validated Intelligence → Recurring Revenue → Scalable Platform</a:t>
-            </a:r>
-            <a:br/>
-            <a:br/>
-            <a:r>
-              <a:t>We are not building a satellite dashboard.</a:t>
-            </a:r>
-            <a:br/>
-            <a:r>
-              <a:t>We are building a Decision Intelligence Platform for the Physical World.</a:t>
-            </a:r>
-            <a:br/>
-            <a:br/>
-            <a:r>
-              <a:t>Today: See (Satellite) → Tomorrow: Understand (AI) → Next: Predict (AquaCrop) → Next: Simulate (Scenarios) → Eventually: Recommend (AI Decision Engine)</a:t>
+              <a:t>3 Live Demos: bdcrops.com/badc_kh01 | bdcrops.com/badc_kh07 | bdcrops.com/DoF/</a:t>
             </a:r>
           </a:p>
         </p:txBody>
@@ -6817,7 +7041,7 @@
         <p:spPr>
           <a:xfrm>
             <a:off x="457200" y="3657600"/>
-            <a:ext cx="10972800" cy="731520"/>
+            <a:ext cx="11247120" cy="731520"/>
           </a:xfrm>
           <a:prstGeom prst="rect">
             <a:avLst/>
@@ -6831,7 +7055,10 @@
           <a:lstStyle/>
           <a:p>
             <a:pPr algn="ctr">
-              <a:defRPr sz="1000" b="0">
+              <a:lnSpc>
+                <a:spcPct val="130000"/>
+              </a:lnSpc>
+              <a:defRPr sz="1100" b="0">
                 <a:solidFill>
                   <a:srgbClr val="FFFFFF"/>
                 </a:solidFill>
@@ -6842,15 +7069,15 @@
             </a:r>
             <a:br/>
             <a:r>
-              <a:t>Abdul Matin | Founder &amp; CEO | BDCrops Technologies</a:t>
+              <a:t>Abdul Matin | Founder &amp; CEO | Dhaka, Bangladesh</a:t>
             </a:r>
             <a:br/>
             <a:r>
-              <a:t>Dhaka, Bangladesh | bdcrops.com | matin@bdcrops.com</a:t>
+              <a:t>bdcrops.com | matin@bdcrops.com | +8801717676441</a:t>
             </a:r>
             <a:br/>
             <a:r>
-              <a:t>bdcrops.com/pitch/nextunicorn | NextUnicorn.Fund</a:t>
+              <a:t>bdcrops.com/nextunicorn/ | NextUnicorn.Fund</a:t>
             </a:r>
           </a:p>
         </p:txBody>
@@ -6871,8 +7098,8 @@
         </p:blipFill>
         <p:spPr>
           <a:xfrm>
-            <a:off x="5394960" y="4663440"/>
-            <a:ext cx="1188720" cy="1188720"/>
+            <a:off x="5486400" y="4754880"/>
+            <a:ext cx="1097280" cy="1097280"/>
           </a:xfrm>
           <a:prstGeom prst="rect">
             <a:avLst/>
@@ -6907,14 +7134,57 @@
       <p:grpSpPr/>
       <p:sp>
         <p:nvSpPr>
-          <p:cNvPr id="2" name="TextBox 1"/>
+          <p:cNvPr id="2" name="Rectangle 1"/>
+          <p:cNvSpPr/>
+          <p:nvPr/>
+        </p:nvSpPr>
+        <p:spPr>
+          <a:xfrm>
+            <a:off x="0" y="0"/>
+            <a:ext cx="12188952" cy="73152"/>
+          </a:xfrm>
+          <a:prstGeom prst="rect">
+            <a:avLst/>
+          </a:prstGeom>
+          <a:solidFill>
+            <a:srgbClr val="1D9790"/>
+          </a:solidFill>
+          <a:ln>
+            <a:noFill/>
+          </a:ln>
+        </p:spPr>
+        <p:style>
+          <a:lnRef idx="1">
+            <a:schemeClr val="accent1"/>
+          </a:lnRef>
+          <a:fillRef idx="3">
+            <a:schemeClr val="accent1"/>
+          </a:fillRef>
+          <a:effectRef idx="2">
+            <a:schemeClr val="accent1"/>
+          </a:effectRef>
+          <a:fontRef idx="minor">
+            <a:schemeClr val="lt1"/>
+          </a:fontRef>
+        </p:style>
+        <p:txBody>
+          <a:bodyPr rtlCol="0" anchor="ctr"/>
+          <a:lstStyle/>
+          <a:p>
+            <a:pPr algn="ctr"/>
+          </a:p>
+        </p:txBody>
+      </p:sp>
+      <p:sp>
+        <p:nvSpPr>
+          <p:cNvPr id="3" name="TextBox 2"/>
           <p:cNvSpPr txBox="1"/>
           <p:nvPr/>
         </p:nvSpPr>
         <p:spPr>
           <a:xfrm>
-            <a:off x="548640" y="182880"/>
-            <a:ext cx="10972800" cy="548640"/>
+            <a:off x="548640" y="228600"/>
+            <a:ext cx="10972800" cy="640080"/>
           </a:xfrm>
           <a:prstGeom prst="rect">
             <a:avLst/>
@@ -6928,28 +7198,31 @@
           <a:lstStyle/>
           <a:p>
             <a:pPr algn="l">
-              <a:defRPr sz="2000" b="1">
+              <a:lnSpc>
+                <a:spcPct val="120000"/>
+              </a:lnSpc>
+              <a:defRPr sz="2400" b="1">
                 <a:solidFill>
                   <a:srgbClr val="1D9790"/>
                 </a:solidFill>
               </a:defRPr>
             </a:pPr>
             <a:r>
-              <a:t>SLIDE 2 — THE MARKET PROBLEM — Agriculture Is Still Being Managed Too Reactively</a:t>
-            </a:r>
-          </a:p>
-        </p:txBody>
-      </p:sp>
-      <p:sp>
-        <p:nvSpPr>
-          <p:cNvPr id="3" name="TextBox 2"/>
+              <a:t>02 — Market Problem — Agriculture Still Managed Too Reactively</a:t>
+            </a:r>
+          </a:p>
+        </p:txBody>
+      </p:sp>
+      <p:sp>
+        <p:nvSpPr>
+          <p:cNvPr id="4" name="TextBox 3"/>
           <p:cNvSpPr txBox="1"/>
           <p:nvPr/>
         </p:nvSpPr>
         <p:spPr>
           <a:xfrm>
-            <a:off x="548640" y="914400"/>
-            <a:ext cx="10972800" cy="5486400"/>
+            <a:off x="548640" y="1005840"/>
+            <a:ext cx="6858000" cy="5486400"/>
           </a:xfrm>
           <a:prstGeom prst="rect">
             <a:avLst/>
@@ -6963,113 +7236,92 @@
           <a:lstStyle/>
           <a:p>
             <a:pPr>
-              <a:spcAft>
-                <a:spcPts val="500"/>
-              </a:spcAft>
-              <a:defRPr sz="1100">
-                <a:solidFill>
-                  <a:srgbClr val="13302B"/>
-                </a:solidFill>
-              </a:defRPr>
-            </a:pPr>
-            <a:r>
-              <a:t>A government or agricultural organization may know where the farms are but not continuously know what is changing inside them.</a:t>
-            </a:r>
-          </a:p>
-          <a:p>
-            <a:pPr>
-              <a:spcAft>
-                <a:spcPts val="500"/>
-              </a:spcAft>
-              <a:defRPr sz="1100">
-                <a:solidFill>
-                  <a:srgbClr val="13302B"/>
-                </a:solidFill>
-              </a:defRPr>
-            </a:pPr>
-          </a:p>
-          <a:p>
-            <a:pPr>
-              <a:spcAft>
-                <a:spcPts val="500"/>
-              </a:spcAft>
-              <a:defRPr sz="1100">
-                <a:solidFill>
-                  <a:srgbClr val="13302B"/>
-                </a:solidFill>
-              </a:defRPr>
-            </a:pPr>
-            <a:r>
-              <a:t>Traditional monitoring depends heavily on:</a:t>
-            </a:r>
-          </a:p>
-          <a:p>
-            <a:pPr>
-              <a:spcAft>
-                <a:spcPts val="500"/>
-              </a:spcAft>
-              <a:defRPr sz="1100">
-                <a:solidFill>
-                  <a:srgbClr val="13302B"/>
-                </a:solidFill>
-              </a:defRPr>
-            </a:pPr>
-            <a:r>
-              <a:t>• field visits • periodic surveys • manual reporting • fragmented datasets • delayed detection • static maps</a:t>
-            </a:r>
-          </a:p>
-          <a:p>
-            <a:pPr>
-              <a:spcAft>
-                <a:spcPts val="500"/>
-              </a:spcAft>
-              <a:defRPr sz="1100">
-                <a:solidFill>
-                  <a:srgbClr val="13302B"/>
-                </a:solidFill>
-              </a:defRPr>
-            </a:pPr>
-          </a:p>
-          <a:p>
-            <a:pPr>
-              <a:spcAft>
-                <a:spcPts val="500"/>
-              </a:spcAft>
-              <a:defRPr sz="1100">
-                <a:solidFill>
-                  <a:srgbClr val="13302B"/>
-                </a:solidFill>
-              </a:defRPr>
-            </a:pPr>
-            <a:r>
-              <a:t>The missing layer: Continuous spatial intelligence + prediction + action.</a:t>
-            </a:r>
-          </a:p>
-          <a:p>
-            <a:pPr>
-              <a:spcAft>
-                <a:spcPts val="500"/>
-              </a:spcAft>
-              <a:defRPr sz="1100">
-                <a:solidFill>
-                  <a:srgbClr val="13302B"/>
-                </a:solidFill>
-              </a:defRPr>
-            </a:pPr>
-          </a:p>
-          <a:p>
-            <a:pPr>
-              <a:spcAft>
-                <a:spcPts val="500"/>
-              </a:spcAft>
-              <a:defRPr sz="1100">
-                <a:solidFill>
-                  <a:srgbClr val="13302B"/>
-                </a:solidFill>
-              </a:defRPr>
-            </a:pPr>
-            <a:r>
-              <a:t>BDCrops is building that layer.</a:t>
+              <a:lnSpc>
+                <a:spcPct val="130000"/>
+              </a:lnSpc>
+              <a:spcAft>
+                <a:spcPts val="1000"/>
+              </a:spcAft>
+              <a:defRPr sz="1400">
+                <a:solidFill>
+                  <a:srgbClr val="13302B"/>
+                </a:solidFill>
+              </a:defRPr>
+            </a:pPr>
+            <a:r>
+              <a:t>• Government knows where farms are, but not what is changing inside them</a:t>
+            </a:r>
+          </a:p>
+          <a:p>
+            <a:pPr>
+              <a:lnSpc>
+                <a:spcPct val="130000"/>
+              </a:lnSpc>
+              <a:spcAft>
+                <a:spcPts val="1000"/>
+              </a:spcAft>
+              <a:defRPr sz="1400">
+                <a:solidFill>
+                  <a:srgbClr val="13302B"/>
+                </a:solidFill>
+              </a:defRPr>
+            </a:pPr>
+            <a:r>
+              <a:t>• Traditional monitoring: field visits, periodic surveys, manual reporting, fragmented datasets</a:t>
+            </a:r>
+          </a:p>
+          <a:p>
+            <a:pPr>
+              <a:lnSpc>
+                <a:spcPct val="130000"/>
+              </a:lnSpc>
+              <a:spcAft>
+                <a:spcPts val="1000"/>
+              </a:spcAft>
+              <a:defRPr sz="1400">
+                <a:solidFill>
+                  <a:srgbClr val="13302B"/>
+                </a:solidFill>
+              </a:defRPr>
+            </a:pPr>
+            <a:r>
+              <a:t>• Delayed detection, static maps</a:t>
+            </a:r>
+          </a:p>
+          <a:p>
+            <a:pPr>
+              <a:lnSpc>
+                <a:spcPct val="130000"/>
+              </a:lnSpc>
+              <a:spcAft>
+                <a:spcPts val="1000"/>
+              </a:spcAft>
+              <a:defRPr sz="1400">
+                <a:solidFill>
+                  <a:srgbClr val="13302B"/>
+                </a:solidFill>
+              </a:defRPr>
+            </a:pPr>
+            <a:r>
+              <a:t>• Missing layer: Continuous spatial intelligence + prediction + action</a:t>
+            </a:r>
+          </a:p>
+          <a:p>
+            <a:pPr>
+              <a:lnSpc>
+                <a:spcPct val="130000"/>
+              </a:lnSpc>
+              <a:spcAft>
+                <a:spcPts val="1000"/>
+              </a:spcAft>
+              <a:defRPr sz="1400">
+                <a:solidFill>
+                  <a:srgbClr val="13302B"/>
+                </a:solidFill>
+              </a:defRPr>
+            </a:pPr>
+            <a:r>
+              <a:t>• BDCrops is building that layer</a:t>
             </a:r>
           </a:p>
         </p:txBody>
@@ -7102,14 +7354,57 @@
       <p:grpSpPr/>
       <p:sp>
         <p:nvSpPr>
-          <p:cNvPr id="2" name="TextBox 1"/>
+          <p:cNvPr id="2" name="Rectangle 1"/>
+          <p:cNvSpPr/>
+          <p:nvPr/>
+        </p:nvSpPr>
+        <p:spPr>
+          <a:xfrm>
+            <a:off x="0" y="0"/>
+            <a:ext cx="12188952" cy="73152"/>
+          </a:xfrm>
+          <a:prstGeom prst="rect">
+            <a:avLst/>
+          </a:prstGeom>
+          <a:solidFill>
+            <a:srgbClr val="1D9790"/>
+          </a:solidFill>
+          <a:ln>
+            <a:noFill/>
+          </a:ln>
+        </p:spPr>
+        <p:style>
+          <a:lnRef idx="1">
+            <a:schemeClr val="accent1"/>
+          </a:lnRef>
+          <a:fillRef idx="3">
+            <a:schemeClr val="accent1"/>
+          </a:fillRef>
+          <a:effectRef idx="2">
+            <a:schemeClr val="accent1"/>
+          </a:effectRef>
+          <a:fontRef idx="minor">
+            <a:schemeClr val="lt1"/>
+          </a:fontRef>
+        </p:style>
+        <p:txBody>
+          <a:bodyPr rtlCol="0" anchor="ctr"/>
+          <a:lstStyle/>
+          <a:p>
+            <a:pPr algn="ctr"/>
+          </a:p>
+        </p:txBody>
+      </p:sp>
+      <p:sp>
+        <p:nvSpPr>
+          <p:cNvPr id="3" name="TextBox 2"/>
           <p:cNvSpPr txBox="1"/>
           <p:nvPr/>
         </p:nvSpPr>
         <p:spPr>
           <a:xfrm>
-            <a:off x="548640" y="182880"/>
-            <a:ext cx="10972800" cy="548640"/>
+            <a:off x="548640" y="228600"/>
+            <a:ext cx="10972800" cy="640080"/>
           </a:xfrm>
           <a:prstGeom prst="rect">
             <a:avLst/>
@@ -7123,28 +7418,31 @@
           <a:lstStyle/>
           <a:p>
             <a:pPr algn="l">
-              <a:defRPr sz="2000" b="1">
+              <a:lnSpc>
+                <a:spcPct val="120000"/>
+              </a:lnSpc>
+              <a:defRPr sz="2400" b="1">
                 <a:solidFill>
                   <a:srgbClr val="1D9790"/>
                 </a:solidFill>
               </a:defRPr>
             </a:pPr>
             <a:r>
-              <a:t>SLIDE 3 — OUR CORE PRODUCT — BDCrops AgroVision™ — Satellite Intelligence + AquaCrop Digital Twin</a:t>
-            </a:r>
-          </a:p>
-        </p:txBody>
-      </p:sp>
-      <p:sp>
-        <p:nvSpPr>
-          <p:cNvPr id="3" name="TextBox 2"/>
+              <a:t>03 — Core Product — BDCrops AgroVision™</a:t>
+            </a:r>
+          </a:p>
+        </p:txBody>
+      </p:sp>
+      <p:sp>
+        <p:nvSpPr>
+          <p:cNvPr id="4" name="TextBox 3"/>
           <p:cNvSpPr txBox="1"/>
           <p:nvPr/>
         </p:nvSpPr>
         <p:spPr>
           <a:xfrm>
-            <a:off x="548640" y="914400"/>
-            <a:ext cx="10972800" cy="5486400"/>
+            <a:off x="548640" y="1005840"/>
+            <a:ext cx="6858000" cy="5486400"/>
           </a:xfrm>
           <a:prstGeom prst="rect">
             <a:avLst/>
@@ -7158,119 +7456,128 @@
           <a:lstStyle/>
           <a:p>
             <a:pPr>
-              <a:spcAft>
-                <a:spcPts val="500"/>
-              </a:spcAft>
-              <a:defRPr sz="1100">
-                <a:solidFill>
-                  <a:srgbClr val="13302B"/>
-                </a:solidFill>
-              </a:defRPr>
-            </a:pPr>
-            <a:r>
-              <a:t>Our platform combines:</a:t>
-            </a:r>
-          </a:p>
-          <a:p>
-            <a:pPr>
-              <a:spcAft>
-                <a:spcPts val="500"/>
-              </a:spcAft>
-              <a:defRPr sz="1100">
-                <a:solidFill>
-                  <a:srgbClr val="13302B"/>
-                </a:solidFill>
-              </a:defRPr>
-            </a:pPr>
-          </a:p>
-          <a:p>
-            <a:pPr>
-              <a:spcAft>
-                <a:spcPts val="500"/>
-              </a:spcAft>
-              <a:defRPr sz="1100">
-                <a:solidFill>
-                  <a:srgbClr val="13302B"/>
-                </a:solidFill>
-              </a:defRPr>
-            </a:pPr>
-            <a:r>
-              <a:t>OBSERVE — Satellite imagery</a:t>
-            </a:r>
-          </a:p>
-          <a:p>
-            <a:pPr>
-              <a:spcAft>
-                <a:spcPts val="500"/>
-              </a:spcAft>
-              <a:defRPr sz="1100">
-                <a:solidFill>
-                  <a:srgbClr val="13302B"/>
-                </a:solidFill>
-              </a:defRPr>
-            </a:pPr>
-            <a:r>
-              <a:t>ANALYZE — 8-band spectral intelligence</a:t>
-            </a:r>
-          </a:p>
-          <a:p>
-            <a:pPr>
-              <a:spcAft>
-                <a:spcPts val="500"/>
-              </a:spcAft>
-              <a:defRPr sz="1100">
-                <a:solidFill>
-                  <a:srgbClr val="13302B"/>
-                </a:solidFill>
-              </a:defRPr>
-            </a:pPr>
-            <a:r>
-              <a:t>MODEL — Crop growth + water balance</a:t>
-            </a:r>
-          </a:p>
-          <a:p>
-            <a:pPr>
-              <a:spcAft>
-                <a:spcPts val="500"/>
-              </a:spcAft>
-              <a:defRPr sz="1100">
-                <a:solidFill>
-                  <a:srgbClr val="13302B"/>
-                </a:solidFill>
-              </a:defRPr>
-            </a:pPr>
-            <a:r>
-              <a:t>SIMULATE — Flood / drought / irrigation / heat / harvest scenarios</a:t>
-            </a:r>
-          </a:p>
-          <a:p>
-            <a:pPr>
-              <a:spcAft>
-                <a:spcPts val="500"/>
-              </a:spcAft>
-              <a:defRPr sz="1100">
-                <a:solidFill>
-                  <a:srgbClr val="13302B"/>
-                </a:solidFill>
-              </a:defRPr>
-            </a:pPr>
-            <a:r>
-              <a:t>PRIORITIZE — Which fields need attention first?</a:t>
-            </a:r>
-          </a:p>
-          <a:p>
-            <a:pPr>
-              <a:spcAft>
-                <a:spcPts val="500"/>
-              </a:spcAft>
-              <a:defRPr sz="1100">
-                <a:solidFill>
-                  <a:srgbClr val="13302B"/>
-                </a:solidFill>
-              </a:defRPr>
-            </a:pPr>
-            <a:r>
-              <a:t>REPORT — Dashboard + API + automated reports</a:t>
+              <a:lnSpc>
+                <a:spcPct val="130000"/>
+              </a:lnSpc>
+              <a:spcAft>
+                <a:spcPts val="1000"/>
+              </a:spcAft>
+              <a:defRPr sz="1400">
+                <a:solidFill>
+                  <a:srgbClr val="13302B"/>
+                </a:solidFill>
+              </a:defRPr>
+            </a:pPr>
+            <a:r>
+              <a:t>• Satellite Intelligence + AquaCrop Digital Twin</a:t>
+            </a:r>
+          </a:p>
+          <a:p>
+            <a:pPr>
+              <a:lnSpc>
+                <a:spcPct val="130000"/>
+              </a:lnSpc>
+              <a:spcAft>
+                <a:spcPts val="1000"/>
+              </a:spcAft>
+              <a:defRPr sz="1400">
+                <a:solidFill>
+                  <a:srgbClr val="13302B"/>
+                </a:solidFill>
+              </a:defRPr>
+            </a:pPr>
+            <a:r>
+              <a:t>• OBSERVE — Satellite imagery</a:t>
+            </a:r>
+          </a:p>
+          <a:p>
+            <a:pPr>
+              <a:lnSpc>
+                <a:spcPct val="130000"/>
+              </a:lnSpc>
+              <a:spcAft>
+                <a:spcPts val="1000"/>
+              </a:spcAft>
+              <a:defRPr sz="1400">
+                <a:solidFill>
+                  <a:srgbClr val="13302B"/>
+                </a:solidFill>
+              </a:defRPr>
+            </a:pPr>
+            <a:r>
+              <a:t>• ANALYZE — 8-band spectral intelligence</a:t>
+            </a:r>
+          </a:p>
+          <a:p>
+            <a:pPr>
+              <a:lnSpc>
+                <a:spcPct val="130000"/>
+              </a:lnSpc>
+              <a:spcAft>
+                <a:spcPts val="1000"/>
+              </a:spcAft>
+              <a:defRPr sz="1400">
+                <a:solidFill>
+                  <a:srgbClr val="13302B"/>
+                </a:solidFill>
+              </a:defRPr>
+            </a:pPr>
+            <a:r>
+              <a:t>• MODEL — Crop growth + water balance</a:t>
+            </a:r>
+          </a:p>
+          <a:p>
+            <a:pPr>
+              <a:lnSpc>
+                <a:spcPct val="130000"/>
+              </a:lnSpc>
+              <a:spcAft>
+                <a:spcPts val="1000"/>
+              </a:spcAft>
+              <a:defRPr sz="1400">
+                <a:solidFill>
+                  <a:srgbClr val="13302B"/>
+                </a:solidFill>
+              </a:defRPr>
+            </a:pPr>
+            <a:r>
+              <a:t>• SIMULATE — Flood / drought / irrigation / heat / harvest scenarios</a:t>
+            </a:r>
+          </a:p>
+          <a:p>
+            <a:pPr>
+              <a:lnSpc>
+                <a:spcPct val="130000"/>
+              </a:lnSpc>
+              <a:spcAft>
+                <a:spcPts val="1000"/>
+              </a:spcAft>
+              <a:defRPr sz="1400">
+                <a:solidFill>
+                  <a:srgbClr val="13302B"/>
+                </a:solidFill>
+              </a:defRPr>
+            </a:pPr>
+            <a:r>
+              <a:t>• PRIORITIZE — Which fields need attention first?</a:t>
+            </a:r>
+          </a:p>
+          <a:p>
+            <a:pPr>
+              <a:lnSpc>
+                <a:spcPct val="130000"/>
+              </a:lnSpc>
+              <a:spcAft>
+                <a:spcPts val="1000"/>
+              </a:spcAft>
+              <a:defRPr sz="1400">
+                <a:solidFill>
+                  <a:srgbClr val="13302B"/>
+                </a:solidFill>
+              </a:defRPr>
+            </a:pPr>
+            <a:r>
+              <a:t>• REPORT — Dashboard + API + automated reports</a:t>
             </a:r>
           </a:p>
         </p:txBody>
@@ -7303,14 +7610,57 @@
       <p:grpSpPr/>
       <p:sp>
         <p:nvSpPr>
-          <p:cNvPr id="2" name="TextBox 1"/>
+          <p:cNvPr id="2" name="Rectangle 1"/>
+          <p:cNvSpPr/>
+          <p:nvPr/>
+        </p:nvSpPr>
+        <p:spPr>
+          <a:xfrm>
+            <a:off x="0" y="0"/>
+            <a:ext cx="12188952" cy="73152"/>
+          </a:xfrm>
+          <a:prstGeom prst="rect">
+            <a:avLst/>
+          </a:prstGeom>
+          <a:solidFill>
+            <a:srgbClr val="1D9790"/>
+          </a:solidFill>
+          <a:ln>
+            <a:noFill/>
+          </a:ln>
+        </p:spPr>
+        <p:style>
+          <a:lnRef idx="1">
+            <a:schemeClr val="accent1"/>
+          </a:lnRef>
+          <a:fillRef idx="3">
+            <a:schemeClr val="accent1"/>
+          </a:fillRef>
+          <a:effectRef idx="2">
+            <a:schemeClr val="accent1"/>
+          </a:effectRef>
+          <a:fontRef idx="minor">
+            <a:schemeClr val="lt1"/>
+          </a:fontRef>
+        </p:style>
+        <p:txBody>
+          <a:bodyPr rtlCol="0" anchor="ctr"/>
+          <a:lstStyle/>
+          <a:p>
+            <a:pPr algn="ctr"/>
+          </a:p>
+        </p:txBody>
+      </p:sp>
+      <p:sp>
+        <p:nvSpPr>
+          <p:cNvPr id="3" name="TextBox 2"/>
           <p:cNvSpPr txBox="1"/>
           <p:nvPr/>
         </p:nvSpPr>
         <p:spPr>
           <a:xfrm>
-            <a:off x="548640" y="182880"/>
-            <a:ext cx="10972800" cy="548640"/>
+            <a:off x="548640" y="228600"/>
+            <a:ext cx="10972800" cy="640080"/>
           </a:xfrm>
           <a:prstGeom prst="rect">
             <a:avLst/>
@@ -7324,28 +7674,31 @@
           <a:lstStyle/>
           <a:p>
             <a:pPr algn="l">
-              <a:defRPr sz="2000" b="1">
+              <a:lnSpc>
+                <a:spcPct val="120000"/>
+              </a:lnSpc>
+              <a:defRPr sz="2400" b="1">
                 <a:solidFill>
                   <a:srgbClr val="1D9790"/>
                 </a:solidFill>
               </a:defRPr>
             </a:pPr>
             <a:r>
-              <a:t>SLIDE 4 — THE 8-BAND ADVANTAGE — One Image. Multiple Intelligence Products.</a:t>
-            </a:r>
-          </a:p>
-        </p:txBody>
-      </p:sp>
-      <p:sp>
-        <p:nvSpPr>
-          <p:cNvPr id="3" name="TextBox 2"/>
+              <a:t>04 — 8-Band Advantage — One Image. Multiple Intelligence Products</a:t>
+            </a:r>
+          </a:p>
+        </p:txBody>
+      </p:sp>
+      <p:sp>
+        <p:nvSpPr>
+          <p:cNvPr id="4" name="TextBox 3"/>
           <p:cNvSpPr txBox="1"/>
           <p:nvPr/>
         </p:nvSpPr>
         <p:spPr>
           <a:xfrm>
-            <a:off x="548640" y="914400"/>
-            <a:ext cx="10972800" cy="5486400"/>
+            <a:off x="548640" y="1005840"/>
+            <a:ext cx="6858000" cy="5486400"/>
           </a:xfrm>
           <a:prstGeom prst="rect">
             <a:avLst/>
@@ -7359,116 +7712,74 @@
           <a:lstStyle/>
           <a:p>
             <a:pPr>
-              <a:spcAft>
-                <a:spcPts val="500"/>
-              </a:spcAft>
-              <a:defRPr sz="1100">
-                <a:solidFill>
-                  <a:srgbClr val="13302B"/>
-                </a:solidFill>
-              </a:defRPr>
-            </a:pPr>
-            <a:r>
-              <a:t>BADC specification specifically calls for eight VNIR multispectral bands:</a:t>
-            </a:r>
-          </a:p>
-          <a:p>
-            <a:pPr>
-              <a:spcAft>
-                <a:spcPts val="500"/>
-              </a:spcAft>
-              <a:defRPr sz="1100">
-                <a:solidFill>
-                  <a:srgbClr val="13302B"/>
-                </a:solidFill>
-              </a:defRPr>
-            </a:pPr>
-            <a:r>
-              <a:t>1. Coastal Blue | 2. Blue | 3. Green | 4. Yellow | 5. Red | 6. Red Edge | 7. NIR1 | 8. NIR2</a:t>
-            </a:r>
-          </a:p>
-          <a:p>
-            <a:pPr>
-              <a:spcAft>
-                <a:spcPts val="500"/>
-              </a:spcAft>
-              <a:defRPr sz="1100">
-                <a:solidFill>
-                  <a:srgbClr val="13302B"/>
-                </a:solidFill>
-              </a:defRPr>
-            </a:pPr>
-            <a:r>
-              <a:t>Multispectral resolution below 1.50 m and 1.24 m identified as ideal.</a:t>
-            </a:r>
-          </a:p>
-          <a:p>
-            <a:pPr>
-              <a:spcAft>
-                <a:spcPts val="500"/>
-              </a:spcAft>
-              <a:defRPr sz="1100">
-                <a:solidFill>
-                  <a:srgbClr val="13302B"/>
-                </a:solidFill>
-              </a:defRPr>
-            </a:pPr>
-          </a:p>
-          <a:p>
-            <a:pPr>
-              <a:spcAft>
-                <a:spcPts val="500"/>
-              </a:spcAft>
-              <a:defRPr sz="1100">
-                <a:solidFill>
-                  <a:srgbClr val="13302B"/>
-                </a:solidFill>
-              </a:defRPr>
-            </a:pPr>
-            <a:r>
-              <a:t>Why this matters: We don't sell the image once.</a:t>
-            </a:r>
-          </a:p>
-          <a:p>
-            <a:pPr>
-              <a:spcAft>
-                <a:spcPts val="500"/>
-              </a:spcAft>
-              <a:defRPr sz="1100">
-                <a:solidFill>
-                  <a:srgbClr val="13302B"/>
-                </a:solidFill>
-              </a:defRPr>
-            </a:pPr>
-            <a:r>
-              <a:t>One satellite acquisition → multiple analytical products.</a:t>
-            </a:r>
-          </a:p>
-          <a:p>
-            <a:pPr>
-              <a:spcAft>
-                <a:spcPts val="500"/>
-              </a:spcAft>
-              <a:defRPr sz="1100">
-                <a:solidFill>
-                  <a:srgbClr val="13302B"/>
-                </a:solidFill>
-              </a:defRPr>
-            </a:pPr>
-          </a:p>
-          <a:p>
-            <a:pPr>
-              <a:spcAft>
-                <a:spcPts val="500"/>
-              </a:spcAft>
-              <a:defRPr sz="1100">
-                <a:solidFill>
-                  <a:srgbClr val="13302B"/>
-                </a:solidFill>
-              </a:defRPr>
-            </a:pPr>
-            <a:r>
-              <a:t>One image → Vegetation, Soil, Water, Drainage, LULC, Change, Environment, Built-up + NIR/SWIR-derived indices</a:t>
+              <a:lnSpc>
+                <a:spcPct val="130000"/>
+              </a:lnSpc>
+              <a:spcAft>
+                <a:spcPts val="1000"/>
+              </a:spcAft>
+              <a:defRPr sz="1400">
+                <a:solidFill>
+                  <a:srgbClr val="13302B"/>
+                </a:solidFill>
+              </a:defRPr>
+            </a:pPr>
+            <a:r>
+              <a:t>• BADC spec: eight VNIR bands — Coastal Blue, Blue, Green, Yellow, Red, Red Edge, NIR1, NIR2</a:t>
+            </a:r>
+          </a:p>
+          <a:p>
+            <a:pPr>
+              <a:lnSpc>
+                <a:spcPct val="130000"/>
+              </a:lnSpc>
+              <a:spcAft>
+                <a:spcPts val="1000"/>
+              </a:spcAft>
+              <a:defRPr sz="1400">
+                <a:solidFill>
+                  <a:srgbClr val="13302B"/>
+                </a:solidFill>
+              </a:defRPr>
+            </a:pPr>
+            <a:r>
+              <a:t>• Multispectral &lt;1.50m, 1.24m ideal — Live: bdcrops.com/images/8band/</a:t>
+            </a:r>
+          </a:p>
+          <a:p>
+            <a:pPr>
+              <a:lnSpc>
+                <a:spcPct val="130000"/>
+              </a:lnSpc>
+              <a:spcAft>
+                <a:spcPts val="1000"/>
+              </a:spcAft>
+              <a:defRPr sz="1400">
+                <a:solidFill>
+                  <a:srgbClr val="13302B"/>
+                </a:solidFill>
+              </a:defRPr>
+            </a:pPr>
+            <a:r>
+              <a:t>• We don't sell image once — One acquisition → multiple products</a:t>
+            </a:r>
+          </a:p>
+          <a:p>
+            <a:pPr>
+              <a:lnSpc>
+                <a:spcPct val="130000"/>
+              </a:lnSpc>
+              <a:spcAft>
+                <a:spcPts val="1000"/>
+              </a:spcAft>
+              <a:defRPr sz="1400">
+                <a:solidFill>
+                  <a:srgbClr val="13302B"/>
+                </a:solidFill>
+              </a:defRPr>
+            </a:pPr>
+            <a:r>
+              <a:t>• Vegetation, Soil, Water, Drainage, LULC, Change, Environment, Built-up + NIR/SWIR indices</a:t>
             </a:r>
           </a:p>
         </p:txBody>
@@ -7501,14 +7812,57 @@
       <p:grpSpPr/>
       <p:sp>
         <p:nvSpPr>
-          <p:cNvPr id="2" name="TextBox 1"/>
+          <p:cNvPr id="2" name="Rectangle 1"/>
+          <p:cNvSpPr/>
+          <p:nvPr/>
+        </p:nvSpPr>
+        <p:spPr>
+          <a:xfrm>
+            <a:off x="0" y="0"/>
+            <a:ext cx="12188952" cy="73152"/>
+          </a:xfrm>
+          <a:prstGeom prst="rect">
+            <a:avLst/>
+          </a:prstGeom>
+          <a:solidFill>
+            <a:srgbClr val="1D9790"/>
+          </a:solidFill>
+          <a:ln>
+            <a:noFill/>
+          </a:ln>
+        </p:spPr>
+        <p:style>
+          <a:lnRef idx="1">
+            <a:schemeClr val="accent1"/>
+          </a:lnRef>
+          <a:fillRef idx="3">
+            <a:schemeClr val="accent1"/>
+          </a:fillRef>
+          <a:effectRef idx="2">
+            <a:schemeClr val="accent1"/>
+          </a:effectRef>
+          <a:fontRef idx="minor">
+            <a:schemeClr val="lt1"/>
+          </a:fontRef>
+        </p:style>
+        <p:txBody>
+          <a:bodyPr rtlCol="0" anchor="ctr"/>
+          <a:lstStyle/>
+          <a:p>
+            <a:pPr algn="ctr"/>
+          </a:p>
+        </p:txBody>
+      </p:sp>
+      <p:sp>
+        <p:nvSpPr>
+          <p:cNvPr id="3" name="TextBox 2"/>
           <p:cNvSpPr txBox="1"/>
           <p:nvPr/>
         </p:nvSpPr>
         <p:spPr>
           <a:xfrm>
-            <a:off x="548640" y="182880"/>
-            <a:ext cx="10972800" cy="548640"/>
+            <a:off x="548640" y="228600"/>
+            <a:ext cx="10972800" cy="640080"/>
           </a:xfrm>
           <a:prstGeom prst="rect">
             <a:avLst/>
@@ -7522,28 +7876,31 @@
           <a:lstStyle/>
           <a:p>
             <a:pPr algn="l">
-              <a:defRPr sz="2000" b="1">
+              <a:lnSpc>
+                <a:spcPct val="120000"/>
+              </a:lnSpc>
+              <a:defRPr sz="2400" b="1">
                 <a:solidFill>
                   <a:srgbClr val="1D9790"/>
                 </a:solidFill>
               </a:defRPr>
             </a:pPr>
             <a:r>
-              <a:t>SLIDE 5 — 8-BAND DATA → APPLICATIONS — One Dataset Creates Multiple Revenue Opportunities</a:t>
-            </a:r>
-          </a:p>
-        </p:txBody>
-      </p:sp>
-      <p:sp>
-        <p:nvSpPr>
-          <p:cNvPr id="3" name="TextBox 2"/>
+              <a:t>05 — 8-Band Data → Applications — One Dataset → Multiple Revenue</a:t>
+            </a:r>
+          </a:p>
+        </p:txBody>
+      </p:sp>
+      <p:sp>
+        <p:nvSpPr>
+          <p:cNvPr id="4" name="TextBox 3"/>
           <p:cNvSpPr txBox="1"/>
           <p:nvPr/>
         </p:nvSpPr>
         <p:spPr>
           <a:xfrm>
-            <a:off x="548640" y="914400"/>
-            <a:ext cx="10972800" cy="5486400"/>
+            <a:off x="548640" y="1005840"/>
+            <a:ext cx="6858000" cy="5486400"/>
           </a:xfrm>
           <a:prstGeom prst="rect">
             <a:avLst/>
@@ -7557,224 +7914,92 @@
           <a:lstStyle/>
           <a:p>
             <a:pPr>
-              <a:spcAft>
-                <a:spcPts val="500"/>
-              </a:spcAft>
-              <a:defRPr sz="1100">
-                <a:solidFill>
-                  <a:srgbClr val="13302B"/>
-                </a:solidFill>
-              </a:defRPr>
-            </a:pPr>
-            <a:r>
-              <a:t>Intelligence → Application → Customer</a:t>
-            </a:r>
-          </a:p>
-          <a:p>
-            <a:pPr>
-              <a:spcAft>
-                <a:spcPts val="500"/>
-              </a:spcAft>
-              <a:defRPr sz="1100">
-                <a:solidFill>
-                  <a:srgbClr val="13302B"/>
-                </a:solidFill>
-              </a:defRPr>
-            </a:pPr>
-            <a:r>
-              <a:t>Vegetation → NDVI / crop health → Agriculture</a:t>
-            </a:r>
-          </a:p>
-          <a:p>
-            <a:pPr>
-              <a:spcAft>
-                <a:spcPts val="500"/>
-              </a:spcAft>
-              <a:defRPr sz="1100">
-                <a:solidFill>
-                  <a:srgbClr val="13302B"/>
-                </a:solidFill>
-              </a:defRPr>
-            </a:pPr>
-            <a:r>
-              <a:t>Red Edge → Crop stress / vegetation condition → Agribusiness</a:t>
-            </a:r>
-          </a:p>
-          <a:p>
-            <a:pPr>
-              <a:spcAft>
-                <a:spcPts val="500"/>
-              </a:spcAft>
-              <a:defRPr sz="1100">
-                <a:solidFill>
-                  <a:srgbClr val="13302B"/>
-                </a:solidFill>
-              </a:defRPr>
-            </a:pPr>
-            <a:r>
-              <a:t>Soil → Soil composition indicators → Agriculture</a:t>
-            </a:r>
-          </a:p>
-          <a:p>
-            <a:pPr>
-              <a:spcAft>
-                <a:spcPts val="500"/>
-              </a:spcAft>
-              <a:defRPr sz="1100">
-                <a:solidFill>
-                  <a:srgbClr val="13302B"/>
-                </a:solidFill>
-              </a:defRPr>
-            </a:pPr>
-            <a:r>
-              <a:t>Crop Residue → Residue quantification → Agriculture / climate</a:t>
-            </a:r>
-          </a:p>
-          <a:p>
-            <a:pPr>
-              <a:spcAft>
-                <a:spcPts val="500"/>
-              </a:spcAft>
-              <a:defRPr sz="1100">
-                <a:solidFill>
-                  <a:srgbClr val="13302B"/>
-                </a:solidFill>
-              </a:defRPr>
-            </a:pPr>
-            <a:r>
-              <a:t>Water → Waterlogging / inundation → Government</a:t>
-            </a:r>
-          </a:p>
-          <a:p>
-            <a:pPr>
-              <a:spcAft>
-                <a:spcPts val="500"/>
-              </a:spcAft>
-              <a:defRPr sz="1100">
-                <a:solidFill>
-                  <a:srgbClr val="13302B"/>
-                </a:solidFill>
-              </a:defRPr>
-            </a:pPr>
-            <a:r>
-              <a:t>Drainage → Drainage congestion → Irrigation projects</a:t>
-            </a:r>
-          </a:p>
-          <a:p>
-            <a:pPr>
-              <a:spcAft>
-                <a:spcPts val="500"/>
-              </a:spcAft>
-              <a:defRPr sz="1100">
-                <a:solidFill>
-                  <a:srgbClr val="13302B"/>
-                </a:solidFill>
-              </a:defRPr>
-            </a:pPr>
-            <a:r>
-              <a:t>LULC → Land-use classification → Government</a:t>
-            </a:r>
-          </a:p>
-          <a:p>
-            <a:pPr>
-              <a:spcAft>
-                <a:spcPts val="500"/>
-              </a:spcAft>
-              <a:defRPr sz="1100">
-                <a:solidFill>
-                  <a:srgbClr val="13302B"/>
-                </a:solidFill>
-              </a:defRPr>
-            </a:pPr>
-            <a:r>
-              <a:t>Change → Multi-temporal change detection → Government / climate</a:t>
-            </a:r>
-          </a:p>
-          <a:p>
-            <a:pPr>
-              <a:spcAft>
-                <a:spcPts val="500"/>
-              </a:spcAft>
-              <a:defRPr sz="1100">
-                <a:solidFill>
-                  <a:srgbClr val="13302B"/>
-                </a:solidFill>
-              </a:defRPr>
-            </a:pPr>
-            <a:r>
-              <a:t>Environment → Baseline monitoring → NGOs / development</a:t>
-            </a:r>
-          </a:p>
-          <a:p>
-            <a:pPr>
-              <a:spcAft>
-                <a:spcPts val="500"/>
-              </a:spcAft>
-              <a:defRPr sz="1100">
-                <a:solidFill>
-                  <a:srgbClr val="13302B"/>
-                </a:solidFill>
-              </a:defRPr>
-            </a:pPr>
-            <a:r>
-              <a:t>Built-up → Settlement expansion → Infrastructure</a:t>
-            </a:r>
-          </a:p>
-          <a:p>
-            <a:pPr>
-              <a:spcAft>
-                <a:spcPts val="500"/>
-              </a:spcAft>
-              <a:defRPr sz="1100">
-                <a:solidFill>
-                  <a:srgbClr val="13302B"/>
-                </a:solidFill>
-              </a:defRPr>
-            </a:pPr>
-            <a:r>
-              <a:t>NIR/SWIR-derived indices → Water / vegetation / land analysis → Multiple sectors</a:t>
-            </a:r>
-          </a:p>
-          <a:p>
-            <a:pPr>
-              <a:spcAft>
-                <a:spcPts val="500"/>
-              </a:spcAft>
-              <a:defRPr sz="1100">
-                <a:solidFill>
-                  <a:srgbClr val="13302B"/>
-                </a:solidFill>
-              </a:defRPr>
-            </a:pPr>
-          </a:p>
-          <a:p>
-            <a:pPr>
-              <a:spcAft>
-                <a:spcPts val="500"/>
-              </a:spcAft>
-              <a:defRPr sz="1100">
-                <a:solidFill>
-                  <a:srgbClr val="13302B"/>
-                </a:solidFill>
-              </a:defRPr>
-            </a:pPr>
-            <a:r>
-              <a:t>BADC spec explicitly identifies vegetation/soil analysis, NDVI, soil organic composition, crop residue, waterlogging, water-table fluctuation, drainage, LULC, change detection, environmental baseline as applications.</a:t>
-            </a:r>
-          </a:p>
-          <a:p>
-            <a:pPr>
-              <a:spcAft>
-                <a:spcPts val="500"/>
-              </a:spcAft>
-              <a:defRPr sz="1100">
-                <a:solidFill>
-                  <a:srgbClr val="13302B"/>
-                </a:solidFill>
-              </a:defRPr>
-            </a:pPr>
-            <a:r>
-              <a:t>CF2 engine already implements NDVI, NDWI, NDBI, EVI, SAVI, NBR, MNDWI, NDRE, NBR2</a:t>
+              <a:lnSpc>
+                <a:spcPct val="130000"/>
+              </a:lnSpc>
+              <a:spcAft>
+                <a:spcPts val="1000"/>
+              </a:spcAft>
+              <a:defRPr sz="1400">
+                <a:solidFill>
+                  <a:srgbClr val="13302B"/>
+                </a:solidFill>
+              </a:defRPr>
+            </a:pPr>
+            <a:r>
+              <a:t>• Vegetation → NDVI / crop health → Agriculture</a:t>
+            </a:r>
+          </a:p>
+          <a:p>
+            <a:pPr>
+              <a:lnSpc>
+                <a:spcPct val="130000"/>
+              </a:lnSpc>
+              <a:spcAft>
+                <a:spcPts val="1000"/>
+              </a:spcAft>
+              <a:defRPr sz="1400">
+                <a:solidFill>
+                  <a:srgbClr val="13302B"/>
+                </a:solidFill>
+              </a:defRPr>
+            </a:pPr>
+            <a:r>
+              <a:t>• Red Edge → Crop stress → Agribusiness | Soil → Soil composition → Agriculture</a:t>
+            </a:r>
+          </a:p>
+          <a:p>
+            <a:pPr>
+              <a:lnSpc>
+                <a:spcPct val="130000"/>
+              </a:lnSpc>
+              <a:spcAft>
+                <a:spcPts val="1000"/>
+              </a:spcAft>
+              <a:defRPr sz="1400">
+                <a:solidFill>
+                  <a:srgbClr val="13302B"/>
+                </a:solidFill>
+              </a:defRPr>
+            </a:pPr>
+            <a:r>
+              <a:t>• Water → Waterlogging / inundation → Government | Drainage → Congestion → Irrigation</a:t>
+            </a:r>
+          </a:p>
+          <a:p>
+            <a:pPr>
+              <a:lnSpc>
+                <a:spcPct val="130000"/>
+              </a:lnSpc>
+              <a:spcAft>
+                <a:spcPts val="1000"/>
+              </a:spcAft>
+              <a:defRPr sz="1400">
+                <a:solidFill>
+                  <a:srgbClr val="13302B"/>
+                </a:solidFill>
+              </a:defRPr>
+            </a:pPr>
+            <a:r>
+              <a:t>• LULC → Classification → Government | Change → Multi-temporal → Govt / climate</a:t>
+            </a:r>
+          </a:p>
+          <a:p>
+            <a:pPr>
+              <a:lnSpc>
+                <a:spcPct val="130000"/>
+              </a:lnSpc>
+              <a:spcAft>
+                <a:spcPts val="1000"/>
+              </a:spcAft>
+              <a:defRPr sz="1400">
+                <a:solidFill>
+                  <a:srgbClr val="13302B"/>
+                </a:solidFill>
+              </a:defRPr>
+            </a:pPr>
+            <a:r>
+              <a:t>• CF2 Engine: NDVI, NDWI, NDBI, EVI, SAVI, NBR, MNDWI, NDRE, NBR2</a:t>
             </a:r>
           </a:p>
         </p:txBody>
@@ -7807,14 +8032,57 @@
       <p:grpSpPr/>
       <p:sp>
         <p:nvSpPr>
-          <p:cNvPr id="2" name="TextBox 1"/>
+          <p:cNvPr id="2" name="Rectangle 1"/>
+          <p:cNvSpPr/>
+          <p:nvPr/>
+        </p:nvSpPr>
+        <p:spPr>
+          <a:xfrm>
+            <a:off x="0" y="0"/>
+            <a:ext cx="12188952" cy="73152"/>
+          </a:xfrm>
+          <a:prstGeom prst="rect">
+            <a:avLst/>
+          </a:prstGeom>
+          <a:solidFill>
+            <a:srgbClr val="1D9790"/>
+          </a:solidFill>
+          <a:ln>
+            <a:noFill/>
+          </a:ln>
+        </p:spPr>
+        <p:style>
+          <a:lnRef idx="1">
+            <a:schemeClr val="accent1"/>
+          </a:lnRef>
+          <a:fillRef idx="3">
+            <a:schemeClr val="accent1"/>
+          </a:fillRef>
+          <a:effectRef idx="2">
+            <a:schemeClr val="accent1"/>
+          </a:effectRef>
+          <a:fontRef idx="minor">
+            <a:schemeClr val="lt1"/>
+          </a:fontRef>
+        </p:style>
+        <p:txBody>
+          <a:bodyPr rtlCol="0" anchor="ctr"/>
+          <a:lstStyle/>
+          <a:p>
+            <a:pPr algn="ctr"/>
+          </a:p>
+        </p:txBody>
+      </p:sp>
+      <p:sp>
+        <p:nvSpPr>
+          <p:cNvPr id="3" name="TextBox 2"/>
           <p:cNvSpPr txBox="1"/>
           <p:nvPr/>
         </p:nvSpPr>
         <p:spPr>
           <a:xfrm>
-            <a:off x="548640" y="182880"/>
-            <a:ext cx="10972800" cy="548640"/>
+            <a:off x="548640" y="228600"/>
+            <a:ext cx="10972800" cy="640080"/>
           </a:xfrm>
           <a:prstGeom prst="rect">
             <a:avLst/>
@@ -7828,28 +8096,31 @@
           <a:lstStyle/>
           <a:p>
             <a:pPr algn="l">
-              <a:defRPr sz="2000" b="1">
+              <a:lnSpc>
+                <a:spcPct val="120000"/>
+              </a:lnSpc>
+              <a:defRPr sz="2400" b="1">
                 <a:solidFill>
                   <a:srgbClr val="1D9790"/>
                 </a:solidFill>
               </a:defRPr>
             </a:pPr>
             <a:r>
-              <a:t>SLIDE 6 — THE 8-BAND REVENUE ENGINE — We Monetize Intelligence, Not Imagery</a:t>
-            </a:r>
-          </a:p>
-        </p:txBody>
-      </p:sp>
-      <p:sp>
-        <p:nvSpPr>
-          <p:cNvPr id="3" name="TextBox 2"/>
+              <a:t>06 — Revenue Engine — We Monetize Intelligence, Not Imagery</a:t>
+            </a:r>
+          </a:p>
+        </p:txBody>
+      </p:sp>
+      <p:sp>
+        <p:nvSpPr>
+          <p:cNvPr id="4" name="TextBox 3"/>
           <p:cNvSpPr txBox="1"/>
           <p:nvPr/>
         </p:nvSpPr>
         <p:spPr>
           <a:xfrm>
-            <a:off x="548640" y="914400"/>
-            <a:ext cx="10972800" cy="5486400"/>
+            <a:off x="548640" y="1005840"/>
+            <a:ext cx="6858000" cy="5486400"/>
           </a:xfrm>
           <a:prstGeom prst="rect">
             <a:avLst/>
@@ -7863,119 +8134,110 @@
           <a:lstStyle/>
           <a:p>
             <a:pPr>
-              <a:spcAft>
-                <a:spcPts val="500"/>
-              </a:spcAft>
-              <a:defRPr sz="1100">
-                <a:solidFill>
-                  <a:srgbClr val="13302B"/>
-                </a:solidFill>
-              </a:defRPr>
-            </a:pPr>
-            <a:r>
-              <a:t>Revenue Layer 1 — Satellite Data: Customer needs imagery. Data procurement / supply</a:t>
-            </a:r>
-          </a:p>
-          <a:p>
-            <a:pPr>
-              <a:spcAft>
-                <a:spcPts val="500"/>
-              </a:spcAft>
-              <a:defRPr sz="1100">
-                <a:solidFill>
-                  <a:srgbClr val="13302B"/>
-                </a:solidFill>
-              </a:defRPr>
-            </a:pPr>
-            <a:r>
-              <a:t>Revenue Layer 2 — Analytics: Customer needs NDVI / NDRE / waterlogging / LULC / change</a:t>
-            </a:r>
-          </a:p>
-          <a:p>
-            <a:pPr>
-              <a:spcAft>
-                <a:spcPts val="500"/>
-              </a:spcAft>
-              <a:defRPr sz="1100">
-                <a:solidFill>
-                  <a:srgbClr val="13302B"/>
-                </a:solidFill>
-              </a:defRPr>
-            </a:pPr>
-            <a:r>
-              <a:t>Revenue Layer 3 — Monitoring: Recurring monthly / seasonal / annual monitoring</a:t>
-            </a:r>
-          </a:p>
-          <a:p>
-            <a:pPr>
-              <a:spcAft>
-                <a:spcPts val="500"/>
-              </a:spcAft>
-              <a:defRPr sz="1100">
-                <a:solidFill>
-                  <a:srgbClr val="13302B"/>
-                </a:solidFill>
-              </a:defRPr>
-            </a:pPr>
-            <a:r>
-              <a:t>Revenue Layer 4 — Decision Intelligence: Customer wants 'What should we do?'</a:t>
-            </a:r>
-          </a:p>
-          <a:p>
-            <a:pPr>
-              <a:spcAft>
-                <a:spcPts val="500"/>
-              </a:spcAft>
-              <a:defRPr sz="1100">
-                <a:solidFill>
-                  <a:srgbClr val="13302B"/>
-                </a:solidFill>
-              </a:defRPr>
-            </a:pPr>
-            <a:r>
-              <a:t>Revenue Layer 5 — Digital Twin: Customer wants 'What happens next?'</a:t>
-            </a:r>
-          </a:p>
-          <a:p>
-            <a:pPr>
-              <a:spcAft>
-                <a:spcPts val="500"/>
-              </a:spcAft>
-              <a:defRPr sz="1100">
-                <a:solidFill>
-                  <a:srgbClr val="13302B"/>
-                </a:solidFill>
-              </a:defRPr>
-            </a:pPr>
-            <a:r>
-              <a:t>Revenue Layer 6 — API / SaaS: Customer integrates intelligence directly</a:t>
-            </a:r>
-          </a:p>
-          <a:p>
-            <a:pPr>
-              <a:spcAft>
-                <a:spcPts val="500"/>
-              </a:spcAft>
-              <a:defRPr sz="1100">
-                <a:solidFill>
-                  <a:srgbClr val="13302B"/>
-                </a:solidFill>
-              </a:defRPr>
-            </a:pPr>
-          </a:p>
-          <a:p>
-            <a:pPr>
-              <a:spcAft>
-                <a:spcPts val="500"/>
-              </a:spcAft>
-              <a:defRPr sz="1100">
-                <a:solidFill>
-                  <a:srgbClr val="13302B"/>
-                </a:solidFill>
-              </a:defRPr>
-            </a:pPr>
-            <a:r>
-              <a:t>This is critical — we monetize intelligence, not imagery</a:t>
+              <a:lnSpc>
+                <a:spcPct val="130000"/>
+              </a:lnSpc>
+              <a:spcAft>
+                <a:spcPts val="1000"/>
+              </a:spcAft>
+              <a:defRPr sz="1400">
+                <a:solidFill>
+                  <a:srgbClr val="13302B"/>
+                </a:solidFill>
+              </a:defRPr>
+            </a:pPr>
+            <a:r>
+              <a:t>• Layer 1 — Satellite Data: Procurement / supply</a:t>
+            </a:r>
+          </a:p>
+          <a:p>
+            <a:pPr>
+              <a:lnSpc>
+                <a:spcPct val="130000"/>
+              </a:lnSpc>
+              <a:spcAft>
+                <a:spcPts val="1000"/>
+              </a:spcAft>
+              <a:defRPr sz="1400">
+                <a:solidFill>
+                  <a:srgbClr val="13302B"/>
+                </a:solidFill>
+              </a:defRPr>
+            </a:pPr>
+            <a:r>
+              <a:t>• Layer 2 — Analytics: NDVI / NDRE / waterlogging / LULC / change</a:t>
+            </a:r>
+          </a:p>
+          <a:p>
+            <a:pPr>
+              <a:lnSpc>
+                <a:spcPct val="130000"/>
+              </a:lnSpc>
+              <a:spcAft>
+                <a:spcPts val="1000"/>
+              </a:spcAft>
+              <a:defRPr sz="1400">
+                <a:solidFill>
+                  <a:srgbClr val="13302B"/>
+                </a:solidFill>
+              </a:defRPr>
+            </a:pPr>
+            <a:r>
+              <a:t>• Layer 3 — Monitoring: Recurring monthly / seasonal / annual</a:t>
+            </a:r>
+          </a:p>
+          <a:p>
+            <a:pPr>
+              <a:lnSpc>
+                <a:spcPct val="130000"/>
+              </a:lnSpc>
+              <a:spcAft>
+                <a:spcPts val="1000"/>
+              </a:spcAft>
+              <a:defRPr sz="1400">
+                <a:solidFill>
+                  <a:srgbClr val="13302B"/>
+                </a:solidFill>
+              </a:defRPr>
+            </a:pPr>
+            <a:r>
+              <a:t>• Layer 4 — Decision Intelligence: 'What should we do?'</a:t>
+            </a:r>
+          </a:p>
+          <a:p>
+            <a:pPr>
+              <a:lnSpc>
+                <a:spcPct val="130000"/>
+              </a:lnSpc>
+              <a:spcAft>
+                <a:spcPts val="1000"/>
+              </a:spcAft>
+              <a:defRPr sz="1400">
+                <a:solidFill>
+                  <a:srgbClr val="13302B"/>
+                </a:solidFill>
+              </a:defRPr>
+            </a:pPr>
+            <a:r>
+              <a:t>• Layer 5 — Digital Twin: 'What happens next?'</a:t>
+            </a:r>
+          </a:p>
+          <a:p>
+            <a:pPr>
+              <a:lnSpc>
+                <a:spcPct val="130000"/>
+              </a:lnSpc>
+              <a:spcAft>
+                <a:spcPts val="1000"/>
+              </a:spcAft>
+              <a:defRPr sz="1400">
+                <a:solidFill>
+                  <a:srgbClr val="13302B"/>
+                </a:solidFill>
+              </a:defRPr>
+            </a:pPr>
+            <a:r>
+              <a:t>• Layer 6 — API / SaaS: Customer integrates intelligence directly</a:t>
             </a:r>
           </a:p>
         </p:txBody>
@@ -8008,14 +8270,57 @@
       <p:grpSpPr/>
       <p:sp>
         <p:nvSpPr>
-          <p:cNvPr id="2" name="TextBox 1"/>
+          <p:cNvPr id="2" name="Rectangle 1"/>
+          <p:cNvSpPr/>
+          <p:nvPr/>
+        </p:nvSpPr>
+        <p:spPr>
+          <a:xfrm>
+            <a:off x="0" y="0"/>
+            <a:ext cx="12188952" cy="73152"/>
+          </a:xfrm>
+          <a:prstGeom prst="rect">
+            <a:avLst/>
+          </a:prstGeom>
+          <a:solidFill>
+            <a:srgbClr val="1D9790"/>
+          </a:solidFill>
+          <a:ln>
+            <a:noFill/>
+          </a:ln>
+        </p:spPr>
+        <p:style>
+          <a:lnRef idx="1">
+            <a:schemeClr val="accent1"/>
+          </a:lnRef>
+          <a:fillRef idx="3">
+            <a:schemeClr val="accent1"/>
+          </a:fillRef>
+          <a:effectRef idx="2">
+            <a:schemeClr val="accent1"/>
+          </a:effectRef>
+          <a:fontRef idx="minor">
+            <a:schemeClr val="lt1"/>
+          </a:fontRef>
+        </p:style>
+        <p:txBody>
+          <a:bodyPr rtlCol="0" anchor="ctr"/>
+          <a:lstStyle/>
+          <a:p>
+            <a:pPr algn="ctr"/>
+          </a:p>
+        </p:txBody>
+      </p:sp>
+      <p:sp>
+        <p:nvSpPr>
+          <p:cNvPr id="3" name="TextBox 2"/>
           <p:cNvSpPr txBox="1"/>
           <p:nvPr/>
         </p:nvSpPr>
         <p:spPr>
           <a:xfrm>
-            <a:off x="548640" y="182880"/>
-            <a:ext cx="10972800" cy="548640"/>
+            <a:off x="548640" y="228600"/>
+            <a:ext cx="10972800" cy="640080"/>
           </a:xfrm>
           <a:prstGeom prst="rect">
             <a:avLst/>
@@ -8029,28 +8334,31 @@
           <a:lstStyle/>
           <a:p>
             <a:pPr algn="l">
-              <a:defRPr sz="2000" b="1">
+              <a:lnSpc>
+                <a:spcPct val="120000"/>
+              </a:lnSpc>
+              <a:defRPr sz="2400" b="1">
                 <a:solidFill>
                   <a:srgbClr val="1D9790"/>
                 </a:solidFill>
               </a:defRPr>
             </a:pPr>
             <a:r>
-              <a:t>SLIDE 7 — REVENUE PRODUCTS — Six Ways to Monetize Same GeoData Infrastructure</a:t>
-            </a:r>
-          </a:p>
-        </p:txBody>
-      </p:sp>
-      <p:sp>
-        <p:nvSpPr>
-          <p:cNvPr id="3" name="TextBox 2"/>
+              <a:t>07 — AquaCrop Digital Twin — The Differentiator</a:t>
+            </a:r>
+          </a:p>
+        </p:txBody>
+      </p:sp>
+      <p:sp>
+        <p:nvSpPr>
+          <p:cNvPr id="4" name="TextBox 3"/>
           <p:cNvSpPr txBox="1"/>
           <p:nvPr/>
         </p:nvSpPr>
         <p:spPr>
           <a:xfrm>
-            <a:off x="548640" y="914400"/>
-            <a:ext cx="10972800" cy="5486400"/>
+            <a:off x="548640" y="1005840"/>
+            <a:ext cx="6858000" cy="5486400"/>
           </a:xfrm>
           <a:prstGeom prst="rect">
             <a:avLst/>
@@ -8064,92 +8372,110 @@
           <a:lstStyle/>
           <a:p>
             <a:pPr>
-              <a:spcAft>
-                <a:spcPts val="500"/>
-              </a:spcAft>
-              <a:defRPr sz="1100">
-                <a:solidFill>
-                  <a:srgbClr val="13302B"/>
-                </a:solidFill>
-              </a:defRPr>
-            </a:pPr>
-            <a:r>
-              <a:t>01 — Satellite Intelligence Projects: Government / development projects — Project revenue — Example: BADC technical pilot envelope US$45,000 indicative six-month pilot, 5-10 AOIs</a:t>
-            </a:r>
-          </a:p>
-          <a:p>
-            <a:pPr>
-              <a:spcAft>
-                <a:spcPts val="500"/>
-              </a:spcAft>
-              <a:defRPr sz="1100">
-                <a:solidFill>
-                  <a:srgbClr val="13302B"/>
-                </a:solidFill>
-              </a:defRPr>
-            </a:pPr>
-            <a:r>
-              <a:t>02 — AOI Monitoring: Per AOI / hectare / season / monitoring cycle — Recurring revenue</a:t>
-            </a:r>
-          </a:p>
-          <a:p>
-            <a:pPr>
-              <a:spcAft>
-                <a:spcPts val="500"/>
-              </a:spcAft>
-              <a:defRPr sz="1100">
-                <a:solidFill>
-                  <a:srgbClr val="13302B"/>
-                </a:solidFill>
-              </a:defRPr>
-            </a:pPr>
-            <a:r>
-              <a:t>03 — Enterprise Dashboard: Annual subscription for agriculture companies, NGOs, government programmes, insurance, research</a:t>
-            </a:r>
-          </a:p>
-          <a:p>
-            <a:pPr>
-              <a:spcAft>
-                <a:spcPts val="500"/>
-              </a:spcAft>
-              <a:defRPr sz="1100">
-                <a:solidFill>
-                  <a:srgbClr val="13302B"/>
-                </a:solidFill>
-              </a:defRPr>
-            </a:pPr>
-            <a:r>
-              <a:t>04 — GeoData API: Customers pay for vegetation scores, water scores, land classification, change detection, risk layers, machine-readable outputs</a:t>
-            </a:r>
-          </a:p>
-          <a:p>
-            <a:pPr>
-              <a:spcAft>
-                <a:spcPts val="500"/>
-              </a:spcAft>
-              <a:defRPr sz="1100">
-                <a:solidFill>
-                  <a:srgbClr val="13302B"/>
-                </a:solidFill>
-              </a:defRPr>
-            </a:pPr>
-            <a:r>
-              <a:t>05 — AquaCrop Intelligence: Premium predictive layer — Observation → Simulation → Forecast → Scenario</a:t>
-            </a:r>
-          </a:p>
-          <a:p>
-            <a:pPr>
-              <a:spcAft>
-                <a:spcPts val="500"/>
-              </a:spcAft>
-              <a:defRPr sz="1100">
-                <a:solidFill>
-                  <a:srgbClr val="13302B"/>
-                </a:solidFill>
-              </a:defRPr>
-            </a:pPr>
-            <a:r>
-              <a:t>06 — Decision Intelligence: Highest-value — Instead of 'NDVI=0.51' customer receives 'These 20 fields should receive inspection/harvest/drainage priority' — software margins + recurring revenue</a:t>
+              <a:lnSpc>
+                <a:spcPct val="130000"/>
+              </a:lnSpc>
+              <a:spcAft>
+                <a:spcPts val="1000"/>
+              </a:spcAft>
+              <a:defRPr sz="1400">
+                <a:solidFill>
+                  <a:srgbClr val="13302B"/>
+                </a:solidFill>
+              </a:defRPr>
+            </a:pPr>
+            <a:r>
+              <a:t>• NDVI tells you WHAT Changed. AquaCrop tells WHAT IT COULD MEAN</a:t>
+            </a:r>
+          </a:p>
+          <a:p>
+            <a:pPr>
+              <a:lnSpc>
+                <a:spcPct val="130000"/>
+              </a:lnSpc>
+              <a:spcAft>
+                <a:spcPts val="1000"/>
+              </a:spcAft>
+              <a:defRPr sz="1400">
+                <a:solidFill>
+                  <a:srgbClr val="13302B"/>
+                </a:solidFill>
+              </a:defRPr>
+            </a:pPr>
+            <a:r>
+              <a:t>• Satellite → field condition</a:t>
+            </a:r>
+          </a:p>
+          <a:p>
+            <a:pPr>
+              <a:lnSpc>
+                <a:spcPct val="130000"/>
+              </a:lnSpc>
+              <a:spcAft>
+                <a:spcPts val="1000"/>
+              </a:spcAft>
+              <a:defRPr sz="1400">
+                <a:solidFill>
+                  <a:srgbClr val="13302B"/>
+                </a:solidFill>
+              </a:defRPr>
+            </a:pPr>
+            <a:r>
+              <a:t>• Weather + Soil + Crop Calendar → context</a:t>
+            </a:r>
+          </a:p>
+          <a:p>
+            <a:pPr>
+              <a:lnSpc>
+                <a:spcPct val="130000"/>
+              </a:lnSpc>
+              <a:spcAft>
+                <a:spcPts val="1000"/>
+              </a:spcAft>
+              <a:defRPr sz="1400">
+                <a:solidFill>
+                  <a:srgbClr val="13302B"/>
+                </a:solidFill>
+              </a:defRPr>
+            </a:pPr>
+            <a:r>
+              <a:t>• AquaCrop → growth / biomass / ET / water balance / yield</a:t>
+            </a:r>
+          </a:p>
+          <a:p>
+            <a:pPr>
+              <a:lnSpc>
+                <a:spcPct val="130000"/>
+              </a:lnSpc>
+              <a:spcAft>
+                <a:spcPts val="1000"/>
+              </a:spcAft>
+              <a:defRPr sz="1400">
+                <a:solidFill>
+                  <a:srgbClr val="13302B"/>
+                </a:solidFill>
+              </a:defRPr>
+            </a:pPr>
+            <a:r>
+              <a:t>• Scenario Engine → flood / drought / heat / irrigation / harvest</a:t>
+            </a:r>
+          </a:p>
+          <a:p>
+            <a:pPr>
+              <a:lnSpc>
+                <a:spcPct val="130000"/>
+              </a:lnSpc>
+              <a:spcAft>
+                <a:spcPts val="1000"/>
+              </a:spcAft>
+              <a:defRPr sz="1400">
+                <a:solidFill>
+                  <a:srgbClr val="13302B"/>
+                </a:solidFill>
+              </a:defRPr>
+            </a:pPr>
+            <a:r>
+              <a:t>• Action Layer → priority / alert / dashboard / API</a:t>
             </a:r>
           </a:p>
         </p:txBody>
@@ -8182,14 +8508,57 @@
       <p:grpSpPr/>
       <p:sp>
         <p:nvSpPr>
-          <p:cNvPr id="2" name="TextBox 1"/>
+          <p:cNvPr id="2" name="Rectangle 1"/>
+          <p:cNvSpPr/>
+          <p:nvPr/>
+        </p:nvSpPr>
+        <p:spPr>
+          <a:xfrm>
+            <a:off x="0" y="0"/>
+            <a:ext cx="12188952" cy="73152"/>
+          </a:xfrm>
+          <a:prstGeom prst="rect">
+            <a:avLst/>
+          </a:prstGeom>
+          <a:solidFill>
+            <a:srgbClr val="1D9790"/>
+          </a:solidFill>
+          <a:ln>
+            <a:noFill/>
+          </a:ln>
+        </p:spPr>
+        <p:style>
+          <a:lnRef idx="1">
+            <a:schemeClr val="accent1"/>
+          </a:lnRef>
+          <a:fillRef idx="3">
+            <a:schemeClr val="accent1"/>
+          </a:fillRef>
+          <a:effectRef idx="2">
+            <a:schemeClr val="accent1"/>
+          </a:effectRef>
+          <a:fontRef idx="minor">
+            <a:schemeClr val="lt1"/>
+          </a:fontRef>
+        </p:style>
+        <p:txBody>
+          <a:bodyPr rtlCol="0" anchor="ctr"/>
+          <a:lstStyle/>
+          <a:p>
+            <a:pPr algn="ctr"/>
+          </a:p>
+        </p:txBody>
+      </p:sp>
+      <p:sp>
+        <p:nvSpPr>
+          <p:cNvPr id="3" name="TextBox 2"/>
           <p:cNvSpPr txBox="1"/>
           <p:nvPr/>
         </p:nvSpPr>
         <p:spPr>
           <a:xfrm>
-            <a:off x="548640" y="182880"/>
-            <a:ext cx="10972800" cy="548640"/>
+            <a:off x="548640" y="228600"/>
+            <a:ext cx="10972800" cy="640080"/>
           </a:xfrm>
           <a:prstGeom prst="rect">
             <a:avLst/>
@@ -8203,28 +8572,31 @@
           <a:lstStyle/>
           <a:p>
             <a:pPr algn="l">
-              <a:defRPr sz="2000" b="1">
+              <a:lnSpc>
+                <a:spcPct val="120000"/>
+              </a:lnSpc>
+              <a:defRPr sz="2400" b="1">
                 <a:solidFill>
                   <a:srgbClr val="1D9790"/>
                 </a:solidFill>
               </a:defRPr>
             </a:pPr>
             <a:r>
-              <a:t>SLIDE 8 — AQUACROP IS THE DIFFERENTIATOR</a:t>
-            </a:r>
-          </a:p>
-        </p:txBody>
-      </p:sp>
-      <p:sp>
-        <p:nvSpPr>
-          <p:cNvPr id="3" name="TextBox 2"/>
+              <a:t>08 — AquaCrop Proof — Khulna Coastal — Surkhali Union</a:t>
+            </a:r>
+          </a:p>
+        </p:txBody>
+      </p:sp>
+      <p:sp>
+        <p:nvSpPr>
+          <p:cNvPr id="4" name="TextBox 3"/>
           <p:cNvSpPr txBox="1"/>
           <p:nvPr/>
         </p:nvSpPr>
         <p:spPr>
           <a:xfrm>
-            <a:off x="548640" y="914400"/>
-            <a:ext cx="10972800" cy="5486400"/>
+            <a:off x="548640" y="1005840"/>
+            <a:ext cx="6858000" cy="5486400"/>
           </a:xfrm>
           <a:prstGeom prst="rect">
             <a:avLst/>
@@ -8238,146 +8610,92 @@
           <a:lstStyle/>
           <a:p>
             <a:pPr>
-              <a:spcAft>
-                <a:spcPts val="500"/>
-              </a:spcAft>
-              <a:defRPr sz="1100">
-                <a:solidFill>
-                  <a:srgbClr val="13302B"/>
-                </a:solidFill>
-              </a:defRPr>
-            </a:pPr>
-            <a:r>
-              <a:t>NDVI Tells You WHAT Changed. AquaCrop Helps Explain WHAT IT COULD MEAN.</a:t>
-            </a:r>
-          </a:p>
-          <a:p>
-            <a:pPr>
-              <a:spcAft>
-                <a:spcPts val="500"/>
-              </a:spcAft>
-              <a:defRPr sz="1100">
-                <a:solidFill>
-                  <a:srgbClr val="13302B"/>
-                </a:solidFill>
-              </a:defRPr>
-            </a:pPr>
-          </a:p>
-          <a:p>
-            <a:pPr>
-              <a:spcAft>
-                <a:spcPts val="500"/>
-              </a:spcAft>
-              <a:defRPr sz="1100">
-                <a:solidFill>
-                  <a:srgbClr val="13302B"/>
-                </a:solidFill>
-              </a:defRPr>
-            </a:pPr>
-            <a:r>
-              <a:t>Architecture from BADC work:</a:t>
-            </a:r>
-          </a:p>
-          <a:p>
-            <a:pPr>
-              <a:spcAft>
-                <a:spcPts val="500"/>
-              </a:spcAft>
-              <a:defRPr sz="1100">
-                <a:solidFill>
-                  <a:srgbClr val="13302B"/>
-                </a:solidFill>
-              </a:defRPr>
-            </a:pPr>
-            <a:r>
-              <a:t>Satellite → field condition</a:t>
-            </a:r>
-          </a:p>
-          <a:p>
-            <a:pPr>
-              <a:spcAft>
-                <a:spcPts val="500"/>
-              </a:spcAft>
-              <a:defRPr sz="1100">
-                <a:solidFill>
-                  <a:srgbClr val="13302B"/>
-                </a:solidFill>
-              </a:defRPr>
-            </a:pPr>
-            <a:r>
-              <a:t>Weather + Soil + Crop Calendar → context</a:t>
-            </a:r>
-          </a:p>
-          <a:p>
-            <a:pPr>
-              <a:spcAft>
-                <a:spcPts val="500"/>
-              </a:spcAft>
-              <a:defRPr sz="1100">
-                <a:solidFill>
-                  <a:srgbClr val="13302B"/>
-                </a:solidFill>
-              </a:defRPr>
-            </a:pPr>
-            <a:r>
-              <a:t>AquaCrop → crop growth / biomass / ET / water balance / yield</a:t>
-            </a:r>
-          </a:p>
-          <a:p>
-            <a:pPr>
-              <a:spcAft>
-                <a:spcPts val="500"/>
-              </a:spcAft>
-              <a:defRPr sz="1100">
-                <a:solidFill>
-                  <a:srgbClr val="13302B"/>
-                </a:solidFill>
-              </a:defRPr>
-            </a:pPr>
-            <a:r>
-              <a:t>Scenario Engine → flood / drought / heat / irrigation / harvest</a:t>
-            </a:r>
-          </a:p>
-          <a:p>
-            <a:pPr>
-              <a:spcAft>
-                <a:spcPts val="500"/>
-              </a:spcAft>
-              <a:defRPr sz="1100">
-                <a:solidFill>
-                  <a:srgbClr val="13302B"/>
-                </a:solidFill>
-              </a:defRPr>
-            </a:pPr>
-            <a:r>
-              <a:t>Action Layer → priority / alert / dashboard / API</a:t>
-            </a:r>
-          </a:p>
-          <a:p>
-            <a:pPr>
-              <a:spcAft>
-                <a:spcPts val="500"/>
-              </a:spcAft>
-              <a:defRPr sz="1100">
-                <a:solidFill>
-                  <a:srgbClr val="13302B"/>
-                </a:solidFill>
-              </a:defRPr>
-            </a:pPr>
-          </a:p>
-          <a:p>
-            <a:pPr>
-              <a:spcAft>
-                <a:spcPts val="500"/>
-              </a:spcAft>
-              <a:defRPr sz="1100">
-                <a:solidFill>
-                  <a:srgbClr val="13302B"/>
-                </a:solidFill>
-              </a:defRPr>
-            </a:pPr>
-            <a:r>
-              <a:t>This moves BDCrops beyond conventional GIS.</a:t>
+              <a:lnSpc>
+                <a:spcPct val="130000"/>
+              </a:lnSpc>
+              <a:spcAft>
+                <a:spcPts val="1000"/>
+              </a:spcAft>
+              <a:defRPr sz="1400">
+                <a:solidFill>
+                  <a:srgbClr val="13302B"/>
+                </a:solidFill>
+              </a:defRPr>
+            </a:pPr>
+            <a:r>
+              <a:t>• BRRI dhan47 — Working Prototype — Live: /images/aquacrop/dashboard.png</a:t>
+            </a:r>
+          </a:p>
+          <a:p>
+            <a:pPr>
+              <a:lnSpc>
+                <a:spcPct val="130000"/>
+              </a:lnSpc>
+              <a:spcAft>
+                <a:spcPts val="1000"/>
+              </a:spcAft>
+              <a:defRPr sz="1400">
+                <a:solidFill>
+                  <a:srgbClr val="13302B"/>
+                </a:solidFill>
+              </a:defRPr>
+            </a:pPr>
+            <a:r>
+              <a:t>• Prototype outputs (not certified forecast — preliminary):</a:t>
+            </a:r>
+          </a:p>
+          <a:p>
+            <a:pPr>
+              <a:lnSpc>
+                <a:spcPct val="130000"/>
+              </a:lnSpc>
+              <a:spcAft>
+                <a:spcPts val="1000"/>
+              </a:spcAft>
+              <a:defRPr sz="1400">
+                <a:solidFill>
+                  <a:srgbClr val="13302B"/>
+                </a:solidFill>
+              </a:defRPr>
+            </a:pPr>
+            <a:r>
+              <a:t>• 5.80 t/ha Simulated yield | 77/100 Field-health | 0.2% Water-stress</a:t>
+            </a:r>
+          </a:p>
+          <a:p>
+            <a:pPr>
+              <a:lnSpc>
+                <a:spcPct val="130000"/>
+              </a:lnSpc>
+              <a:spcAft>
+                <a:spcPts val="1000"/>
+              </a:spcAft>
+              <a:defRPr sz="1400">
+                <a:solidFill>
+                  <a:srgbClr val="13302B"/>
+                </a:solidFill>
+              </a:defRPr>
+            </a:pPr>
+            <a:r>
+              <a:t>• Flood scenarios: -24% 2-day, -60% 5-day, -84% 7-day modeled loss</a:t>
+            </a:r>
+          </a:p>
+          <a:p>
+            <a:pPr>
+              <a:lnSpc>
+                <a:spcPct val="130000"/>
+              </a:lnSpc>
+              <a:spcAft>
+                <a:spcPts val="1000"/>
+              </a:spcAft>
+              <a:defRPr sz="1400">
+                <a:solidFill>
+                  <a:srgbClr val="13302B"/>
+                </a:solidFill>
+              </a:defRPr>
+            </a:pPr>
+            <a:r>
+              <a:t>• Investor message: Built workflow satellite+crop+environment → scenario decisions</a:t>
             </a:r>
           </a:p>
         </p:txBody>
